--- a/writing/motorVAEGAN-architecture.pptx
+++ b/writing/motorVAEGAN-architecture.pptx
@@ -2,12 +2,15 @@
 <file path=ppt/presentation.xml><?xml version="1.0" encoding="utf-8"?>
 <p:presentation xmlns:a="http://schemas.openxmlformats.org/drawingml/2006/main" xmlns:r="http://schemas.openxmlformats.org/officeDocument/2006/relationships" xmlns:p="http://schemas.openxmlformats.org/presentationml/2006/main" saveSubsetFonts="1" autoCompressPictures="0">
   <p:sldMasterIdLst>
-    <p:sldMasterId id="2147483672" r:id="rId1"/>
+    <p:sldMasterId id="2147483684" r:id="rId1"/>
   </p:sldMasterIdLst>
+  <p:notesMasterIdLst>
+    <p:notesMasterId r:id="rId3"/>
+  </p:notesMasterIdLst>
   <p:sldIdLst>
     <p:sldId id="258" r:id="rId2"/>
   </p:sldIdLst>
-  <p:sldSz cx="13716000" cy="5943600"/>
+  <p:sldSz cx="13716000" cy="6172200"/>
   <p:notesSz cx="6858000" cy="9144000"/>
   <p:defaultTextStyle>
     <a:defPPr>
@@ -112,6 +115,444 @@
 </p:presentation>
 </file>
 
+<file path=ppt/notesMasters/notesMaster1.xml><?xml version="1.0" encoding="utf-8"?>
+<p:notesMaster xmlns:a="http://schemas.openxmlformats.org/drawingml/2006/main" xmlns:r="http://schemas.openxmlformats.org/officeDocument/2006/relationships" xmlns:p="http://schemas.openxmlformats.org/presentationml/2006/main">
+  <p:cSld>
+    <p:bg>
+      <p:bgRef idx="1001">
+        <a:schemeClr val="bg1"/>
+      </p:bgRef>
+    </p:bg>
+    <p:spTree>
+      <p:nvGrpSpPr>
+        <p:cNvPr id="1" name=""/>
+        <p:cNvGrpSpPr/>
+        <p:nvPr/>
+      </p:nvGrpSpPr>
+      <p:grpSpPr>
+        <a:xfrm>
+          <a:off x="0" y="0"/>
+          <a:ext cx="0" cy="0"/>
+          <a:chOff x="0" y="0"/>
+          <a:chExt cx="0" cy="0"/>
+        </a:xfrm>
+      </p:grpSpPr>
+      <p:sp>
+        <p:nvSpPr>
+          <p:cNvPr id="2" name="Header Placeholder 1"/>
+          <p:cNvSpPr>
+            <a:spLocks noGrp="1"/>
+          </p:cNvSpPr>
+          <p:nvPr>
+            <p:ph type="hdr" sz="quarter"/>
+          </p:nvPr>
+        </p:nvSpPr>
+        <p:spPr>
+          <a:xfrm>
+            <a:off x="0" y="0"/>
+            <a:ext cx="2971800" cy="458788"/>
+          </a:xfrm>
+          <a:prstGeom prst="rect">
+            <a:avLst/>
+          </a:prstGeom>
+        </p:spPr>
+        <p:txBody>
+          <a:bodyPr vert="horz" lIns="91440" tIns="45720" rIns="91440" bIns="45720" rtlCol="0"/>
+          <a:lstStyle>
+            <a:lvl1pPr algn="l">
+              <a:defRPr sz="1200"/>
+            </a:lvl1pPr>
+          </a:lstStyle>
+          <a:p>
+            <a:endParaRPr lang="en-US"/>
+          </a:p>
+        </p:txBody>
+      </p:sp>
+      <p:sp>
+        <p:nvSpPr>
+          <p:cNvPr id="3" name="Date Placeholder 2"/>
+          <p:cNvSpPr>
+            <a:spLocks noGrp="1"/>
+          </p:cNvSpPr>
+          <p:nvPr>
+            <p:ph type="dt" idx="1"/>
+          </p:nvPr>
+        </p:nvSpPr>
+        <p:spPr>
+          <a:xfrm>
+            <a:off x="3884613" y="0"/>
+            <a:ext cx="2971800" cy="458788"/>
+          </a:xfrm>
+          <a:prstGeom prst="rect">
+            <a:avLst/>
+          </a:prstGeom>
+        </p:spPr>
+        <p:txBody>
+          <a:bodyPr vert="horz" lIns="91440" tIns="45720" rIns="91440" bIns="45720" rtlCol="0"/>
+          <a:lstStyle>
+            <a:lvl1pPr algn="r">
+              <a:defRPr sz="1200"/>
+            </a:lvl1pPr>
+          </a:lstStyle>
+          <a:p>
+            <a:fld id="{7439EC76-433C-784E-AD31-1634F419B4DC}" type="datetimeFigureOut">
+              <a:rPr lang="en-US" smtClean="0"/>
+              <a:t>4/21/25</a:t>
+            </a:fld>
+            <a:endParaRPr lang="en-US"/>
+          </a:p>
+        </p:txBody>
+      </p:sp>
+      <p:sp>
+        <p:nvSpPr>
+          <p:cNvPr id="4" name="Slide Image Placeholder 3"/>
+          <p:cNvSpPr>
+            <a:spLocks noGrp="1" noRot="1" noChangeAspect="1"/>
+          </p:cNvSpPr>
+          <p:nvPr>
+            <p:ph type="sldImg" idx="2"/>
+          </p:nvPr>
+        </p:nvSpPr>
+        <p:spPr>
+          <a:xfrm>
+            <a:off x="0" y="1143000"/>
+            <a:ext cx="6858000" cy="3086100"/>
+          </a:xfrm>
+          <a:prstGeom prst="rect">
+            <a:avLst/>
+          </a:prstGeom>
+          <a:noFill/>
+          <a:ln w="12700">
+            <a:solidFill>
+              <a:prstClr val="black"/>
+            </a:solidFill>
+          </a:ln>
+        </p:spPr>
+        <p:txBody>
+          <a:bodyPr vert="horz" lIns="91440" tIns="45720" rIns="91440" bIns="45720" rtlCol="0" anchor="ctr"/>
+          <a:lstStyle/>
+          <a:p>
+            <a:endParaRPr lang="en-US"/>
+          </a:p>
+        </p:txBody>
+      </p:sp>
+      <p:sp>
+        <p:nvSpPr>
+          <p:cNvPr id="5" name="Notes Placeholder 4"/>
+          <p:cNvSpPr>
+            <a:spLocks noGrp="1"/>
+          </p:cNvSpPr>
+          <p:nvPr>
+            <p:ph type="body" sz="quarter" idx="3"/>
+          </p:nvPr>
+        </p:nvSpPr>
+        <p:spPr>
+          <a:xfrm>
+            <a:off x="685800" y="4400550"/>
+            <a:ext cx="5486400" cy="3600450"/>
+          </a:xfrm>
+          <a:prstGeom prst="rect">
+            <a:avLst/>
+          </a:prstGeom>
+        </p:spPr>
+        <p:txBody>
+          <a:bodyPr vert="horz" lIns="91440" tIns="45720" rIns="91440" bIns="45720" rtlCol="0"/>
+          <a:lstStyle/>
+          <a:p>
+            <a:pPr lvl="0"/>
+            <a:r>
+              <a:rPr lang="en-US"/>
+              <a:t>Click to edit Master text styles</a:t>
+            </a:r>
+          </a:p>
+          <a:p>
+            <a:pPr lvl="1"/>
+            <a:r>
+              <a:rPr lang="en-US"/>
+              <a:t>Second level</a:t>
+            </a:r>
+          </a:p>
+          <a:p>
+            <a:pPr lvl="2"/>
+            <a:r>
+              <a:rPr lang="en-US"/>
+              <a:t>Third level</a:t>
+            </a:r>
+          </a:p>
+          <a:p>
+            <a:pPr lvl="3"/>
+            <a:r>
+              <a:rPr lang="en-US"/>
+              <a:t>Fourth level</a:t>
+            </a:r>
+          </a:p>
+          <a:p>
+            <a:pPr lvl="4"/>
+            <a:r>
+              <a:rPr lang="en-US"/>
+              <a:t>Fifth level</a:t>
+            </a:r>
+          </a:p>
+        </p:txBody>
+      </p:sp>
+      <p:sp>
+        <p:nvSpPr>
+          <p:cNvPr id="6" name="Footer Placeholder 5"/>
+          <p:cNvSpPr>
+            <a:spLocks noGrp="1"/>
+          </p:cNvSpPr>
+          <p:nvPr>
+            <p:ph type="ftr" sz="quarter" idx="4"/>
+          </p:nvPr>
+        </p:nvSpPr>
+        <p:spPr>
+          <a:xfrm>
+            <a:off x="0" y="8685213"/>
+            <a:ext cx="2971800" cy="458787"/>
+          </a:xfrm>
+          <a:prstGeom prst="rect">
+            <a:avLst/>
+          </a:prstGeom>
+        </p:spPr>
+        <p:txBody>
+          <a:bodyPr vert="horz" lIns="91440" tIns="45720" rIns="91440" bIns="45720" rtlCol="0" anchor="b"/>
+          <a:lstStyle>
+            <a:lvl1pPr algn="l">
+              <a:defRPr sz="1200"/>
+            </a:lvl1pPr>
+          </a:lstStyle>
+          <a:p>
+            <a:endParaRPr lang="en-US"/>
+          </a:p>
+        </p:txBody>
+      </p:sp>
+      <p:sp>
+        <p:nvSpPr>
+          <p:cNvPr id="7" name="Slide Number Placeholder 6"/>
+          <p:cNvSpPr>
+            <a:spLocks noGrp="1"/>
+          </p:cNvSpPr>
+          <p:nvPr>
+            <p:ph type="sldNum" sz="quarter" idx="5"/>
+          </p:nvPr>
+        </p:nvSpPr>
+        <p:spPr>
+          <a:xfrm>
+            <a:off x="3884613" y="8685213"/>
+            <a:ext cx="2971800" cy="458787"/>
+          </a:xfrm>
+          <a:prstGeom prst="rect">
+            <a:avLst/>
+          </a:prstGeom>
+        </p:spPr>
+        <p:txBody>
+          <a:bodyPr vert="horz" lIns="91440" tIns="45720" rIns="91440" bIns="45720" rtlCol="0" anchor="b"/>
+          <a:lstStyle>
+            <a:lvl1pPr algn="r">
+              <a:defRPr sz="1200"/>
+            </a:lvl1pPr>
+          </a:lstStyle>
+          <a:p>
+            <a:fld id="{88C40E42-1A6C-0B4F-B52E-58374DBE530E}" type="slidenum">
+              <a:rPr lang="en-US" smtClean="0"/>
+              <a:t>‹#›</a:t>
+            </a:fld>
+            <a:endParaRPr lang="en-US"/>
+          </a:p>
+        </p:txBody>
+      </p:sp>
+    </p:spTree>
+    <p:extLst>
+      <p:ext uri="{BB962C8B-B14F-4D97-AF65-F5344CB8AC3E}">
+        <p14:creationId xmlns:p14="http://schemas.microsoft.com/office/powerpoint/2010/main" val="1980883737"/>
+      </p:ext>
+    </p:extLst>
+  </p:cSld>
+  <p:clrMap bg1="lt1" tx1="dk1" bg2="lt2" tx2="dk2" accent1="accent1" accent2="accent2" accent3="accent3" accent4="accent4" accent5="accent5" accent6="accent6" hlink="hlink" folHlink="folHlink"/>
+  <p:notesStyle>
+    <a:lvl1pPr marL="0" algn="l" defTabSz="914400" rtl="0" eaLnBrk="1" latinLnBrk="0" hangingPunct="1">
+      <a:defRPr sz="1200" kern="1200">
+        <a:solidFill>
+          <a:schemeClr val="tx1"/>
+        </a:solidFill>
+        <a:latin typeface="+mn-lt"/>
+        <a:ea typeface="+mn-ea"/>
+        <a:cs typeface="+mn-cs"/>
+      </a:defRPr>
+    </a:lvl1pPr>
+    <a:lvl2pPr marL="457200" algn="l" defTabSz="914400" rtl="0" eaLnBrk="1" latinLnBrk="0" hangingPunct="1">
+      <a:defRPr sz="1200" kern="1200">
+        <a:solidFill>
+          <a:schemeClr val="tx1"/>
+        </a:solidFill>
+        <a:latin typeface="+mn-lt"/>
+        <a:ea typeface="+mn-ea"/>
+        <a:cs typeface="+mn-cs"/>
+      </a:defRPr>
+    </a:lvl2pPr>
+    <a:lvl3pPr marL="914400" algn="l" defTabSz="914400" rtl="0" eaLnBrk="1" latinLnBrk="0" hangingPunct="1">
+      <a:defRPr sz="1200" kern="1200">
+        <a:solidFill>
+          <a:schemeClr val="tx1"/>
+        </a:solidFill>
+        <a:latin typeface="+mn-lt"/>
+        <a:ea typeface="+mn-ea"/>
+        <a:cs typeface="+mn-cs"/>
+      </a:defRPr>
+    </a:lvl3pPr>
+    <a:lvl4pPr marL="1371600" algn="l" defTabSz="914400" rtl="0" eaLnBrk="1" latinLnBrk="0" hangingPunct="1">
+      <a:defRPr sz="1200" kern="1200">
+        <a:solidFill>
+          <a:schemeClr val="tx1"/>
+        </a:solidFill>
+        <a:latin typeface="+mn-lt"/>
+        <a:ea typeface="+mn-ea"/>
+        <a:cs typeface="+mn-cs"/>
+      </a:defRPr>
+    </a:lvl4pPr>
+    <a:lvl5pPr marL="1828800" algn="l" defTabSz="914400" rtl="0" eaLnBrk="1" latinLnBrk="0" hangingPunct="1">
+      <a:defRPr sz="1200" kern="1200">
+        <a:solidFill>
+          <a:schemeClr val="tx1"/>
+        </a:solidFill>
+        <a:latin typeface="+mn-lt"/>
+        <a:ea typeface="+mn-ea"/>
+        <a:cs typeface="+mn-cs"/>
+      </a:defRPr>
+    </a:lvl5pPr>
+    <a:lvl6pPr marL="2286000" algn="l" defTabSz="914400" rtl="0" eaLnBrk="1" latinLnBrk="0" hangingPunct="1">
+      <a:defRPr sz="1200" kern="1200">
+        <a:solidFill>
+          <a:schemeClr val="tx1"/>
+        </a:solidFill>
+        <a:latin typeface="+mn-lt"/>
+        <a:ea typeface="+mn-ea"/>
+        <a:cs typeface="+mn-cs"/>
+      </a:defRPr>
+    </a:lvl6pPr>
+    <a:lvl7pPr marL="2743200" algn="l" defTabSz="914400" rtl="0" eaLnBrk="1" latinLnBrk="0" hangingPunct="1">
+      <a:defRPr sz="1200" kern="1200">
+        <a:solidFill>
+          <a:schemeClr val="tx1"/>
+        </a:solidFill>
+        <a:latin typeface="+mn-lt"/>
+        <a:ea typeface="+mn-ea"/>
+        <a:cs typeface="+mn-cs"/>
+      </a:defRPr>
+    </a:lvl7pPr>
+    <a:lvl8pPr marL="3200400" algn="l" defTabSz="914400" rtl="0" eaLnBrk="1" latinLnBrk="0" hangingPunct="1">
+      <a:defRPr sz="1200" kern="1200">
+        <a:solidFill>
+          <a:schemeClr val="tx1"/>
+        </a:solidFill>
+        <a:latin typeface="+mn-lt"/>
+        <a:ea typeface="+mn-ea"/>
+        <a:cs typeface="+mn-cs"/>
+      </a:defRPr>
+    </a:lvl8pPr>
+    <a:lvl9pPr marL="3657600" algn="l" defTabSz="914400" rtl="0" eaLnBrk="1" latinLnBrk="0" hangingPunct="1">
+      <a:defRPr sz="1200" kern="1200">
+        <a:solidFill>
+          <a:schemeClr val="tx1"/>
+        </a:solidFill>
+        <a:latin typeface="+mn-lt"/>
+        <a:ea typeface="+mn-ea"/>
+        <a:cs typeface="+mn-cs"/>
+      </a:defRPr>
+    </a:lvl9pPr>
+  </p:notesStyle>
+</p:notesMaster>
+</file>
+
+<file path=ppt/notesSlides/notesSlide1.xml><?xml version="1.0" encoding="utf-8"?>
+<p:notes xmlns:a="http://schemas.openxmlformats.org/drawingml/2006/main" xmlns:r="http://schemas.openxmlformats.org/officeDocument/2006/relationships" xmlns:p="http://schemas.openxmlformats.org/presentationml/2006/main">
+  <p:cSld>
+    <p:spTree>
+      <p:nvGrpSpPr>
+        <p:cNvPr id="1" name=""/>
+        <p:cNvGrpSpPr/>
+        <p:nvPr/>
+      </p:nvGrpSpPr>
+      <p:grpSpPr>
+        <a:xfrm>
+          <a:off x="0" y="0"/>
+          <a:ext cx="0" cy="0"/>
+          <a:chOff x="0" y="0"/>
+          <a:chExt cx="0" cy="0"/>
+        </a:xfrm>
+      </p:grpSpPr>
+      <p:sp>
+        <p:nvSpPr>
+          <p:cNvPr id="2" name="Slide Image Placeholder 1"/>
+          <p:cNvSpPr>
+            <a:spLocks noGrp="1" noRot="1" noChangeAspect="1"/>
+          </p:cNvSpPr>
+          <p:nvPr>
+            <p:ph type="sldImg"/>
+          </p:nvPr>
+        </p:nvSpPr>
+        <p:spPr>
+          <a:xfrm>
+            <a:off x="0" y="1143000"/>
+            <a:ext cx="6858000" cy="3086100"/>
+          </a:xfrm>
+        </p:spPr>
+      </p:sp>
+      <p:sp>
+        <p:nvSpPr>
+          <p:cNvPr id="3" name="Notes Placeholder 2"/>
+          <p:cNvSpPr>
+            <a:spLocks noGrp="1"/>
+          </p:cNvSpPr>
+          <p:nvPr>
+            <p:ph type="body" idx="1"/>
+          </p:nvPr>
+        </p:nvSpPr>
+        <p:spPr/>
+        <p:txBody>
+          <a:bodyPr/>
+          <a:lstStyle/>
+          <a:p>
+            <a:endParaRPr lang="en-US" dirty="0"/>
+          </a:p>
+        </p:txBody>
+      </p:sp>
+      <p:sp>
+        <p:nvSpPr>
+          <p:cNvPr id="4" name="Slide Number Placeholder 3"/>
+          <p:cNvSpPr>
+            <a:spLocks noGrp="1"/>
+          </p:cNvSpPr>
+          <p:nvPr>
+            <p:ph type="sldNum" sz="quarter" idx="5"/>
+          </p:nvPr>
+        </p:nvSpPr>
+        <p:spPr/>
+        <p:txBody>
+          <a:bodyPr/>
+          <a:lstStyle/>
+          <a:p>
+            <a:fld id="{88C40E42-1A6C-0B4F-B52E-58374DBE530E}" type="slidenum">
+              <a:rPr lang="en-US" smtClean="0"/>
+              <a:t>1</a:t>
+            </a:fld>
+            <a:endParaRPr lang="en-US"/>
+          </a:p>
+        </p:txBody>
+      </p:sp>
+    </p:spTree>
+    <p:extLst>
+      <p:ext uri="{BB962C8B-B14F-4D97-AF65-F5344CB8AC3E}">
+        <p14:creationId xmlns:p14="http://schemas.microsoft.com/office/powerpoint/2010/main" val="1103694124"/>
+      </p:ext>
+    </p:extLst>
+  </p:cSld>
+  <p:clrMapOvr>
+    <a:masterClrMapping/>
+  </p:clrMapOvr>
+</p:notes>
+</file>
+
 <file path=ppt/slideLayouts/slideLayout1.xml><?xml version="1.0" encoding="utf-8"?>
 <p:sldLayout xmlns:a="http://schemas.openxmlformats.org/drawingml/2006/main" xmlns:r="http://schemas.openxmlformats.org/officeDocument/2006/relationships" xmlns:p="http://schemas.openxmlformats.org/presentationml/2006/main" type="title" preserve="1">
   <p:cSld name="Title Slide">
@@ -141,15 +582,15 @@
         </p:nvSpPr>
         <p:spPr>
           <a:xfrm>
-            <a:off x="1714500" y="972715"/>
-            <a:ext cx="10287000" cy="2069253"/>
+            <a:off x="1714500" y="1010127"/>
+            <a:ext cx="10287000" cy="2148840"/>
           </a:xfrm>
         </p:spPr>
         <p:txBody>
           <a:bodyPr anchor="b"/>
           <a:lstStyle>
             <a:lvl1pPr algn="ctr">
-              <a:defRPr sz="5200"/>
+              <a:defRPr sz="5400"/>
             </a:lvl1pPr>
           </a:lstStyle>
           <a:p>
@@ -173,8 +614,8 @@
         </p:nvSpPr>
         <p:spPr>
           <a:xfrm>
-            <a:off x="1714500" y="3121766"/>
-            <a:ext cx="10287000" cy="1434994"/>
+            <a:off x="1714500" y="3241834"/>
+            <a:ext cx="10287000" cy="1490186"/>
           </a:xfrm>
         </p:spPr>
         <p:txBody>
@@ -182,39 +623,39 @@
           <a:lstStyle>
             <a:lvl1pPr marL="0" indent="0" algn="ctr">
               <a:buNone/>
-              <a:defRPr sz="2080"/>
+              <a:defRPr sz="2160"/>
             </a:lvl1pPr>
-            <a:lvl2pPr marL="396255" indent="0" algn="ctr">
+            <a:lvl2pPr marL="411480" indent="0" algn="ctr">
               <a:buNone/>
-              <a:defRPr sz="1733"/>
+              <a:defRPr sz="1800"/>
             </a:lvl2pPr>
-            <a:lvl3pPr marL="792510" indent="0" algn="ctr">
+            <a:lvl3pPr marL="822960" indent="0" algn="ctr">
               <a:buNone/>
-              <a:defRPr sz="1560"/>
+              <a:defRPr sz="1620"/>
             </a:lvl3pPr>
-            <a:lvl4pPr marL="1188766" indent="0" algn="ctr">
+            <a:lvl4pPr marL="1234440" indent="0" algn="ctr">
               <a:buNone/>
-              <a:defRPr sz="1387"/>
+              <a:defRPr sz="1440"/>
             </a:lvl4pPr>
-            <a:lvl5pPr marL="1585021" indent="0" algn="ctr">
+            <a:lvl5pPr marL="1645920" indent="0" algn="ctr">
               <a:buNone/>
-              <a:defRPr sz="1387"/>
+              <a:defRPr sz="1440"/>
             </a:lvl5pPr>
-            <a:lvl6pPr marL="1981276" indent="0" algn="ctr">
+            <a:lvl6pPr marL="2057400" indent="0" algn="ctr">
               <a:buNone/>
-              <a:defRPr sz="1387"/>
+              <a:defRPr sz="1440"/>
             </a:lvl6pPr>
-            <a:lvl7pPr marL="2377531" indent="0" algn="ctr">
+            <a:lvl7pPr marL="2468880" indent="0" algn="ctr">
               <a:buNone/>
-              <a:defRPr sz="1387"/>
+              <a:defRPr sz="1440"/>
             </a:lvl7pPr>
-            <a:lvl8pPr marL="2773787" indent="0" algn="ctr">
+            <a:lvl8pPr marL="2880360" indent="0" algn="ctr">
               <a:buNone/>
-              <a:defRPr sz="1387"/>
+              <a:defRPr sz="1440"/>
             </a:lvl8pPr>
-            <a:lvl9pPr marL="3170042" indent="0" algn="ctr">
+            <a:lvl9pPr marL="3291840" indent="0" algn="ctr">
               <a:buNone/>
-              <a:defRPr sz="1387"/>
+              <a:defRPr sz="1440"/>
             </a:lvl9pPr>
           </a:lstStyle>
           <a:p>
@@ -243,7 +684,7 @@
           <a:p>
             <a:fld id="{29EDA66B-131B-3A46-A334-2272A02F8BDA}" type="datetimeFigureOut">
               <a:rPr lang="en-US" smtClean="0"/>
-              <a:t>4/10/25</a:t>
+              <a:t>4/21/25</a:t>
             </a:fld>
             <a:endParaRPr lang="en-US"/>
           </a:p>
@@ -294,7 +735,7 @@
     </p:spTree>
     <p:extLst>
       <p:ext uri="{BB962C8B-B14F-4D97-AF65-F5344CB8AC3E}">
-        <p14:creationId xmlns:p14="http://schemas.microsoft.com/office/powerpoint/2010/main" val="1163752347"/>
+        <p14:creationId xmlns:p14="http://schemas.microsoft.com/office/powerpoint/2010/main" val="1204449395"/>
       </p:ext>
     </p:extLst>
   </p:cSld>
@@ -413,7 +854,7 @@
           <a:p>
             <a:fld id="{29EDA66B-131B-3A46-A334-2272A02F8BDA}" type="datetimeFigureOut">
               <a:rPr lang="en-US" smtClean="0"/>
-              <a:t>4/10/25</a:t>
+              <a:t>4/21/25</a:t>
             </a:fld>
             <a:endParaRPr lang="en-US"/>
           </a:p>
@@ -464,7 +905,7 @@
     </p:spTree>
     <p:extLst>
       <p:ext uri="{BB962C8B-B14F-4D97-AF65-F5344CB8AC3E}">
-        <p14:creationId xmlns:p14="http://schemas.microsoft.com/office/powerpoint/2010/main" val="3635980161"/>
+        <p14:creationId xmlns:p14="http://schemas.microsoft.com/office/powerpoint/2010/main" val="370891670"/>
       </p:ext>
     </p:extLst>
   </p:cSld>
@@ -503,8 +944,8 @@
         </p:nvSpPr>
         <p:spPr>
           <a:xfrm>
-            <a:off x="9815512" y="316442"/>
-            <a:ext cx="2957513" cy="5036926"/>
+            <a:off x="9815512" y="328613"/>
+            <a:ext cx="2957513" cy="5230654"/>
           </a:xfrm>
         </p:spPr>
         <p:txBody>
@@ -531,8 +972,8 @@
         </p:nvSpPr>
         <p:spPr>
           <a:xfrm>
-            <a:off x="942975" y="316442"/>
-            <a:ext cx="8701088" cy="5036926"/>
+            <a:off x="942975" y="328613"/>
+            <a:ext cx="8701088" cy="5230654"/>
           </a:xfrm>
         </p:spPr>
         <p:txBody>
@@ -593,7 +1034,7 @@
           <a:p>
             <a:fld id="{29EDA66B-131B-3A46-A334-2272A02F8BDA}" type="datetimeFigureOut">
               <a:rPr lang="en-US" smtClean="0"/>
-              <a:t>4/10/25</a:t>
+              <a:t>4/21/25</a:t>
             </a:fld>
             <a:endParaRPr lang="en-US"/>
           </a:p>
@@ -644,7 +1085,7 @@
     </p:spTree>
     <p:extLst>
       <p:ext uri="{BB962C8B-B14F-4D97-AF65-F5344CB8AC3E}">
-        <p14:creationId xmlns:p14="http://schemas.microsoft.com/office/powerpoint/2010/main" val="4125064208"/>
+        <p14:creationId xmlns:p14="http://schemas.microsoft.com/office/powerpoint/2010/main" val="49917949"/>
       </p:ext>
     </p:extLst>
   </p:cSld>
@@ -763,7 +1204,7 @@
           <a:p>
             <a:fld id="{29EDA66B-131B-3A46-A334-2272A02F8BDA}" type="datetimeFigureOut">
               <a:rPr lang="en-US" smtClean="0"/>
-              <a:t>4/10/25</a:t>
+              <a:t>4/21/25</a:t>
             </a:fld>
             <a:endParaRPr lang="en-US"/>
           </a:p>
@@ -814,7 +1255,7 @@
     </p:spTree>
     <p:extLst>
       <p:ext uri="{BB962C8B-B14F-4D97-AF65-F5344CB8AC3E}">
-        <p14:creationId xmlns:p14="http://schemas.microsoft.com/office/powerpoint/2010/main" val="744177879"/>
+        <p14:creationId xmlns:p14="http://schemas.microsoft.com/office/powerpoint/2010/main" val="1386519427"/>
       </p:ext>
     </p:extLst>
   </p:cSld>
@@ -853,15 +1294,15 @@
         </p:nvSpPr>
         <p:spPr>
           <a:xfrm>
-            <a:off x="935831" y="1481773"/>
-            <a:ext cx="11830050" cy="2472372"/>
+            <a:off x="935831" y="1538765"/>
+            <a:ext cx="11830050" cy="2567463"/>
           </a:xfrm>
         </p:spPr>
         <p:txBody>
           <a:bodyPr anchor="b"/>
           <a:lstStyle>
             <a:lvl1pPr>
-              <a:defRPr sz="5200"/>
+              <a:defRPr sz="5400"/>
             </a:lvl1pPr>
           </a:lstStyle>
           <a:p>
@@ -885,8 +1326,8 @@
         </p:nvSpPr>
         <p:spPr>
           <a:xfrm>
-            <a:off x="935831" y="3977535"/>
-            <a:ext cx="11830050" cy="1300162"/>
+            <a:off x="935831" y="4130517"/>
+            <a:ext cx="11830050" cy="1350168"/>
           </a:xfrm>
         </p:spPr>
         <p:txBody>
@@ -894,7 +1335,7 @@
           <a:lstStyle>
             <a:lvl1pPr marL="0" indent="0">
               <a:buNone/>
-              <a:defRPr sz="2080">
+              <a:defRPr sz="2160">
                 <a:solidFill>
                   <a:schemeClr val="tx1">
                     <a:tint val="82000"/>
@@ -902,9 +1343,9 @@
                 </a:solidFill>
               </a:defRPr>
             </a:lvl1pPr>
-            <a:lvl2pPr marL="396255" indent="0">
+            <a:lvl2pPr marL="411480" indent="0">
               <a:buNone/>
-              <a:defRPr sz="1733">
+              <a:defRPr sz="1800">
                 <a:solidFill>
                   <a:schemeClr val="tx1">
                     <a:tint val="82000"/>
@@ -912,9 +1353,9 @@
                 </a:solidFill>
               </a:defRPr>
             </a:lvl2pPr>
-            <a:lvl3pPr marL="792510" indent="0">
+            <a:lvl3pPr marL="822960" indent="0">
               <a:buNone/>
-              <a:defRPr sz="1560">
+              <a:defRPr sz="1620">
                 <a:solidFill>
                   <a:schemeClr val="tx1">
                     <a:tint val="82000"/>
@@ -922,9 +1363,9 @@
                 </a:solidFill>
               </a:defRPr>
             </a:lvl3pPr>
-            <a:lvl4pPr marL="1188766" indent="0">
+            <a:lvl4pPr marL="1234440" indent="0">
               <a:buNone/>
-              <a:defRPr sz="1387">
+              <a:defRPr sz="1440">
                 <a:solidFill>
                   <a:schemeClr val="tx1">
                     <a:tint val="82000"/>
@@ -932,9 +1373,9 @@
                 </a:solidFill>
               </a:defRPr>
             </a:lvl4pPr>
-            <a:lvl5pPr marL="1585021" indent="0">
+            <a:lvl5pPr marL="1645920" indent="0">
               <a:buNone/>
-              <a:defRPr sz="1387">
+              <a:defRPr sz="1440">
                 <a:solidFill>
                   <a:schemeClr val="tx1">
                     <a:tint val="82000"/>
@@ -942,9 +1383,9 @@
                 </a:solidFill>
               </a:defRPr>
             </a:lvl5pPr>
-            <a:lvl6pPr marL="1981276" indent="0">
+            <a:lvl6pPr marL="2057400" indent="0">
               <a:buNone/>
-              <a:defRPr sz="1387">
+              <a:defRPr sz="1440">
                 <a:solidFill>
                   <a:schemeClr val="tx1">
                     <a:tint val="82000"/>
@@ -952,9 +1393,9 @@
                 </a:solidFill>
               </a:defRPr>
             </a:lvl6pPr>
-            <a:lvl7pPr marL="2377531" indent="0">
+            <a:lvl7pPr marL="2468880" indent="0">
               <a:buNone/>
-              <a:defRPr sz="1387">
+              <a:defRPr sz="1440">
                 <a:solidFill>
                   <a:schemeClr val="tx1">
                     <a:tint val="82000"/>
@@ -962,9 +1403,9 @@
                 </a:solidFill>
               </a:defRPr>
             </a:lvl7pPr>
-            <a:lvl8pPr marL="2773787" indent="0">
+            <a:lvl8pPr marL="2880360" indent="0">
               <a:buNone/>
-              <a:defRPr sz="1387">
+              <a:defRPr sz="1440">
                 <a:solidFill>
                   <a:schemeClr val="tx1">
                     <a:tint val="82000"/>
@@ -972,9 +1413,9 @@
                 </a:solidFill>
               </a:defRPr>
             </a:lvl8pPr>
-            <a:lvl9pPr marL="3170042" indent="0">
+            <a:lvl9pPr marL="3291840" indent="0">
               <a:buNone/>
-              <a:defRPr sz="1387">
+              <a:defRPr sz="1440">
                 <a:solidFill>
                   <a:schemeClr val="tx1">
                     <a:tint val="82000"/>
@@ -1009,7 +1450,7 @@
           <a:p>
             <a:fld id="{29EDA66B-131B-3A46-A334-2272A02F8BDA}" type="datetimeFigureOut">
               <a:rPr lang="en-US" smtClean="0"/>
-              <a:t>4/10/25</a:t>
+              <a:t>4/21/25</a:t>
             </a:fld>
             <a:endParaRPr lang="en-US"/>
           </a:p>
@@ -1060,7 +1501,7 @@
     </p:spTree>
     <p:extLst>
       <p:ext uri="{BB962C8B-B14F-4D97-AF65-F5344CB8AC3E}">
-        <p14:creationId xmlns:p14="http://schemas.microsoft.com/office/powerpoint/2010/main" val="3938833504"/>
+        <p14:creationId xmlns:p14="http://schemas.microsoft.com/office/powerpoint/2010/main" val="2195796412"/>
       </p:ext>
     </p:extLst>
   </p:cSld>
@@ -1122,8 +1563,8 @@
         </p:nvSpPr>
         <p:spPr>
           <a:xfrm>
-            <a:off x="942975" y="1582208"/>
-            <a:ext cx="5829300" cy="3771160"/>
+            <a:off x="942975" y="1643063"/>
+            <a:ext cx="5829300" cy="3916204"/>
           </a:xfrm>
         </p:spPr>
         <p:txBody>
@@ -1179,8 +1620,8 @@
         </p:nvSpPr>
         <p:spPr>
           <a:xfrm>
-            <a:off x="6943725" y="1582208"/>
-            <a:ext cx="5829300" cy="3771160"/>
+            <a:off x="6943725" y="1643063"/>
+            <a:ext cx="5829300" cy="3916204"/>
           </a:xfrm>
         </p:spPr>
         <p:txBody>
@@ -1241,7 +1682,7 @@
           <a:p>
             <a:fld id="{29EDA66B-131B-3A46-A334-2272A02F8BDA}" type="datetimeFigureOut">
               <a:rPr lang="en-US" smtClean="0"/>
-              <a:t>4/10/25</a:t>
+              <a:t>4/21/25</a:t>
             </a:fld>
             <a:endParaRPr lang="en-US"/>
           </a:p>
@@ -1292,7 +1733,7 @@
     </p:spTree>
     <p:extLst>
       <p:ext uri="{BB962C8B-B14F-4D97-AF65-F5344CB8AC3E}">
-        <p14:creationId xmlns:p14="http://schemas.microsoft.com/office/powerpoint/2010/main" val="2361024254"/>
+        <p14:creationId xmlns:p14="http://schemas.microsoft.com/office/powerpoint/2010/main" val="2463477398"/>
       </p:ext>
     </p:extLst>
   </p:cSld>
@@ -1331,8 +1772,8 @@
         </p:nvSpPr>
         <p:spPr>
           <a:xfrm>
-            <a:off x="944761" y="316442"/>
-            <a:ext cx="11830050" cy="1148821"/>
+            <a:off x="944761" y="328613"/>
+            <a:ext cx="11830050" cy="1193007"/>
           </a:xfrm>
         </p:spPr>
         <p:txBody>
@@ -1359,8 +1800,8 @@
         </p:nvSpPr>
         <p:spPr>
           <a:xfrm>
-            <a:off x="944762" y="1457008"/>
-            <a:ext cx="5802510" cy="714057"/>
+            <a:off x="944762" y="1513047"/>
+            <a:ext cx="5802510" cy="741521"/>
           </a:xfrm>
         </p:spPr>
         <p:txBody>
@@ -1368,39 +1809,39 @@
           <a:lstStyle>
             <a:lvl1pPr marL="0" indent="0">
               <a:buNone/>
-              <a:defRPr sz="2080" b="1"/>
+              <a:defRPr sz="2160" b="1"/>
             </a:lvl1pPr>
-            <a:lvl2pPr marL="396255" indent="0">
+            <a:lvl2pPr marL="411480" indent="0">
               <a:buNone/>
-              <a:defRPr sz="1733" b="1"/>
+              <a:defRPr sz="1800" b="1"/>
             </a:lvl2pPr>
-            <a:lvl3pPr marL="792510" indent="0">
+            <a:lvl3pPr marL="822960" indent="0">
               <a:buNone/>
-              <a:defRPr sz="1560" b="1"/>
+              <a:defRPr sz="1620" b="1"/>
             </a:lvl3pPr>
-            <a:lvl4pPr marL="1188766" indent="0">
+            <a:lvl4pPr marL="1234440" indent="0">
               <a:buNone/>
-              <a:defRPr sz="1387" b="1"/>
+              <a:defRPr sz="1440" b="1"/>
             </a:lvl4pPr>
-            <a:lvl5pPr marL="1585021" indent="0">
+            <a:lvl5pPr marL="1645920" indent="0">
               <a:buNone/>
-              <a:defRPr sz="1387" b="1"/>
+              <a:defRPr sz="1440" b="1"/>
             </a:lvl5pPr>
-            <a:lvl6pPr marL="1981276" indent="0">
+            <a:lvl6pPr marL="2057400" indent="0">
               <a:buNone/>
-              <a:defRPr sz="1387" b="1"/>
+              <a:defRPr sz="1440" b="1"/>
             </a:lvl6pPr>
-            <a:lvl7pPr marL="2377531" indent="0">
+            <a:lvl7pPr marL="2468880" indent="0">
               <a:buNone/>
-              <a:defRPr sz="1387" b="1"/>
+              <a:defRPr sz="1440" b="1"/>
             </a:lvl7pPr>
-            <a:lvl8pPr marL="2773787" indent="0">
+            <a:lvl8pPr marL="2880360" indent="0">
               <a:buNone/>
-              <a:defRPr sz="1387" b="1"/>
+              <a:defRPr sz="1440" b="1"/>
             </a:lvl8pPr>
-            <a:lvl9pPr marL="3170042" indent="0">
+            <a:lvl9pPr marL="3291840" indent="0">
               <a:buNone/>
-              <a:defRPr sz="1387" b="1"/>
+              <a:defRPr sz="1440" b="1"/>
             </a:lvl9pPr>
           </a:lstStyle>
           <a:p>
@@ -1424,8 +1865,8 @@
         </p:nvSpPr>
         <p:spPr>
           <a:xfrm>
-            <a:off x="944762" y="2171065"/>
-            <a:ext cx="5802510" cy="3193310"/>
+            <a:off x="944762" y="2254568"/>
+            <a:ext cx="5802510" cy="3316129"/>
           </a:xfrm>
         </p:spPr>
         <p:txBody>
@@ -1481,8 +1922,8 @@
         </p:nvSpPr>
         <p:spPr>
           <a:xfrm>
-            <a:off x="6943725" y="1457008"/>
-            <a:ext cx="5831087" cy="714057"/>
+            <a:off x="6943725" y="1513047"/>
+            <a:ext cx="5831087" cy="741521"/>
           </a:xfrm>
         </p:spPr>
         <p:txBody>
@@ -1490,39 +1931,39 @@
           <a:lstStyle>
             <a:lvl1pPr marL="0" indent="0">
               <a:buNone/>
-              <a:defRPr sz="2080" b="1"/>
+              <a:defRPr sz="2160" b="1"/>
             </a:lvl1pPr>
-            <a:lvl2pPr marL="396255" indent="0">
+            <a:lvl2pPr marL="411480" indent="0">
               <a:buNone/>
-              <a:defRPr sz="1733" b="1"/>
+              <a:defRPr sz="1800" b="1"/>
             </a:lvl2pPr>
-            <a:lvl3pPr marL="792510" indent="0">
+            <a:lvl3pPr marL="822960" indent="0">
               <a:buNone/>
-              <a:defRPr sz="1560" b="1"/>
+              <a:defRPr sz="1620" b="1"/>
             </a:lvl3pPr>
-            <a:lvl4pPr marL="1188766" indent="0">
+            <a:lvl4pPr marL="1234440" indent="0">
               <a:buNone/>
-              <a:defRPr sz="1387" b="1"/>
+              <a:defRPr sz="1440" b="1"/>
             </a:lvl4pPr>
-            <a:lvl5pPr marL="1585021" indent="0">
+            <a:lvl5pPr marL="1645920" indent="0">
               <a:buNone/>
-              <a:defRPr sz="1387" b="1"/>
+              <a:defRPr sz="1440" b="1"/>
             </a:lvl5pPr>
-            <a:lvl6pPr marL="1981276" indent="0">
+            <a:lvl6pPr marL="2057400" indent="0">
               <a:buNone/>
-              <a:defRPr sz="1387" b="1"/>
+              <a:defRPr sz="1440" b="1"/>
             </a:lvl6pPr>
-            <a:lvl7pPr marL="2377531" indent="0">
+            <a:lvl7pPr marL="2468880" indent="0">
               <a:buNone/>
-              <a:defRPr sz="1387" b="1"/>
+              <a:defRPr sz="1440" b="1"/>
             </a:lvl7pPr>
-            <a:lvl8pPr marL="2773787" indent="0">
+            <a:lvl8pPr marL="2880360" indent="0">
               <a:buNone/>
-              <a:defRPr sz="1387" b="1"/>
+              <a:defRPr sz="1440" b="1"/>
             </a:lvl8pPr>
-            <a:lvl9pPr marL="3170042" indent="0">
+            <a:lvl9pPr marL="3291840" indent="0">
               <a:buNone/>
-              <a:defRPr sz="1387" b="1"/>
+              <a:defRPr sz="1440" b="1"/>
             </a:lvl9pPr>
           </a:lstStyle>
           <a:p>
@@ -1546,8 +1987,8 @@
         </p:nvSpPr>
         <p:spPr>
           <a:xfrm>
-            <a:off x="6943725" y="2171065"/>
-            <a:ext cx="5831087" cy="3193310"/>
+            <a:off x="6943725" y="2254568"/>
+            <a:ext cx="5831087" cy="3316129"/>
           </a:xfrm>
         </p:spPr>
         <p:txBody>
@@ -1608,7 +2049,7 @@
           <a:p>
             <a:fld id="{29EDA66B-131B-3A46-A334-2272A02F8BDA}" type="datetimeFigureOut">
               <a:rPr lang="en-US" smtClean="0"/>
-              <a:t>4/10/25</a:t>
+              <a:t>4/21/25</a:t>
             </a:fld>
             <a:endParaRPr lang="en-US"/>
           </a:p>
@@ -1659,7 +2100,7 @@
     </p:spTree>
     <p:extLst>
       <p:ext uri="{BB962C8B-B14F-4D97-AF65-F5344CB8AC3E}">
-        <p14:creationId xmlns:p14="http://schemas.microsoft.com/office/powerpoint/2010/main" val="3190734382"/>
+        <p14:creationId xmlns:p14="http://schemas.microsoft.com/office/powerpoint/2010/main" val="658784040"/>
       </p:ext>
     </p:extLst>
   </p:cSld>
@@ -1726,7 +2167,7 @@
           <a:p>
             <a:fld id="{29EDA66B-131B-3A46-A334-2272A02F8BDA}" type="datetimeFigureOut">
               <a:rPr lang="en-US" smtClean="0"/>
-              <a:t>4/10/25</a:t>
+              <a:t>4/21/25</a:t>
             </a:fld>
             <a:endParaRPr lang="en-US"/>
           </a:p>
@@ -1777,7 +2218,7 @@
     </p:spTree>
     <p:extLst>
       <p:ext uri="{BB962C8B-B14F-4D97-AF65-F5344CB8AC3E}">
-        <p14:creationId xmlns:p14="http://schemas.microsoft.com/office/powerpoint/2010/main" val="208400134"/>
+        <p14:creationId xmlns:p14="http://schemas.microsoft.com/office/powerpoint/2010/main" val="463826341"/>
       </p:ext>
     </p:extLst>
   </p:cSld>
@@ -1821,7 +2262,7 @@
           <a:p>
             <a:fld id="{29EDA66B-131B-3A46-A334-2272A02F8BDA}" type="datetimeFigureOut">
               <a:rPr lang="en-US" smtClean="0"/>
-              <a:t>4/10/25</a:t>
+              <a:t>4/21/25</a:t>
             </a:fld>
             <a:endParaRPr lang="en-US"/>
           </a:p>
@@ -1872,7 +2313,7 @@
     </p:spTree>
     <p:extLst>
       <p:ext uri="{BB962C8B-B14F-4D97-AF65-F5344CB8AC3E}">
-        <p14:creationId xmlns:p14="http://schemas.microsoft.com/office/powerpoint/2010/main" val="111716744"/>
+        <p14:creationId xmlns:p14="http://schemas.microsoft.com/office/powerpoint/2010/main" val="1722168876"/>
       </p:ext>
     </p:extLst>
   </p:cSld>
@@ -1911,15 +2352,15 @@
         </p:nvSpPr>
         <p:spPr>
           <a:xfrm>
-            <a:off x="944762" y="396240"/>
-            <a:ext cx="4423767" cy="1386840"/>
+            <a:off x="944762" y="411480"/>
+            <a:ext cx="4423767" cy="1440180"/>
           </a:xfrm>
         </p:spPr>
         <p:txBody>
           <a:bodyPr anchor="b"/>
           <a:lstStyle>
             <a:lvl1pPr>
-              <a:defRPr sz="2773"/>
+              <a:defRPr sz="2880"/>
             </a:lvl1pPr>
           </a:lstStyle>
           <a:p>
@@ -1943,39 +2384,39 @@
         </p:nvSpPr>
         <p:spPr>
           <a:xfrm>
-            <a:off x="5831086" y="855769"/>
-            <a:ext cx="6943725" cy="4223808"/>
+            <a:off x="5831086" y="888683"/>
+            <a:ext cx="6943725" cy="4386263"/>
           </a:xfrm>
         </p:spPr>
         <p:txBody>
           <a:bodyPr/>
           <a:lstStyle>
             <a:lvl1pPr>
-              <a:defRPr sz="2773"/>
+              <a:defRPr sz="2880"/>
             </a:lvl1pPr>
             <a:lvl2pPr>
-              <a:defRPr sz="2427"/>
+              <a:defRPr sz="2520"/>
             </a:lvl2pPr>
             <a:lvl3pPr>
-              <a:defRPr sz="2080"/>
+              <a:defRPr sz="2160"/>
             </a:lvl3pPr>
             <a:lvl4pPr>
-              <a:defRPr sz="1733"/>
+              <a:defRPr sz="1800"/>
             </a:lvl4pPr>
             <a:lvl5pPr>
-              <a:defRPr sz="1733"/>
+              <a:defRPr sz="1800"/>
             </a:lvl5pPr>
             <a:lvl6pPr>
-              <a:defRPr sz="1733"/>
+              <a:defRPr sz="1800"/>
             </a:lvl6pPr>
             <a:lvl7pPr>
-              <a:defRPr sz="1733"/>
+              <a:defRPr sz="1800"/>
             </a:lvl7pPr>
             <a:lvl8pPr>
-              <a:defRPr sz="1733"/>
+              <a:defRPr sz="1800"/>
             </a:lvl8pPr>
             <a:lvl9pPr>
-              <a:defRPr sz="1733"/>
+              <a:defRPr sz="1800"/>
             </a:lvl9pPr>
           </a:lstStyle>
           <a:p>
@@ -2028,8 +2469,8 @@
         </p:nvSpPr>
         <p:spPr>
           <a:xfrm>
-            <a:off x="944762" y="1783080"/>
-            <a:ext cx="4423767" cy="3303376"/>
+            <a:off x="944762" y="1851660"/>
+            <a:ext cx="4423767" cy="3430429"/>
           </a:xfrm>
         </p:spPr>
         <p:txBody>
@@ -2037,39 +2478,39 @@
           <a:lstStyle>
             <a:lvl1pPr marL="0" indent="0">
               <a:buNone/>
-              <a:defRPr sz="1387"/>
+              <a:defRPr sz="1440"/>
             </a:lvl1pPr>
-            <a:lvl2pPr marL="396255" indent="0">
+            <a:lvl2pPr marL="411480" indent="0">
               <a:buNone/>
-              <a:defRPr sz="1213"/>
+              <a:defRPr sz="1260"/>
             </a:lvl2pPr>
-            <a:lvl3pPr marL="792510" indent="0">
+            <a:lvl3pPr marL="822960" indent="0">
               <a:buNone/>
-              <a:defRPr sz="1040"/>
+              <a:defRPr sz="1080"/>
             </a:lvl3pPr>
-            <a:lvl4pPr marL="1188766" indent="0">
+            <a:lvl4pPr marL="1234440" indent="0">
               <a:buNone/>
-              <a:defRPr sz="867"/>
+              <a:defRPr sz="900"/>
             </a:lvl4pPr>
-            <a:lvl5pPr marL="1585021" indent="0">
+            <a:lvl5pPr marL="1645920" indent="0">
               <a:buNone/>
-              <a:defRPr sz="867"/>
+              <a:defRPr sz="900"/>
             </a:lvl5pPr>
-            <a:lvl6pPr marL="1981276" indent="0">
+            <a:lvl6pPr marL="2057400" indent="0">
               <a:buNone/>
-              <a:defRPr sz="867"/>
+              <a:defRPr sz="900"/>
             </a:lvl6pPr>
-            <a:lvl7pPr marL="2377531" indent="0">
+            <a:lvl7pPr marL="2468880" indent="0">
               <a:buNone/>
-              <a:defRPr sz="867"/>
+              <a:defRPr sz="900"/>
             </a:lvl7pPr>
-            <a:lvl8pPr marL="2773787" indent="0">
+            <a:lvl8pPr marL="2880360" indent="0">
               <a:buNone/>
-              <a:defRPr sz="867"/>
+              <a:defRPr sz="900"/>
             </a:lvl8pPr>
-            <a:lvl9pPr marL="3170042" indent="0">
+            <a:lvl9pPr marL="3291840" indent="0">
               <a:buNone/>
-              <a:defRPr sz="867"/>
+              <a:defRPr sz="900"/>
             </a:lvl9pPr>
           </a:lstStyle>
           <a:p>
@@ -2098,7 +2539,7 @@
           <a:p>
             <a:fld id="{29EDA66B-131B-3A46-A334-2272A02F8BDA}" type="datetimeFigureOut">
               <a:rPr lang="en-US" smtClean="0"/>
-              <a:t>4/10/25</a:t>
+              <a:t>4/21/25</a:t>
             </a:fld>
             <a:endParaRPr lang="en-US"/>
           </a:p>
@@ -2149,7 +2590,7 @@
     </p:spTree>
     <p:extLst>
       <p:ext uri="{BB962C8B-B14F-4D97-AF65-F5344CB8AC3E}">
-        <p14:creationId xmlns:p14="http://schemas.microsoft.com/office/powerpoint/2010/main" val="759073423"/>
+        <p14:creationId xmlns:p14="http://schemas.microsoft.com/office/powerpoint/2010/main" val="3263252821"/>
       </p:ext>
     </p:extLst>
   </p:cSld>
@@ -2188,15 +2629,15 @@
         </p:nvSpPr>
         <p:spPr>
           <a:xfrm>
-            <a:off x="944762" y="396240"/>
-            <a:ext cx="4423767" cy="1386840"/>
+            <a:off x="944762" y="411480"/>
+            <a:ext cx="4423767" cy="1440180"/>
           </a:xfrm>
         </p:spPr>
         <p:txBody>
           <a:bodyPr anchor="b"/>
           <a:lstStyle>
             <a:lvl1pPr>
-              <a:defRPr sz="2773"/>
+              <a:defRPr sz="2880"/>
             </a:lvl1pPr>
           </a:lstStyle>
           <a:p>
@@ -2220,8 +2661,8 @@
         </p:nvSpPr>
         <p:spPr>
           <a:xfrm>
-            <a:off x="5831086" y="855769"/>
-            <a:ext cx="6943725" cy="4223808"/>
+            <a:off x="5831086" y="888683"/>
+            <a:ext cx="6943725" cy="4386263"/>
           </a:xfrm>
         </p:spPr>
         <p:txBody>
@@ -2229,39 +2670,39 @@
           <a:lstStyle>
             <a:lvl1pPr marL="0" indent="0">
               <a:buNone/>
-              <a:defRPr sz="2773"/>
+              <a:defRPr sz="2880"/>
             </a:lvl1pPr>
-            <a:lvl2pPr marL="396255" indent="0">
+            <a:lvl2pPr marL="411480" indent="0">
               <a:buNone/>
-              <a:defRPr sz="2427"/>
+              <a:defRPr sz="2520"/>
             </a:lvl2pPr>
-            <a:lvl3pPr marL="792510" indent="0">
+            <a:lvl3pPr marL="822960" indent="0">
               <a:buNone/>
-              <a:defRPr sz="2080"/>
+              <a:defRPr sz="2160"/>
             </a:lvl3pPr>
-            <a:lvl4pPr marL="1188766" indent="0">
+            <a:lvl4pPr marL="1234440" indent="0">
               <a:buNone/>
-              <a:defRPr sz="1733"/>
+              <a:defRPr sz="1800"/>
             </a:lvl4pPr>
-            <a:lvl5pPr marL="1585021" indent="0">
+            <a:lvl5pPr marL="1645920" indent="0">
               <a:buNone/>
-              <a:defRPr sz="1733"/>
+              <a:defRPr sz="1800"/>
             </a:lvl5pPr>
-            <a:lvl6pPr marL="1981276" indent="0">
+            <a:lvl6pPr marL="2057400" indent="0">
               <a:buNone/>
-              <a:defRPr sz="1733"/>
+              <a:defRPr sz="1800"/>
             </a:lvl6pPr>
-            <a:lvl7pPr marL="2377531" indent="0">
+            <a:lvl7pPr marL="2468880" indent="0">
               <a:buNone/>
-              <a:defRPr sz="1733"/>
+              <a:defRPr sz="1800"/>
             </a:lvl7pPr>
-            <a:lvl8pPr marL="2773787" indent="0">
+            <a:lvl8pPr marL="2880360" indent="0">
               <a:buNone/>
-              <a:defRPr sz="1733"/>
+              <a:defRPr sz="1800"/>
             </a:lvl8pPr>
-            <a:lvl9pPr marL="3170042" indent="0">
+            <a:lvl9pPr marL="3291840" indent="0">
               <a:buNone/>
-              <a:defRPr sz="1733"/>
+              <a:defRPr sz="1800"/>
             </a:lvl9pPr>
           </a:lstStyle>
           <a:p>
@@ -2285,8 +2726,8 @@
         </p:nvSpPr>
         <p:spPr>
           <a:xfrm>
-            <a:off x="944762" y="1783080"/>
-            <a:ext cx="4423767" cy="3303376"/>
+            <a:off x="944762" y="1851660"/>
+            <a:ext cx="4423767" cy="3430429"/>
           </a:xfrm>
         </p:spPr>
         <p:txBody>
@@ -2294,39 +2735,39 @@
           <a:lstStyle>
             <a:lvl1pPr marL="0" indent="0">
               <a:buNone/>
-              <a:defRPr sz="1387"/>
+              <a:defRPr sz="1440"/>
             </a:lvl1pPr>
-            <a:lvl2pPr marL="396255" indent="0">
+            <a:lvl2pPr marL="411480" indent="0">
               <a:buNone/>
-              <a:defRPr sz="1213"/>
+              <a:defRPr sz="1260"/>
             </a:lvl2pPr>
-            <a:lvl3pPr marL="792510" indent="0">
+            <a:lvl3pPr marL="822960" indent="0">
               <a:buNone/>
-              <a:defRPr sz="1040"/>
+              <a:defRPr sz="1080"/>
             </a:lvl3pPr>
-            <a:lvl4pPr marL="1188766" indent="0">
+            <a:lvl4pPr marL="1234440" indent="0">
               <a:buNone/>
-              <a:defRPr sz="867"/>
+              <a:defRPr sz="900"/>
             </a:lvl4pPr>
-            <a:lvl5pPr marL="1585021" indent="0">
+            <a:lvl5pPr marL="1645920" indent="0">
               <a:buNone/>
-              <a:defRPr sz="867"/>
+              <a:defRPr sz="900"/>
             </a:lvl5pPr>
-            <a:lvl6pPr marL="1981276" indent="0">
+            <a:lvl6pPr marL="2057400" indent="0">
               <a:buNone/>
-              <a:defRPr sz="867"/>
+              <a:defRPr sz="900"/>
             </a:lvl6pPr>
-            <a:lvl7pPr marL="2377531" indent="0">
+            <a:lvl7pPr marL="2468880" indent="0">
               <a:buNone/>
-              <a:defRPr sz="867"/>
+              <a:defRPr sz="900"/>
             </a:lvl7pPr>
-            <a:lvl8pPr marL="2773787" indent="0">
+            <a:lvl8pPr marL="2880360" indent="0">
               <a:buNone/>
-              <a:defRPr sz="867"/>
+              <a:defRPr sz="900"/>
             </a:lvl8pPr>
-            <a:lvl9pPr marL="3170042" indent="0">
+            <a:lvl9pPr marL="3291840" indent="0">
               <a:buNone/>
-              <a:defRPr sz="867"/>
+              <a:defRPr sz="900"/>
             </a:lvl9pPr>
           </a:lstStyle>
           <a:p>
@@ -2355,7 +2796,7 @@
           <a:p>
             <a:fld id="{29EDA66B-131B-3A46-A334-2272A02F8BDA}" type="datetimeFigureOut">
               <a:rPr lang="en-US" smtClean="0"/>
-              <a:t>4/10/25</a:t>
+              <a:t>4/21/25</a:t>
             </a:fld>
             <a:endParaRPr lang="en-US"/>
           </a:p>
@@ -2406,7 +2847,7 @@
     </p:spTree>
     <p:extLst>
       <p:ext uri="{BB962C8B-B14F-4D97-AF65-F5344CB8AC3E}">
-        <p14:creationId xmlns:p14="http://schemas.microsoft.com/office/powerpoint/2010/main" val="4208100815"/>
+        <p14:creationId xmlns:p14="http://schemas.microsoft.com/office/powerpoint/2010/main" val="305552081"/>
       </p:ext>
     </p:extLst>
   </p:cSld>
@@ -2450,8 +2891,8 @@
         </p:nvSpPr>
         <p:spPr>
           <a:xfrm>
-            <a:off x="942975" y="316442"/>
-            <a:ext cx="11830050" cy="1148821"/>
+            <a:off x="942975" y="328613"/>
+            <a:ext cx="11830050" cy="1193007"/>
           </a:xfrm>
           <a:prstGeom prst="rect">
             <a:avLst/>
@@ -2483,8 +2924,8 @@
         </p:nvSpPr>
         <p:spPr>
           <a:xfrm>
-            <a:off x="942975" y="1582208"/>
-            <a:ext cx="11830050" cy="3771160"/>
+            <a:off x="942975" y="1643063"/>
+            <a:ext cx="11830050" cy="3916204"/>
           </a:xfrm>
           <a:prstGeom prst="rect">
             <a:avLst/>
@@ -2545,8 +2986,8 @@
         </p:nvSpPr>
         <p:spPr>
           <a:xfrm>
-            <a:off x="942975" y="5508837"/>
-            <a:ext cx="3086100" cy="316442"/>
+            <a:off x="942975" y="5720715"/>
+            <a:ext cx="3086100" cy="328613"/>
           </a:xfrm>
           <a:prstGeom prst="rect">
             <a:avLst/>
@@ -2556,7 +2997,7 @@
           <a:bodyPr vert="horz" lIns="91440" tIns="45720" rIns="91440" bIns="45720" rtlCol="0" anchor="ctr"/>
           <a:lstStyle>
             <a:lvl1pPr algn="l">
-              <a:defRPr sz="1040">
+              <a:defRPr sz="1080">
                 <a:solidFill>
                   <a:schemeClr val="tx1">
                     <a:tint val="82000"/>
@@ -2568,7 +3009,7 @@
           <a:p>
             <a:fld id="{29EDA66B-131B-3A46-A334-2272A02F8BDA}" type="datetimeFigureOut">
               <a:rPr lang="en-US" smtClean="0"/>
-              <a:t>4/10/25</a:t>
+              <a:t>4/21/25</a:t>
             </a:fld>
             <a:endParaRPr lang="en-US"/>
           </a:p>
@@ -2586,8 +3027,8 @@
         </p:nvSpPr>
         <p:spPr>
           <a:xfrm>
-            <a:off x="4543425" y="5508837"/>
-            <a:ext cx="4629150" cy="316442"/>
+            <a:off x="4543425" y="5720715"/>
+            <a:ext cx="4629150" cy="328613"/>
           </a:xfrm>
           <a:prstGeom prst="rect">
             <a:avLst/>
@@ -2597,7 +3038,7 @@
           <a:bodyPr vert="horz" lIns="91440" tIns="45720" rIns="91440" bIns="45720" rtlCol="0" anchor="ctr"/>
           <a:lstStyle>
             <a:lvl1pPr algn="ctr">
-              <a:defRPr sz="1040">
+              <a:defRPr sz="1080">
                 <a:solidFill>
                   <a:schemeClr val="tx1">
                     <a:tint val="82000"/>
@@ -2623,8 +3064,8 @@
         </p:nvSpPr>
         <p:spPr>
           <a:xfrm>
-            <a:off x="9686925" y="5508837"/>
-            <a:ext cx="3086100" cy="316442"/>
+            <a:off x="9686925" y="5720715"/>
+            <a:ext cx="3086100" cy="328613"/>
           </a:xfrm>
           <a:prstGeom prst="rect">
             <a:avLst/>
@@ -2634,7 +3075,7 @@
           <a:bodyPr vert="horz" lIns="91440" tIns="45720" rIns="91440" bIns="45720" rtlCol="0" anchor="ctr"/>
           <a:lstStyle>
             <a:lvl1pPr algn="r">
-              <a:defRPr sz="1040">
+              <a:defRPr sz="1080">
                 <a:solidFill>
                   <a:schemeClr val="tx1">
                     <a:tint val="82000"/>
@@ -2655,27 +3096,27 @@
     </p:spTree>
     <p:extLst>
       <p:ext uri="{BB962C8B-B14F-4D97-AF65-F5344CB8AC3E}">
-        <p14:creationId xmlns:p14="http://schemas.microsoft.com/office/powerpoint/2010/main" val="47023385"/>
+        <p14:creationId xmlns:p14="http://schemas.microsoft.com/office/powerpoint/2010/main" val="2420358346"/>
       </p:ext>
     </p:extLst>
   </p:cSld>
   <p:clrMap bg1="lt1" tx1="dk1" bg2="lt2" tx2="dk2" accent1="accent1" accent2="accent2" accent3="accent3" accent4="accent4" accent5="accent5" accent6="accent6" hlink="hlink" folHlink="folHlink"/>
   <p:sldLayoutIdLst>
-    <p:sldLayoutId id="2147483673" r:id="rId1"/>
-    <p:sldLayoutId id="2147483674" r:id="rId2"/>
-    <p:sldLayoutId id="2147483675" r:id="rId3"/>
-    <p:sldLayoutId id="2147483676" r:id="rId4"/>
-    <p:sldLayoutId id="2147483677" r:id="rId5"/>
-    <p:sldLayoutId id="2147483678" r:id="rId6"/>
-    <p:sldLayoutId id="2147483679" r:id="rId7"/>
-    <p:sldLayoutId id="2147483680" r:id="rId8"/>
-    <p:sldLayoutId id="2147483681" r:id="rId9"/>
-    <p:sldLayoutId id="2147483682" r:id="rId10"/>
-    <p:sldLayoutId id="2147483683" r:id="rId11"/>
+    <p:sldLayoutId id="2147483685" r:id="rId1"/>
+    <p:sldLayoutId id="2147483686" r:id="rId2"/>
+    <p:sldLayoutId id="2147483687" r:id="rId3"/>
+    <p:sldLayoutId id="2147483688" r:id="rId4"/>
+    <p:sldLayoutId id="2147483689" r:id="rId5"/>
+    <p:sldLayoutId id="2147483690" r:id="rId6"/>
+    <p:sldLayoutId id="2147483691" r:id="rId7"/>
+    <p:sldLayoutId id="2147483692" r:id="rId8"/>
+    <p:sldLayoutId id="2147483693" r:id="rId9"/>
+    <p:sldLayoutId id="2147483694" r:id="rId10"/>
+    <p:sldLayoutId id="2147483695" r:id="rId11"/>
   </p:sldLayoutIdLst>
   <p:txStyles>
     <p:titleStyle>
-      <a:lvl1pPr algn="l" defTabSz="792510" rtl="0" eaLnBrk="1" latinLnBrk="0" hangingPunct="1">
+      <a:lvl1pPr algn="l" defTabSz="822960" rtl="0" eaLnBrk="1" latinLnBrk="0" hangingPunct="1">
         <a:lnSpc>
           <a:spcPct val="90000"/>
         </a:lnSpc>
@@ -2683,7 +3124,7 @@
           <a:spcPct val="0"/>
         </a:spcBef>
         <a:buNone/>
-        <a:defRPr sz="3813" kern="1200">
+        <a:defRPr sz="3960" kern="1200">
           <a:solidFill>
             <a:schemeClr val="tx1"/>
           </a:solidFill>
@@ -2694,16 +3135,16 @@
       </a:lvl1pPr>
     </p:titleStyle>
     <p:bodyStyle>
-      <a:lvl1pPr marL="198128" indent="-198128" algn="l" defTabSz="792510" rtl="0" eaLnBrk="1" latinLnBrk="0" hangingPunct="1">
+      <a:lvl1pPr marL="205740" indent="-205740" algn="l" defTabSz="822960" rtl="0" eaLnBrk="1" latinLnBrk="0" hangingPunct="1">
         <a:lnSpc>
           <a:spcPct val="90000"/>
         </a:lnSpc>
         <a:spcBef>
-          <a:spcPts val="867"/>
+          <a:spcPts val="900"/>
         </a:spcBef>
         <a:buFont typeface="Arial" panose="020B0604020202020204" pitchFamily="34" charset="0"/>
         <a:buChar char="•"/>
-        <a:defRPr sz="2427" kern="1200">
+        <a:defRPr sz="2520" kern="1200">
           <a:solidFill>
             <a:schemeClr val="tx1"/>
           </a:solidFill>
@@ -2712,16 +3153,16 @@
           <a:cs typeface="+mn-cs"/>
         </a:defRPr>
       </a:lvl1pPr>
-      <a:lvl2pPr marL="594383" indent="-198128" algn="l" defTabSz="792510" rtl="0" eaLnBrk="1" latinLnBrk="0" hangingPunct="1">
+      <a:lvl2pPr marL="617220" indent="-205740" algn="l" defTabSz="822960" rtl="0" eaLnBrk="1" latinLnBrk="0" hangingPunct="1">
         <a:lnSpc>
           <a:spcPct val="90000"/>
         </a:lnSpc>
         <a:spcBef>
-          <a:spcPts val="433"/>
+          <a:spcPts val="450"/>
         </a:spcBef>
         <a:buFont typeface="Arial" panose="020B0604020202020204" pitchFamily="34" charset="0"/>
         <a:buChar char="•"/>
-        <a:defRPr sz="2080" kern="1200">
+        <a:defRPr sz="2160" kern="1200">
           <a:solidFill>
             <a:schemeClr val="tx1"/>
           </a:solidFill>
@@ -2730,16 +3171,16 @@
           <a:cs typeface="+mn-cs"/>
         </a:defRPr>
       </a:lvl2pPr>
-      <a:lvl3pPr marL="990638" indent="-198128" algn="l" defTabSz="792510" rtl="0" eaLnBrk="1" latinLnBrk="0" hangingPunct="1">
+      <a:lvl3pPr marL="1028700" indent="-205740" algn="l" defTabSz="822960" rtl="0" eaLnBrk="1" latinLnBrk="0" hangingPunct="1">
         <a:lnSpc>
           <a:spcPct val="90000"/>
         </a:lnSpc>
         <a:spcBef>
-          <a:spcPts val="433"/>
+          <a:spcPts val="450"/>
         </a:spcBef>
         <a:buFont typeface="Arial" panose="020B0604020202020204" pitchFamily="34" charset="0"/>
         <a:buChar char="•"/>
-        <a:defRPr sz="1733" kern="1200">
+        <a:defRPr sz="1800" kern="1200">
           <a:solidFill>
             <a:schemeClr val="tx1"/>
           </a:solidFill>
@@ -2748,16 +3189,16 @@
           <a:cs typeface="+mn-cs"/>
         </a:defRPr>
       </a:lvl3pPr>
-      <a:lvl4pPr marL="1386893" indent="-198128" algn="l" defTabSz="792510" rtl="0" eaLnBrk="1" latinLnBrk="0" hangingPunct="1">
+      <a:lvl4pPr marL="1440180" indent="-205740" algn="l" defTabSz="822960" rtl="0" eaLnBrk="1" latinLnBrk="0" hangingPunct="1">
         <a:lnSpc>
           <a:spcPct val="90000"/>
         </a:lnSpc>
         <a:spcBef>
-          <a:spcPts val="433"/>
+          <a:spcPts val="450"/>
         </a:spcBef>
         <a:buFont typeface="Arial" panose="020B0604020202020204" pitchFamily="34" charset="0"/>
         <a:buChar char="•"/>
-        <a:defRPr sz="1560" kern="1200">
+        <a:defRPr sz="1620" kern="1200">
           <a:solidFill>
             <a:schemeClr val="tx1"/>
           </a:solidFill>
@@ -2766,16 +3207,16 @@
           <a:cs typeface="+mn-cs"/>
         </a:defRPr>
       </a:lvl4pPr>
-      <a:lvl5pPr marL="1783149" indent="-198128" algn="l" defTabSz="792510" rtl="0" eaLnBrk="1" latinLnBrk="0" hangingPunct="1">
+      <a:lvl5pPr marL="1851660" indent="-205740" algn="l" defTabSz="822960" rtl="0" eaLnBrk="1" latinLnBrk="0" hangingPunct="1">
         <a:lnSpc>
           <a:spcPct val="90000"/>
         </a:lnSpc>
         <a:spcBef>
-          <a:spcPts val="433"/>
+          <a:spcPts val="450"/>
         </a:spcBef>
         <a:buFont typeface="Arial" panose="020B0604020202020204" pitchFamily="34" charset="0"/>
         <a:buChar char="•"/>
-        <a:defRPr sz="1560" kern="1200">
+        <a:defRPr sz="1620" kern="1200">
           <a:solidFill>
             <a:schemeClr val="tx1"/>
           </a:solidFill>
@@ -2784,16 +3225,16 @@
           <a:cs typeface="+mn-cs"/>
         </a:defRPr>
       </a:lvl5pPr>
-      <a:lvl6pPr marL="2179404" indent="-198128" algn="l" defTabSz="792510" rtl="0" eaLnBrk="1" latinLnBrk="0" hangingPunct="1">
+      <a:lvl6pPr marL="2263140" indent="-205740" algn="l" defTabSz="822960" rtl="0" eaLnBrk="1" latinLnBrk="0" hangingPunct="1">
         <a:lnSpc>
           <a:spcPct val="90000"/>
         </a:lnSpc>
         <a:spcBef>
-          <a:spcPts val="433"/>
+          <a:spcPts val="450"/>
         </a:spcBef>
         <a:buFont typeface="Arial" panose="020B0604020202020204" pitchFamily="34" charset="0"/>
         <a:buChar char="•"/>
-        <a:defRPr sz="1560" kern="1200">
+        <a:defRPr sz="1620" kern="1200">
           <a:solidFill>
             <a:schemeClr val="tx1"/>
           </a:solidFill>
@@ -2802,16 +3243,16 @@
           <a:cs typeface="+mn-cs"/>
         </a:defRPr>
       </a:lvl6pPr>
-      <a:lvl7pPr marL="2575659" indent="-198128" algn="l" defTabSz="792510" rtl="0" eaLnBrk="1" latinLnBrk="0" hangingPunct="1">
+      <a:lvl7pPr marL="2674620" indent="-205740" algn="l" defTabSz="822960" rtl="0" eaLnBrk="1" latinLnBrk="0" hangingPunct="1">
         <a:lnSpc>
           <a:spcPct val="90000"/>
         </a:lnSpc>
         <a:spcBef>
-          <a:spcPts val="433"/>
+          <a:spcPts val="450"/>
         </a:spcBef>
         <a:buFont typeface="Arial" panose="020B0604020202020204" pitchFamily="34" charset="0"/>
         <a:buChar char="•"/>
-        <a:defRPr sz="1560" kern="1200">
+        <a:defRPr sz="1620" kern="1200">
           <a:solidFill>
             <a:schemeClr val="tx1"/>
           </a:solidFill>
@@ -2820,16 +3261,16 @@
           <a:cs typeface="+mn-cs"/>
         </a:defRPr>
       </a:lvl7pPr>
-      <a:lvl8pPr marL="2971914" indent="-198128" algn="l" defTabSz="792510" rtl="0" eaLnBrk="1" latinLnBrk="0" hangingPunct="1">
+      <a:lvl8pPr marL="3086100" indent="-205740" algn="l" defTabSz="822960" rtl="0" eaLnBrk="1" latinLnBrk="0" hangingPunct="1">
         <a:lnSpc>
           <a:spcPct val="90000"/>
         </a:lnSpc>
         <a:spcBef>
-          <a:spcPts val="433"/>
+          <a:spcPts val="450"/>
         </a:spcBef>
         <a:buFont typeface="Arial" panose="020B0604020202020204" pitchFamily="34" charset="0"/>
         <a:buChar char="•"/>
-        <a:defRPr sz="1560" kern="1200">
+        <a:defRPr sz="1620" kern="1200">
           <a:solidFill>
             <a:schemeClr val="tx1"/>
           </a:solidFill>
@@ -2838,16 +3279,16 @@
           <a:cs typeface="+mn-cs"/>
         </a:defRPr>
       </a:lvl8pPr>
-      <a:lvl9pPr marL="3368170" indent="-198128" algn="l" defTabSz="792510" rtl="0" eaLnBrk="1" latinLnBrk="0" hangingPunct="1">
+      <a:lvl9pPr marL="3497580" indent="-205740" algn="l" defTabSz="822960" rtl="0" eaLnBrk="1" latinLnBrk="0" hangingPunct="1">
         <a:lnSpc>
           <a:spcPct val="90000"/>
         </a:lnSpc>
         <a:spcBef>
-          <a:spcPts val="433"/>
+          <a:spcPts val="450"/>
         </a:spcBef>
         <a:buFont typeface="Arial" panose="020B0604020202020204" pitchFamily="34" charset="0"/>
         <a:buChar char="•"/>
-        <a:defRPr sz="1560" kern="1200">
+        <a:defRPr sz="1620" kern="1200">
           <a:solidFill>
             <a:schemeClr val="tx1"/>
           </a:solidFill>
@@ -2861,8 +3302,8 @@
       <a:defPPr>
         <a:defRPr lang="en-US"/>
       </a:defPPr>
-      <a:lvl1pPr marL="0" algn="l" defTabSz="792510" rtl="0" eaLnBrk="1" latinLnBrk="0" hangingPunct="1">
-        <a:defRPr sz="1560" kern="1200">
+      <a:lvl1pPr marL="0" algn="l" defTabSz="822960" rtl="0" eaLnBrk="1" latinLnBrk="0" hangingPunct="1">
+        <a:defRPr sz="1620" kern="1200">
           <a:solidFill>
             <a:schemeClr val="tx1"/>
           </a:solidFill>
@@ -2871,8 +3312,8 @@
           <a:cs typeface="+mn-cs"/>
         </a:defRPr>
       </a:lvl1pPr>
-      <a:lvl2pPr marL="396255" algn="l" defTabSz="792510" rtl="0" eaLnBrk="1" latinLnBrk="0" hangingPunct="1">
-        <a:defRPr sz="1560" kern="1200">
+      <a:lvl2pPr marL="411480" algn="l" defTabSz="822960" rtl="0" eaLnBrk="1" latinLnBrk="0" hangingPunct="1">
+        <a:defRPr sz="1620" kern="1200">
           <a:solidFill>
             <a:schemeClr val="tx1"/>
           </a:solidFill>
@@ -2881,8 +3322,8 @@
           <a:cs typeface="+mn-cs"/>
         </a:defRPr>
       </a:lvl2pPr>
-      <a:lvl3pPr marL="792510" algn="l" defTabSz="792510" rtl="0" eaLnBrk="1" latinLnBrk="0" hangingPunct="1">
-        <a:defRPr sz="1560" kern="1200">
+      <a:lvl3pPr marL="822960" algn="l" defTabSz="822960" rtl="0" eaLnBrk="1" latinLnBrk="0" hangingPunct="1">
+        <a:defRPr sz="1620" kern="1200">
           <a:solidFill>
             <a:schemeClr val="tx1"/>
           </a:solidFill>
@@ -2891,8 +3332,8 @@
           <a:cs typeface="+mn-cs"/>
         </a:defRPr>
       </a:lvl3pPr>
-      <a:lvl4pPr marL="1188766" algn="l" defTabSz="792510" rtl="0" eaLnBrk="1" latinLnBrk="0" hangingPunct="1">
-        <a:defRPr sz="1560" kern="1200">
+      <a:lvl4pPr marL="1234440" algn="l" defTabSz="822960" rtl="0" eaLnBrk="1" latinLnBrk="0" hangingPunct="1">
+        <a:defRPr sz="1620" kern="1200">
           <a:solidFill>
             <a:schemeClr val="tx1"/>
           </a:solidFill>
@@ -2901,8 +3342,8 @@
           <a:cs typeface="+mn-cs"/>
         </a:defRPr>
       </a:lvl4pPr>
-      <a:lvl5pPr marL="1585021" algn="l" defTabSz="792510" rtl="0" eaLnBrk="1" latinLnBrk="0" hangingPunct="1">
-        <a:defRPr sz="1560" kern="1200">
+      <a:lvl5pPr marL="1645920" algn="l" defTabSz="822960" rtl="0" eaLnBrk="1" latinLnBrk="0" hangingPunct="1">
+        <a:defRPr sz="1620" kern="1200">
           <a:solidFill>
             <a:schemeClr val="tx1"/>
           </a:solidFill>
@@ -2911,8 +3352,8 @@
           <a:cs typeface="+mn-cs"/>
         </a:defRPr>
       </a:lvl5pPr>
-      <a:lvl6pPr marL="1981276" algn="l" defTabSz="792510" rtl="0" eaLnBrk="1" latinLnBrk="0" hangingPunct="1">
-        <a:defRPr sz="1560" kern="1200">
+      <a:lvl6pPr marL="2057400" algn="l" defTabSz="822960" rtl="0" eaLnBrk="1" latinLnBrk="0" hangingPunct="1">
+        <a:defRPr sz="1620" kern="1200">
           <a:solidFill>
             <a:schemeClr val="tx1"/>
           </a:solidFill>
@@ -2921,8 +3362,8 @@
           <a:cs typeface="+mn-cs"/>
         </a:defRPr>
       </a:lvl6pPr>
-      <a:lvl7pPr marL="2377531" algn="l" defTabSz="792510" rtl="0" eaLnBrk="1" latinLnBrk="0" hangingPunct="1">
-        <a:defRPr sz="1560" kern="1200">
+      <a:lvl7pPr marL="2468880" algn="l" defTabSz="822960" rtl="0" eaLnBrk="1" latinLnBrk="0" hangingPunct="1">
+        <a:defRPr sz="1620" kern="1200">
           <a:solidFill>
             <a:schemeClr val="tx1"/>
           </a:solidFill>
@@ -2931,8 +3372,8 @@
           <a:cs typeface="+mn-cs"/>
         </a:defRPr>
       </a:lvl7pPr>
-      <a:lvl8pPr marL="2773787" algn="l" defTabSz="792510" rtl="0" eaLnBrk="1" latinLnBrk="0" hangingPunct="1">
-        <a:defRPr sz="1560" kern="1200">
+      <a:lvl8pPr marL="2880360" algn="l" defTabSz="822960" rtl="0" eaLnBrk="1" latinLnBrk="0" hangingPunct="1">
+        <a:defRPr sz="1620" kern="1200">
           <a:solidFill>
             <a:schemeClr val="tx1"/>
           </a:solidFill>
@@ -2941,8 +3382,8 @@
           <a:cs typeface="+mn-cs"/>
         </a:defRPr>
       </a:lvl8pPr>
-      <a:lvl9pPr marL="3170042" algn="l" defTabSz="792510" rtl="0" eaLnBrk="1" latinLnBrk="0" hangingPunct="1">
-        <a:defRPr sz="1560" kern="1200">
+      <a:lvl9pPr marL="3291840" algn="l" defTabSz="822960" rtl="0" eaLnBrk="1" latinLnBrk="0" hangingPunct="1">
+        <a:defRPr sz="1620" kern="1200">
           <a:solidFill>
             <a:schemeClr val="tx1"/>
           </a:solidFill>
@@ -2975,24 +3416,165 @@
       </p:grpSpPr>
       <p:cxnSp>
         <p:nvCxnSpPr>
-          <p:cNvPr id="1100" name="Straight Connector 1099">
+          <p:cNvPr id="58" name="Straight Connector 57">
             <a:extLst>
               <a:ext uri="{FF2B5EF4-FFF2-40B4-BE49-F238E27FC236}">
-                <a16:creationId xmlns:a16="http://schemas.microsoft.com/office/drawing/2014/main" id="{75DDB291-3A22-54F2-F60D-5857D8FA0E29}"/>
+                <a16:creationId xmlns:a16="http://schemas.microsoft.com/office/drawing/2014/main" id="{2A38328F-CC53-2995-C10D-3553B3032972}"/>
               </a:ext>
             </a:extLst>
           </p:cNvPr>
           <p:cNvCxnSpPr>
             <a:cxnSpLocks/>
-            <a:stCxn id="1037" idx="2"/>
-            <a:endCxn id="1087" idx="0"/>
+            <a:stCxn id="3" idx="2"/>
+            <a:endCxn id="53" idx="0"/>
           </p:cNvCxnSpPr>
           <p:nvPr/>
         </p:nvCxnSpPr>
         <p:spPr>
           <a:xfrm flipH="1">
-            <a:off x="12425611" y="3847072"/>
-            <a:ext cx="2" cy="1194296"/>
+            <a:off x="2807499" y="3663612"/>
+            <a:ext cx="1888879" cy="436595"/>
+          </a:xfrm>
+          <a:prstGeom prst="line">
+            <a:avLst/>
+          </a:prstGeom>
+          <a:ln w="38100">
+            <a:solidFill>
+              <a:schemeClr val="bg1">
+                <a:lumMod val="50000"/>
+              </a:schemeClr>
+            </a:solidFill>
+          </a:ln>
+        </p:spPr>
+        <p:style>
+          <a:lnRef idx="2">
+            <a:schemeClr val="accent1"/>
+          </a:lnRef>
+          <a:fillRef idx="0">
+            <a:schemeClr val="accent1"/>
+          </a:fillRef>
+          <a:effectRef idx="1">
+            <a:schemeClr val="accent1"/>
+          </a:effectRef>
+          <a:fontRef idx="minor">
+            <a:schemeClr val="tx1"/>
+          </a:fontRef>
+        </p:style>
+      </p:cxnSp>
+      <p:cxnSp>
+        <p:nvCxnSpPr>
+          <p:cNvPr id="61" name="Straight Connector 60">
+            <a:extLst>
+              <a:ext uri="{FF2B5EF4-FFF2-40B4-BE49-F238E27FC236}">
+                <a16:creationId xmlns:a16="http://schemas.microsoft.com/office/drawing/2014/main" id="{B4F7CEAD-E7B9-E6CC-B2ED-7A56E2C3B73C}"/>
+              </a:ext>
+            </a:extLst>
+          </p:cNvPr>
+          <p:cNvCxnSpPr>
+            <a:cxnSpLocks/>
+            <a:stCxn id="3" idx="2"/>
+            <a:endCxn id="56" idx="0"/>
+          </p:cNvCxnSpPr>
+          <p:nvPr/>
+        </p:nvCxnSpPr>
+        <p:spPr>
+          <a:xfrm>
+            <a:off x="4696378" y="3663612"/>
+            <a:ext cx="639075" cy="436595"/>
+          </a:xfrm>
+          <a:prstGeom prst="line">
+            <a:avLst/>
+          </a:prstGeom>
+          <a:ln w="38100">
+            <a:solidFill>
+              <a:schemeClr val="bg1">
+                <a:lumMod val="50000"/>
+              </a:schemeClr>
+            </a:solidFill>
+          </a:ln>
+        </p:spPr>
+        <p:style>
+          <a:lnRef idx="2">
+            <a:schemeClr val="accent1"/>
+          </a:lnRef>
+          <a:fillRef idx="0">
+            <a:schemeClr val="accent1"/>
+          </a:fillRef>
+          <a:effectRef idx="1">
+            <a:schemeClr val="accent1"/>
+          </a:effectRef>
+          <a:fontRef idx="minor">
+            <a:schemeClr val="tx1"/>
+          </a:fontRef>
+        </p:style>
+      </p:cxnSp>
+      <p:cxnSp>
+        <p:nvCxnSpPr>
+          <p:cNvPr id="1024" name="Straight Connector 1023">
+            <a:extLst>
+              <a:ext uri="{FF2B5EF4-FFF2-40B4-BE49-F238E27FC236}">
+                <a16:creationId xmlns:a16="http://schemas.microsoft.com/office/drawing/2014/main" id="{DA7A6425-D3BC-131A-C51E-3948455BD3C6}"/>
+              </a:ext>
+            </a:extLst>
+          </p:cNvPr>
+          <p:cNvCxnSpPr>
+            <a:cxnSpLocks/>
+            <a:stCxn id="53" idx="2"/>
+            <a:endCxn id="21" idx="0"/>
+          </p:cNvCxnSpPr>
+          <p:nvPr/>
+        </p:nvCxnSpPr>
+        <p:spPr>
+          <a:xfrm>
+            <a:off x="2807499" y="5132577"/>
+            <a:ext cx="1263978" cy="143411"/>
+          </a:xfrm>
+          <a:prstGeom prst="line">
+            <a:avLst/>
+          </a:prstGeom>
+          <a:ln w="38100">
+            <a:solidFill>
+              <a:schemeClr val="bg1">
+                <a:lumMod val="50000"/>
+              </a:schemeClr>
+            </a:solidFill>
+          </a:ln>
+        </p:spPr>
+        <p:style>
+          <a:lnRef idx="2">
+            <a:schemeClr val="accent1"/>
+          </a:lnRef>
+          <a:fillRef idx="0">
+            <a:schemeClr val="accent1"/>
+          </a:fillRef>
+          <a:effectRef idx="1">
+            <a:schemeClr val="accent1"/>
+          </a:effectRef>
+          <a:fontRef idx="minor">
+            <a:schemeClr val="tx1"/>
+          </a:fontRef>
+        </p:style>
+      </p:cxnSp>
+      <p:cxnSp>
+        <p:nvCxnSpPr>
+          <p:cNvPr id="1029" name="Straight Connector 1028">
+            <a:extLst>
+              <a:ext uri="{FF2B5EF4-FFF2-40B4-BE49-F238E27FC236}">
+                <a16:creationId xmlns:a16="http://schemas.microsoft.com/office/drawing/2014/main" id="{7BE9A4B7-2DA9-6B1B-EF8B-BD067BBD308F}"/>
+              </a:ext>
+            </a:extLst>
+          </p:cNvPr>
+          <p:cNvCxnSpPr>
+            <a:cxnSpLocks/>
+            <a:stCxn id="56" idx="2"/>
+            <a:endCxn id="21" idx="0"/>
+          </p:cNvCxnSpPr>
+          <p:nvPr/>
+        </p:nvCxnSpPr>
+        <p:spPr>
+          <a:xfrm flipH="1">
+            <a:off x="4071477" y="5132577"/>
+            <a:ext cx="1263976" cy="143411"/>
           </a:xfrm>
           <a:prstGeom prst="line">
             <a:avLst/>
@@ -3031,15 +3613,122 @@
           </p:cNvPr>
           <p:cNvCxnSpPr>
             <a:cxnSpLocks/>
-            <a:stCxn id="16" idx="2"/>
+            <a:stCxn id="3" idx="2"/>
             <a:endCxn id="1086" idx="0"/>
           </p:cNvCxnSpPr>
           <p:nvPr/>
         </p:nvCxnSpPr>
         <p:spPr>
           <a:xfrm>
-            <a:off x="4709244" y="3513978"/>
-            <a:ext cx="4505359" cy="1014363"/>
+            <a:off x="4696378" y="3663612"/>
+            <a:ext cx="4421975" cy="1099350"/>
+          </a:xfrm>
+          <a:prstGeom prst="line">
+            <a:avLst/>
+          </a:prstGeom>
+          <a:ln w="38100">
+            <a:solidFill>
+              <a:schemeClr val="bg1">
+                <a:lumMod val="50000"/>
+              </a:schemeClr>
+            </a:solidFill>
+          </a:ln>
+        </p:spPr>
+        <p:style>
+          <a:lnRef idx="2">
+            <a:schemeClr val="accent1"/>
+          </a:lnRef>
+          <a:fillRef idx="0">
+            <a:schemeClr val="accent1"/>
+          </a:fillRef>
+          <a:effectRef idx="1">
+            <a:schemeClr val="accent1"/>
+          </a:effectRef>
+          <a:fontRef idx="minor">
+            <a:schemeClr val="tx1"/>
+          </a:fontRef>
+        </p:style>
+      </p:cxnSp>
+      <p:sp>
+        <p:nvSpPr>
+          <p:cNvPr id="3" name="Rounded Rectangle 2">
+            <a:extLst>
+              <a:ext uri="{FF2B5EF4-FFF2-40B4-BE49-F238E27FC236}">
+                <a16:creationId xmlns:a16="http://schemas.microsoft.com/office/drawing/2014/main" id="{B4A242F1-B928-B257-118B-B13EA3A3766D}"/>
+              </a:ext>
+            </a:extLst>
+          </p:cNvPr>
+          <p:cNvSpPr/>
+          <p:nvPr/>
+        </p:nvSpPr>
+        <p:spPr>
+          <a:xfrm>
+            <a:off x="3946357" y="1626236"/>
+            <a:ext cx="1500042" cy="2037376"/>
+          </a:xfrm>
+          <a:prstGeom prst="roundRect">
+            <a:avLst/>
+          </a:prstGeom>
+          <a:solidFill>
+            <a:schemeClr val="accent5">
+              <a:lumMod val="20000"/>
+              <a:lumOff val="80000"/>
+            </a:schemeClr>
+          </a:solidFill>
+          <a:ln>
+            <a:solidFill>
+              <a:schemeClr val="accent5">
+                <a:lumMod val="40000"/>
+                <a:lumOff val="60000"/>
+              </a:schemeClr>
+            </a:solidFill>
+          </a:ln>
+        </p:spPr>
+        <p:style>
+          <a:lnRef idx="2">
+            <a:schemeClr val="accent1">
+              <a:shade val="15000"/>
+            </a:schemeClr>
+          </a:lnRef>
+          <a:fillRef idx="1">
+            <a:schemeClr val="accent1"/>
+          </a:fillRef>
+          <a:effectRef idx="0">
+            <a:schemeClr val="accent1"/>
+          </a:effectRef>
+          <a:fontRef idx="minor">
+            <a:schemeClr val="lt1"/>
+          </a:fontRef>
+        </p:style>
+        <p:txBody>
+          <a:bodyPr rtlCol="0" anchor="ctr"/>
+          <a:lstStyle/>
+          <a:p>
+            <a:pPr algn="ctr"/>
+            <a:endParaRPr lang="en-US"/>
+          </a:p>
+        </p:txBody>
+      </p:sp>
+      <p:cxnSp>
+        <p:nvCxnSpPr>
+          <p:cNvPr id="1100" name="Straight Connector 1099">
+            <a:extLst>
+              <a:ext uri="{FF2B5EF4-FFF2-40B4-BE49-F238E27FC236}">
+                <a16:creationId xmlns:a16="http://schemas.microsoft.com/office/drawing/2014/main" id="{75DDB291-3A22-54F2-F60D-5857D8FA0E29}"/>
+              </a:ext>
+            </a:extLst>
+          </p:cNvPr>
+          <p:cNvCxnSpPr>
+            <a:cxnSpLocks/>
+            <a:stCxn id="1037" idx="2"/>
+            <a:endCxn id="1087" idx="0"/>
+          </p:cNvCxnSpPr>
+          <p:nvPr/>
+        </p:nvCxnSpPr>
+        <p:spPr>
+          <a:xfrm flipH="1">
+            <a:off x="12386098" y="3804959"/>
+            <a:ext cx="39516" cy="1471029"/>
           </a:xfrm>
           <a:prstGeom prst="line">
             <a:avLst/>
@@ -3085,8 +3774,8 @@
         </p:nvCxnSpPr>
         <p:spPr>
           <a:xfrm flipH="1">
-            <a:off x="9214603" y="4106437"/>
-            <a:ext cx="1104084" cy="421904"/>
+            <a:off x="9118353" y="4064323"/>
+            <a:ext cx="1200334" cy="698639"/>
           </a:xfrm>
           <a:prstGeom prst="line">
             <a:avLst/>
@@ -3132,8 +3821,8 @@
         </p:nvCxnSpPr>
         <p:spPr>
           <a:xfrm flipH="1">
-            <a:off x="9214603" y="3847072"/>
-            <a:ext cx="3211010" cy="681269"/>
+            <a:off x="9118353" y="3804959"/>
+            <a:ext cx="3307261" cy="958003"/>
           </a:xfrm>
           <a:prstGeom prst="line">
             <a:avLst/>
@@ -3176,14 +3865,14 @@
           <p:nvPr/>
         </p:nvPicPr>
         <p:blipFill>
-          <a:blip r:embed="rId2"/>
+          <a:blip r:embed="rId3"/>
           <a:stretch>
             <a:fillRect/>
           </a:stretch>
         </p:blipFill>
         <p:spPr>
           <a:xfrm>
-            <a:off x="137096" y="2267651"/>
+            <a:off x="137097" y="2225538"/>
             <a:ext cx="1039077" cy="1039077"/>
           </a:xfrm>
           <a:prstGeom prst="rect">
@@ -3212,7 +3901,7 @@
             </p:nvSpPr>
             <p:spPr>
               <a:xfrm>
-                <a:off x="36889" y="1799351"/>
+                <a:off x="36889" y="1757238"/>
                 <a:ext cx="1248936" cy="461665"/>
               </a:xfrm>
               <a:prstGeom prst="rect">
@@ -3243,7 +3932,7 @@
                       <m:t>256×256</m:t>
                     </m:r>
                     <m:r>
-                      <a:rPr lang="en-US" sz="1200" b="0" i="1" smtClean="0">
+                      <a:rPr lang="en-US" sz="1200" i="1">
                         <a:latin typeface="Cambria Math" panose="02040503050406030204" pitchFamily="18" charset="0"/>
                       </a:rPr>
                       <m:t>×1</m:t>
@@ -3275,16 +3964,16 @@
             </p:nvSpPr>
             <p:spPr>
               <a:xfrm>
-                <a:off x="36889" y="1799351"/>
+                <a:off x="36889" y="1757238"/>
                 <a:ext cx="1248936" cy="461665"/>
               </a:xfrm>
               <a:prstGeom prst="rect">
                 <a:avLst/>
               </a:prstGeom>
               <a:blipFill>
-                <a:blip r:embed="rId3"/>
+                <a:blip r:embed="rId4"/>
                 <a:stretch>
-                  <a:fillRect b="-7895"/>
+                  <a:fillRect b="-10811"/>
                 </a:stretch>
               </a:blipFill>
             </p:spPr>
@@ -3320,7 +4009,7 @@
         </p:nvCxnSpPr>
         <p:spPr>
           <a:xfrm>
-            <a:off x="1176174" y="2787187"/>
+            <a:off x="1176175" y="2745073"/>
             <a:ext cx="321525" cy="0"/>
           </a:xfrm>
           <a:prstGeom prst="straightConnector1">
@@ -3364,7 +4053,7 @@
             </p:nvSpPr>
             <p:spPr>
               <a:xfrm>
-                <a:off x="1497698" y="1718397"/>
+                <a:off x="1497699" y="1676284"/>
                 <a:ext cx="2297151" cy="2137583"/>
               </a:xfrm>
               <a:prstGeom prst="roundRect">
@@ -3435,81 +4124,8 @@
                     <a:solidFill>
                       <a:schemeClr val="tx1"/>
                     </a:solidFill>
-                    <a:latin typeface="KaTeX_Main"/>
                   </a:rPr>
-                  <a:t>32</a:t>
-                </a:r>
-                <a:r>
-                  <a:rPr lang="en-US" sz="1200" dirty="0">
-                    <a:solidFill>
-                      <a:schemeClr val="tx1"/>
-                    </a:solidFill>
-                    <a:latin typeface="Arial" panose="020B0604020202020204" pitchFamily="34" charset="0"/>
-                  </a:rPr>
-                  <a:t>→</a:t>
-                </a:r>
-                <a:r>
-                  <a:rPr lang="en-US" sz="1200" dirty="0">
-                    <a:solidFill>
-                      <a:schemeClr val="tx1"/>
-                    </a:solidFill>
-                    <a:latin typeface="KaTeX_Main"/>
-                  </a:rPr>
-                  <a:t>64</a:t>
-                </a:r>
-                <a:r>
-                  <a:rPr lang="en-US" sz="1200" dirty="0">
-                    <a:solidFill>
-                      <a:schemeClr val="tx1"/>
-                    </a:solidFill>
-                    <a:latin typeface="Arial" panose="020B0604020202020204" pitchFamily="34" charset="0"/>
-                  </a:rPr>
-                  <a:t>→</a:t>
-                </a:r>
-                <a:r>
-                  <a:rPr lang="en-US" sz="1200" dirty="0">
-                    <a:solidFill>
-                      <a:schemeClr val="tx1"/>
-                    </a:solidFill>
-                    <a:latin typeface="KaTeX_Main"/>
-                  </a:rPr>
-                  <a:t>128</a:t>
-                </a:r>
-                <a:r>
-                  <a:rPr lang="en-US" sz="1200" dirty="0">
-                    <a:solidFill>
-                      <a:schemeClr val="tx1"/>
-                    </a:solidFill>
-                    <a:latin typeface="Arial" panose="020B0604020202020204" pitchFamily="34" charset="0"/>
-                  </a:rPr>
-                  <a:t>→</a:t>
-                </a:r>
-                <a:r>
-                  <a:rPr lang="en-US" sz="1200" dirty="0">
-                    <a:solidFill>
-                      <a:schemeClr val="tx1"/>
-                    </a:solidFill>
-                    <a:latin typeface="KaTeX_Main"/>
-                  </a:rPr>
-                  <a:t>256</a:t>
-                </a:r>
-                <a:r>
-                  <a:rPr lang="en-US" sz="1200" dirty="0">
-                    <a:solidFill>
-                      <a:schemeClr val="tx1"/>
-                    </a:solidFill>
-                    <a:latin typeface="Arial" panose="020B0604020202020204" pitchFamily="34" charset="0"/>
-                  </a:rPr>
-                  <a:t>→</a:t>
-                </a:r>
-                <a:r>
-                  <a:rPr lang="en-US" sz="1200" dirty="0">
-                    <a:solidFill>
-                      <a:schemeClr val="tx1"/>
-                    </a:solidFill>
-                    <a:latin typeface="KaTeX_Main"/>
-                  </a:rPr>
-                  <a:t>512</a:t>
+                  <a:t>32→64→128→256→512</a:t>
                 </a:r>
               </a:p>
               <a:p>
@@ -3519,7 +4135,6 @@
                     <a:solidFill>
                       <a:schemeClr val="tx1"/>
                     </a:solidFill>
-                    <a:latin typeface="KaTeX_Main"/>
                   </a:rPr>
                   <a:t>BatchNorm</a:t>
                 </a:r>
@@ -3528,7 +4143,6 @@
                     <a:solidFill>
                       <a:schemeClr val="tx1"/>
                     </a:solidFill>
-                    <a:latin typeface="KaTeX_Main"/>
                   </a:rPr>
                   <a:t> + </a:t>
                 </a:r>
@@ -3537,7 +4151,6 @@
                     <a:solidFill>
                       <a:schemeClr val="tx1"/>
                     </a:solidFill>
-                    <a:latin typeface="KaTeX_Main"/>
                   </a:rPr>
                   <a:t>LeakyReLU</a:t>
                 </a:r>
@@ -3545,7 +4158,6 @@
                   <a:solidFill>
                     <a:schemeClr val="tx1"/>
                   </a:solidFill>
-                  <a:latin typeface="KaTeX_Main"/>
                 </a:endParaRPr>
               </a:p>
               <a:p>
@@ -3555,7 +4167,6 @@
                     <a:solidFill>
                       <a:schemeClr val="tx1"/>
                     </a:solidFill>
-                    <a:latin typeface="KaTeX_Main"/>
                   </a:rPr>
                   <a:t>Output: </a:t>
                 </a:r>
@@ -3566,7 +4177,6 @@
                         <a:solidFill>
                           <a:schemeClr val="tx1"/>
                         </a:solidFill>
-                        <a:latin typeface="Cambria Math" panose="02040503050406030204" pitchFamily="18" charset="0"/>
                       </a:rPr>
                       <m:t>𝟖</m:t>
                     </m:r>
@@ -3575,7 +4185,6 @@
                         <a:solidFill>
                           <a:schemeClr val="tx1"/>
                         </a:solidFill>
-                        <a:latin typeface="Cambria Math" panose="02040503050406030204" pitchFamily="18" charset="0"/>
                       </a:rPr>
                       <m:t>×</m:t>
                     </m:r>
@@ -3584,7 +4193,6 @@
                         <a:solidFill>
                           <a:schemeClr val="tx1"/>
                         </a:solidFill>
-                        <a:latin typeface="Cambria Math" panose="02040503050406030204" pitchFamily="18" charset="0"/>
                       </a:rPr>
                       <m:t>𝟖</m:t>
                     </m:r>
@@ -3593,7 +4201,6 @@
                         <a:solidFill>
                           <a:schemeClr val="tx1"/>
                         </a:solidFill>
-                        <a:latin typeface="Cambria Math" panose="02040503050406030204" pitchFamily="18" charset="0"/>
                       </a:rPr>
                       <m:t>×</m:t>
                     </m:r>
@@ -3602,7 +4209,6 @@
                         <a:solidFill>
                           <a:schemeClr val="tx1"/>
                         </a:solidFill>
-                        <a:latin typeface="Cambria Math" panose="02040503050406030204" pitchFamily="18" charset="0"/>
                       </a:rPr>
                       <m:t>𝟓𝟏𝟐</m:t>
                     </m:r>
@@ -3613,7 +4219,6 @@
                     <a:solidFill>
                       <a:schemeClr val="tx1"/>
                     </a:solidFill>
-                    <a:latin typeface="KaTeX_Main"/>
                   </a:rPr>
                   <a:t> d</a:t>
                 </a:r>
@@ -3638,14 +4243,14 @@
             </p:nvSpPr>
             <p:spPr>
               <a:xfrm>
-                <a:off x="1497698" y="1718397"/>
+                <a:off x="1497699" y="1676284"/>
                 <a:ext cx="2297151" cy="2137583"/>
               </a:xfrm>
               <a:prstGeom prst="roundRect">
                 <a:avLst/>
               </a:prstGeom>
               <a:blipFill>
-                <a:blip r:embed="rId4"/>
+                <a:blip r:embed="rId5"/>
                 <a:stretch>
                   <a:fillRect/>
                 </a:stretch>
@@ -3687,17 +4292,14 @@
             </p:nvSpPr>
             <p:spPr>
               <a:xfrm>
-                <a:off x="4352405" y="2068346"/>
+                <a:off x="4352405" y="2026233"/>
                 <a:ext cx="713678" cy="646771"/>
               </a:xfrm>
               <a:prstGeom prst="roundRect">
                 <a:avLst/>
               </a:prstGeom>
               <a:solidFill>
-                <a:schemeClr val="tx2">
-                  <a:lumMod val="75000"/>
-                  <a:lumOff val="25000"/>
-                </a:schemeClr>
+                <a:schemeClr val="accent5"/>
               </a:solidFill>
               <a:ln w="38100"/>
             </p:spPr>
@@ -3743,7 +4345,7 @@
                 <a:pPr algn="ctr"/>
                 <a:r>
                   <a:rPr lang="en-US" sz="1200" dirty="0"/>
-                  <a:t>(128 d)</a:t>
+                  <a:t>(100 d)</a:t>
                 </a:r>
               </a:p>
             </p:txBody>
@@ -3766,14 +4368,14 @@
             </p:nvSpPr>
             <p:spPr>
               <a:xfrm>
-                <a:off x="4352405" y="2068346"/>
+                <a:off x="4352405" y="2026233"/>
                 <a:ext cx="713678" cy="646771"/>
               </a:xfrm>
               <a:prstGeom prst="roundRect">
                 <a:avLst/>
               </a:prstGeom>
               <a:blipFill>
-                <a:blip r:embed="rId5"/>
+                <a:blip r:embed="rId6"/>
                 <a:stretch>
                   <a:fillRect/>
                 </a:stretch>
@@ -3811,7 +4413,7 @@
         </p:nvCxnSpPr>
         <p:spPr>
           <a:xfrm>
-            <a:off x="3794848" y="2391729"/>
+            <a:off x="3794849" y="2349615"/>
             <a:ext cx="535257" cy="0"/>
           </a:xfrm>
           <a:prstGeom prst="straightConnector1">
@@ -3853,7 +4455,7 @@
         </p:nvSpPr>
         <p:spPr>
           <a:xfrm>
-            <a:off x="3659172" y="2090012"/>
+            <a:off x="3623076" y="2120091"/>
             <a:ext cx="828906" cy="276999"/>
           </a:xfrm>
           <a:prstGeom prst="rect">
@@ -3891,17 +4493,14 @@
             </p:nvSpPr>
             <p:spPr>
               <a:xfrm>
-                <a:off x="4352405" y="2867207"/>
+                <a:off x="4352405" y="2825094"/>
                 <a:ext cx="713678" cy="646771"/>
               </a:xfrm>
               <a:prstGeom prst="roundRect">
                 <a:avLst/>
               </a:prstGeom>
               <a:solidFill>
-                <a:schemeClr val="tx2">
-                  <a:lumMod val="75000"/>
-                  <a:lumOff val="25000"/>
-                </a:schemeClr>
+                <a:schemeClr val="accent5"/>
               </a:solidFill>
               <a:ln w="38100"/>
             </p:spPr>
@@ -3988,7 +4587,7 @@
                 <a:pPr algn="ctr"/>
                 <a:r>
                   <a:rPr lang="en-US" sz="1200" dirty="0"/>
-                  <a:t>(128 d)</a:t>
+                  <a:t>(100 d)</a:t>
                 </a:r>
               </a:p>
             </p:txBody>
@@ -4011,14 +4610,14 @@
             </p:nvSpPr>
             <p:spPr>
               <a:xfrm>
-                <a:off x="4352405" y="2867207"/>
+                <a:off x="4352405" y="2825094"/>
                 <a:ext cx="713678" cy="646771"/>
               </a:xfrm>
               <a:prstGeom prst="roundRect">
                 <a:avLst/>
               </a:prstGeom>
               <a:blipFill>
-                <a:blip r:embed="rId6"/>
+                <a:blip r:embed="rId7"/>
                 <a:stretch>
                   <a:fillRect/>
                 </a:stretch>
@@ -4056,7 +4655,7 @@
         </p:nvCxnSpPr>
         <p:spPr>
           <a:xfrm>
-            <a:off x="3794848" y="3190589"/>
+            <a:off x="3794849" y="3148475"/>
             <a:ext cx="535257" cy="0"/>
           </a:xfrm>
           <a:prstGeom prst="straightConnector1">
@@ -4098,7 +4697,7 @@
         </p:nvSpPr>
         <p:spPr>
           <a:xfrm>
-            <a:off x="3659172" y="2948247"/>
+            <a:off x="3623076" y="2906134"/>
             <a:ext cx="828906" cy="276999"/>
           </a:xfrm>
           <a:prstGeom prst="rect">
@@ -4134,7 +4733,7 @@
         </p:nvSpPr>
         <p:spPr>
           <a:xfrm>
-            <a:off x="5255652" y="2236765"/>
+            <a:off x="5255652" y="2194651"/>
             <a:ext cx="1097280" cy="1097280"/>
           </a:xfrm>
           <a:prstGeom prst="ellipse">
@@ -4175,7 +4774,7 @@
             <a:pPr algn="ctr"/>
             <a:r>
               <a:rPr lang="en-US" sz="1200" dirty="0"/>
-              <a:t>(128 d)</a:t>
+              <a:t>(100 d)</a:t>
             </a:r>
           </a:p>
         </p:txBody>
@@ -4197,7 +4796,7 @@
         </p:nvCxnSpPr>
         <p:spPr>
           <a:xfrm flipV="1">
-            <a:off x="5066083" y="2389725"/>
+            <a:off x="5066083" y="2347612"/>
             <a:ext cx="325314" cy="2007"/>
           </a:xfrm>
           <a:prstGeom prst="straightConnector1">
@@ -4239,7 +4838,7 @@
         </p:nvSpPr>
         <p:spPr>
           <a:xfrm>
-            <a:off x="3911935" y="1729179"/>
+            <a:off x="3911936" y="1687066"/>
             <a:ext cx="1594623" cy="276999"/>
           </a:xfrm>
           <a:prstGeom prst="rect">
@@ -4257,9 +4856,7 @@
             <a:r>
               <a:rPr lang="en-US" sz="1200" b="1" u="sng" dirty="0">
                 <a:solidFill>
-                  <a:schemeClr val="bg1">
-                    <a:lumMod val="65000"/>
-                  </a:schemeClr>
+                  <a:schemeClr val="accent5"/>
                 </a:solidFill>
               </a:rPr>
               <a:t>Latent Distribution</a:t>
@@ -4281,7 +4878,7 @@
         </p:nvSpPr>
         <p:spPr>
           <a:xfrm>
-            <a:off x="5255652" y="521065"/>
+            <a:off x="5255652" y="478951"/>
             <a:ext cx="1097280" cy="1097280"/>
           </a:xfrm>
           <a:prstGeom prst="ellipse">
@@ -4336,7 +4933,7 @@
             <a:pPr algn="ctr"/>
             <a:r>
               <a:rPr lang="en-US" sz="1200" dirty="0"/>
-              <a:t>(128 d)</a:t>
+              <a:t>(100 d)</a:t>
             </a:r>
           </a:p>
         </p:txBody>
@@ -4356,7 +4953,14 @@
           <p:nvPr/>
         </p:nvPicPr>
         <p:blipFill>
-          <a:blip r:embed="rId7">
+          <a:blip r:embed="rId8">
+            <a:duotone>
+              <a:schemeClr val="accent5">
+                <a:shade val="45000"/>
+                <a:satMod val="135000"/>
+              </a:schemeClr>
+              <a:prstClr val="white"/>
+            </a:duotone>
             <a:extLst>
               <a:ext uri="{28A0092B-C50C-407E-A947-70E740481C1C}">
                 <a14:useLocalDpi xmlns:a14="http://schemas.microsoft.com/office/drawing/2010/main" val="0"/>
@@ -4370,7 +4974,7 @@
         </p:blipFill>
         <p:spPr bwMode="auto">
           <a:xfrm>
-            <a:off x="2833393" y="424412"/>
+            <a:off x="2833394" y="382299"/>
             <a:ext cx="2388807" cy="964053"/>
           </a:xfrm>
           <a:prstGeom prst="rect">
@@ -4402,7 +5006,7 @@
         </p:nvSpPr>
         <p:spPr>
           <a:xfrm>
-            <a:off x="2833393" y="160932"/>
+            <a:off x="2833394" y="118819"/>
             <a:ext cx="2388807" cy="276999"/>
           </a:xfrm>
           <a:prstGeom prst="rect">
@@ -4420,8 +5024,9 @@
             <a:r>
               <a:rPr lang="en-US" sz="1200" b="1" u="sng" dirty="0">
                 <a:solidFill>
-                  <a:schemeClr val="bg1">
-                    <a:lumMod val="65000"/>
+                  <a:schemeClr val="accent5">
+                    <a:lumMod val="40000"/>
+                    <a:lumOff val="60000"/>
                   </a:schemeClr>
                 </a:solidFill>
               </a:rPr>
@@ -4447,7 +5052,7 @@
         </p:nvCxnSpPr>
         <p:spPr>
           <a:xfrm>
-            <a:off x="4898814" y="1069705"/>
+            <a:off x="4898814" y="1027591"/>
             <a:ext cx="356838" cy="0"/>
           </a:xfrm>
           <a:prstGeom prst="straightConnector1">
@@ -4491,7 +5096,7 @@
             </p:nvSpPr>
             <p:spPr>
               <a:xfrm>
-                <a:off x="6877154" y="1718395"/>
+                <a:off x="6877155" y="1676282"/>
                 <a:ext cx="2468727" cy="2137583"/>
               </a:xfrm>
               <a:prstGeom prst="roundRect">
@@ -4562,81 +5167,8 @@
                     <a:solidFill>
                       <a:schemeClr val="tx1"/>
                     </a:solidFill>
-                    <a:latin typeface="KaTeX_Main"/>
                   </a:rPr>
-                  <a:t>512</a:t>
-                </a:r>
-                <a:r>
-                  <a:rPr lang="en-US" sz="1200" dirty="0">
-                    <a:solidFill>
-                      <a:schemeClr val="tx1"/>
-                    </a:solidFill>
-                    <a:latin typeface="Arial" panose="020B0604020202020204" pitchFamily="34" charset="0"/>
-                  </a:rPr>
-                  <a:t>→</a:t>
-                </a:r>
-                <a:r>
-                  <a:rPr lang="en-US" sz="1200" dirty="0">
-                    <a:solidFill>
-                      <a:schemeClr val="tx1"/>
-                    </a:solidFill>
-                    <a:latin typeface="KaTeX_Main"/>
-                  </a:rPr>
-                  <a:t>256</a:t>
-                </a:r>
-                <a:r>
-                  <a:rPr lang="en-US" sz="1200" dirty="0">
-                    <a:solidFill>
-                      <a:schemeClr val="tx1"/>
-                    </a:solidFill>
-                    <a:latin typeface="Arial" panose="020B0604020202020204" pitchFamily="34" charset="0"/>
-                  </a:rPr>
-                  <a:t>→</a:t>
-                </a:r>
-                <a:r>
-                  <a:rPr lang="en-US" sz="1200" dirty="0">
-                    <a:solidFill>
-                      <a:schemeClr val="tx1"/>
-                    </a:solidFill>
-                    <a:latin typeface="KaTeX_Main"/>
-                  </a:rPr>
-                  <a:t>128</a:t>
-                </a:r>
-                <a:r>
-                  <a:rPr lang="en-US" sz="1200" dirty="0">
-                    <a:solidFill>
-                      <a:schemeClr val="tx1"/>
-                    </a:solidFill>
-                    <a:latin typeface="Arial" panose="020B0604020202020204" pitchFamily="34" charset="0"/>
-                  </a:rPr>
-                  <a:t>→</a:t>
-                </a:r>
-                <a:r>
-                  <a:rPr lang="en-US" sz="1200" dirty="0">
-                    <a:solidFill>
-                      <a:schemeClr val="tx1"/>
-                    </a:solidFill>
-                    <a:latin typeface="KaTeX_Main"/>
-                  </a:rPr>
-                  <a:t>64</a:t>
-                </a:r>
-                <a:r>
-                  <a:rPr lang="en-US" sz="1200" dirty="0">
-                    <a:solidFill>
-                      <a:schemeClr val="tx1"/>
-                    </a:solidFill>
-                    <a:latin typeface="Arial" panose="020B0604020202020204" pitchFamily="34" charset="0"/>
-                  </a:rPr>
-                  <a:t>→</a:t>
-                </a:r>
-                <a:r>
-                  <a:rPr lang="en-US" sz="1200" dirty="0">
-                    <a:solidFill>
-                      <a:schemeClr val="tx1"/>
-                    </a:solidFill>
-                    <a:latin typeface="KaTeX_Main"/>
-                  </a:rPr>
-                  <a:t>32</a:t>
+                  <a:t>512→256→128→64→32</a:t>
                 </a:r>
               </a:p>
               <a:p>
@@ -4646,7 +5178,6 @@
                     <a:solidFill>
                       <a:schemeClr val="tx1"/>
                     </a:solidFill>
-                    <a:latin typeface="KaTeX_Main"/>
                   </a:rPr>
                   <a:t>BatchNorm</a:t>
                 </a:r>
@@ -4655,7 +5186,6 @@
                     <a:solidFill>
                       <a:schemeClr val="tx1"/>
                     </a:solidFill>
-                    <a:latin typeface="KaTeX_Main"/>
                   </a:rPr>
                   <a:t> + </a:t>
                 </a:r>
@@ -4664,7 +5194,6 @@
                     <a:solidFill>
                       <a:schemeClr val="tx1"/>
                     </a:solidFill>
-                    <a:latin typeface="KaTeX_Main"/>
                   </a:rPr>
                   <a:t>LeakyReLU</a:t>
                 </a:r>
@@ -4672,7 +5201,6 @@
                   <a:solidFill>
                     <a:schemeClr val="tx1"/>
                   </a:solidFill>
-                  <a:latin typeface="KaTeX_Main"/>
                 </a:endParaRPr>
               </a:p>
               <a:p>
@@ -4682,7 +5210,6 @@
                     <a:solidFill>
                       <a:schemeClr val="tx1"/>
                     </a:solidFill>
-                    <a:latin typeface="KaTeX_Main"/>
                   </a:rPr>
                   <a:t>Penult. Output: </a:t>
                 </a:r>
@@ -4693,7 +5220,6 @@
                         <a:solidFill>
                           <a:schemeClr val="tx1"/>
                         </a:solidFill>
-                        <a:latin typeface="Cambria Math" panose="02040503050406030204" pitchFamily="18" charset="0"/>
                       </a:rPr>
                       <m:t>256</m:t>
                     </m:r>
@@ -4702,7 +5228,6 @@
                         <a:solidFill>
                           <a:schemeClr val="tx1"/>
                         </a:solidFill>
-                        <a:latin typeface="Cambria Math" panose="02040503050406030204" pitchFamily="18" charset="0"/>
                       </a:rPr>
                       <m:t>×256×32</m:t>
                     </m:r>
@@ -4713,7 +5238,6 @@
                     <a:solidFill>
                       <a:schemeClr val="tx1"/>
                     </a:solidFill>
-                    <a:latin typeface="KaTeX_Main"/>
                   </a:rPr>
                   <a:t> d</a:t>
                 </a:r>
@@ -4724,7 +5248,6 @@
                   <a:solidFill>
                     <a:schemeClr val="tx1"/>
                   </a:solidFill>
-                  <a:latin typeface="KaTeX_Main"/>
                 </a:endParaRPr>
               </a:p>
               <a:p>
@@ -4734,7 +5257,6 @@
                     <a:solidFill>
                       <a:schemeClr val="tx1"/>
                     </a:solidFill>
-                    <a:latin typeface="KaTeX_Main"/>
                   </a:rPr>
                   <a:t>Final Layer</a:t>
                 </a:r>
@@ -4746,7 +5268,6 @@
                     <a:solidFill>
                       <a:schemeClr val="tx1"/>
                     </a:solidFill>
-                    <a:latin typeface="KaTeX_Main"/>
                   </a:rPr>
                   <a:t>Conv + Sigmoid</a:t>
                 </a:r>
@@ -4758,7 +5279,6 @@
                     <a:solidFill>
                       <a:schemeClr val="tx1"/>
                     </a:solidFill>
-                    <a:latin typeface="KaTeX_Main"/>
                   </a:rPr>
                   <a:t>Output: </a:t>
                 </a:r>
@@ -4769,7 +5289,6 @@
                         <a:solidFill>
                           <a:schemeClr val="tx1"/>
                         </a:solidFill>
-                        <a:latin typeface="Cambria Math" panose="02040503050406030204" pitchFamily="18" charset="0"/>
                       </a:rPr>
                       <m:t>𝟐𝟓𝟔</m:t>
                     </m:r>
@@ -4778,7 +5297,6 @@
                         <a:solidFill>
                           <a:schemeClr val="tx1"/>
                         </a:solidFill>
-                        <a:latin typeface="Cambria Math" panose="02040503050406030204" pitchFamily="18" charset="0"/>
                       </a:rPr>
                       <m:t>×</m:t>
                     </m:r>
@@ -4787,7 +5305,6 @@
                         <a:solidFill>
                           <a:schemeClr val="tx1"/>
                         </a:solidFill>
-                        <a:latin typeface="Cambria Math" panose="02040503050406030204" pitchFamily="18" charset="0"/>
                       </a:rPr>
                       <m:t>𝟐𝟓𝟔</m:t>
                     </m:r>
@@ -4796,7 +5313,6 @@
                         <a:solidFill>
                           <a:schemeClr val="tx1"/>
                         </a:solidFill>
-                        <a:latin typeface="Cambria Math" panose="02040503050406030204" pitchFamily="18" charset="0"/>
                       </a:rPr>
                       <m:t>×</m:t>
                     </m:r>
@@ -4805,7 +5321,6 @@
                         <a:solidFill>
                           <a:schemeClr val="tx1"/>
                         </a:solidFill>
-                        <a:latin typeface="Cambria Math" panose="02040503050406030204" pitchFamily="18" charset="0"/>
                       </a:rPr>
                       <m:t>𝟏</m:t>
                     </m:r>
@@ -4816,7 +5331,6 @@
                     <a:solidFill>
                       <a:schemeClr val="tx1"/>
                     </a:solidFill>
-                    <a:latin typeface="KaTeX_Main"/>
                   </a:rPr>
                   <a:t> d</a:t>
                 </a:r>
@@ -4827,7 +5341,6 @@
                   <a:solidFill>
                     <a:schemeClr val="tx1"/>
                   </a:solidFill>
-                  <a:latin typeface="KaTeX_Main"/>
                 </a:endParaRPr>
               </a:p>
             </p:txBody>
@@ -4850,14 +5363,14 @@
             </p:nvSpPr>
             <p:spPr>
               <a:xfrm>
-                <a:off x="6877154" y="1718395"/>
+                <a:off x="6877155" y="1676282"/>
                 <a:ext cx="2468727" cy="2137583"/>
               </a:xfrm>
               <a:prstGeom prst="roundRect">
                 <a:avLst/>
               </a:prstGeom>
               <a:blipFill>
-                <a:blip r:embed="rId8"/>
+                <a:blip r:embed="rId9"/>
                 <a:stretch>
                   <a:fillRect/>
                 </a:stretch>
@@ -4901,7 +5414,7 @@
         </p:nvCxnSpPr>
         <p:spPr>
           <a:xfrm>
-            <a:off x="6352932" y="2785405"/>
+            <a:off x="6352932" y="2743291"/>
             <a:ext cx="524222" cy="1782"/>
           </a:xfrm>
           <a:prstGeom prst="straightConnector1">
@@ -4946,7 +5459,7 @@
         </p:nvCxnSpPr>
         <p:spPr>
           <a:xfrm>
-            <a:off x="6092381" y="1578547"/>
+            <a:off x="6092382" y="1536433"/>
             <a:ext cx="784773" cy="1208640"/>
           </a:xfrm>
           <a:prstGeom prst="straightConnector1">
@@ -4990,14 +5503,14 @@
           <p:nvPr/>
         </p:nvPicPr>
         <p:blipFill>
-          <a:blip r:embed="rId9"/>
+          <a:blip r:embed="rId10"/>
           <a:stretch>
             <a:fillRect/>
           </a:stretch>
         </p:blipFill>
         <p:spPr>
           <a:xfrm>
-            <a:off x="9797479" y="3064021"/>
+            <a:off x="9797479" y="3021907"/>
             <a:ext cx="1042416" cy="1042416"/>
           </a:xfrm>
           <a:prstGeom prst="rect">
@@ -5024,7 +5537,7 @@
         </p:nvSpPr>
         <p:spPr>
           <a:xfrm>
-            <a:off x="9629684" y="1205882"/>
+            <a:off x="9629684" y="1163769"/>
             <a:ext cx="1375180" cy="276999"/>
           </a:xfrm>
           <a:prstGeom prst="rect">
@@ -5060,7 +5573,7 @@
         </p:nvSpPr>
         <p:spPr>
           <a:xfrm>
-            <a:off x="9714017" y="2761184"/>
+            <a:off x="9714017" y="2719071"/>
             <a:ext cx="1248936" cy="276999"/>
           </a:xfrm>
           <a:prstGeom prst="rect">
@@ -5098,7 +5611,7 @@
         </p:nvCxnSpPr>
         <p:spPr>
           <a:xfrm flipV="1">
-            <a:off x="5066083" y="3186513"/>
+            <a:off x="5066083" y="3144400"/>
             <a:ext cx="325314" cy="2007"/>
           </a:xfrm>
           <a:prstGeom prst="straightConnector1">
@@ -5142,7 +5655,7 @@
             </p:nvSpPr>
             <p:spPr>
               <a:xfrm>
-                <a:off x="11277037" y="1709489"/>
+                <a:off x="11277038" y="1667376"/>
                 <a:ext cx="2297151" cy="2137583"/>
               </a:xfrm>
               <a:prstGeom prst="roundRect">
@@ -5183,6 +5696,7 @@
                     <a:solidFill>
                       <a:schemeClr val="tx1"/>
                     </a:solidFill>
+                    <a:latin typeface="Aptos" panose="020B0004020202020204" pitchFamily="34" charset="0"/>
                   </a:rPr>
                   <a:t>Discriminator</a:t>
                 </a:r>
@@ -5193,6 +5707,7 @@
                   <a:solidFill>
                     <a:schemeClr val="tx1"/>
                   </a:solidFill>
+                  <a:latin typeface="Aptos" panose="020B0004020202020204" pitchFamily="34" charset="0"/>
                 </a:endParaRPr>
               </a:p>
               <a:p>
@@ -5202,6 +5717,7 @@
                     <a:solidFill>
                       <a:schemeClr val="tx1"/>
                     </a:solidFill>
+                    <a:latin typeface="Aptos" panose="020B0004020202020204" pitchFamily="34" charset="0"/>
                   </a:rPr>
                   <a:t>Conv2d Layers</a:t>
                 </a:r>
@@ -5213,81 +5729,9 @@
                     <a:solidFill>
                       <a:schemeClr val="tx1"/>
                     </a:solidFill>
-                    <a:latin typeface="KaTeX_Main"/>
+                    <a:latin typeface="Aptos" panose="020B0004020202020204" pitchFamily="34" charset="0"/>
                   </a:rPr>
-                  <a:t>32</a:t>
-                </a:r>
-                <a:r>
-                  <a:rPr lang="en-US" sz="1200" dirty="0">
-                    <a:solidFill>
-                      <a:schemeClr val="tx1"/>
-                    </a:solidFill>
-                    <a:latin typeface="Arial" panose="020B0604020202020204" pitchFamily="34" charset="0"/>
-                  </a:rPr>
-                  <a:t>→</a:t>
-                </a:r>
-                <a:r>
-                  <a:rPr lang="en-US" sz="1200" dirty="0">
-                    <a:solidFill>
-                      <a:schemeClr val="tx1"/>
-                    </a:solidFill>
-                    <a:latin typeface="KaTeX_Main"/>
-                  </a:rPr>
-                  <a:t>64</a:t>
-                </a:r>
-                <a:r>
-                  <a:rPr lang="en-US" sz="1200" dirty="0">
-                    <a:solidFill>
-                      <a:schemeClr val="tx1"/>
-                    </a:solidFill>
-                    <a:latin typeface="Arial" panose="020B0604020202020204" pitchFamily="34" charset="0"/>
-                  </a:rPr>
-                  <a:t>→</a:t>
-                </a:r>
-                <a:r>
-                  <a:rPr lang="en-US" sz="1200" dirty="0">
-                    <a:solidFill>
-                      <a:schemeClr val="tx1"/>
-                    </a:solidFill>
-                    <a:latin typeface="KaTeX_Main"/>
-                  </a:rPr>
-                  <a:t>128</a:t>
-                </a:r>
-                <a:r>
-                  <a:rPr lang="en-US" sz="1200" dirty="0">
-                    <a:solidFill>
-                      <a:schemeClr val="tx1"/>
-                    </a:solidFill>
-                    <a:latin typeface="Arial" panose="020B0604020202020204" pitchFamily="34" charset="0"/>
-                  </a:rPr>
-                  <a:t>→</a:t>
-                </a:r>
-                <a:r>
-                  <a:rPr lang="en-US" sz="1200" dirty="0">
-                    <a:solidFill>
-                      <a:schemeClr val="tx1"/>
-                    </a:solidFill>
-                    <a:latin typeface="KaTeX_Main"/>
-                  </a:rPr>
-                  <a:t>256</a:t>
-                </a:r>
-                <a:r>
-                  <a:rPr lang="en-US" sz="1200" dirty="0">
-                    <a:solidFill>
-                      <a:schemeClr val="tx1"/>
-                    </a:solidFill>
-                    <a:latin typeface="Arial" panose="020B0604020202020204" pitchFamily="34" charset="0"/>
-                  </a:rPr>
-                  <a:t>→</a:t>
-                </a:r>
-                <a:r>
-                  <a:rPr lang="en-US" sz="1200" dirty="0">
-                    <a:solidFill>
-                      <a:schemeClr val="tx1"/>
-                    </a:solidFill>
-                    <a:latin typeface="KaTeX_Main"/>
-                  </a:rPr>
-                  <a:t>512</a:t>
+                  <a:t>32→64→128→256→512</a:t>
                 </a:r>
               </a:p>
               <a:p>
@@ -5297,7 +5741,6 @@
                     <a:solidFill>
                       <a:schemeClr val="tx1"/>
                     </a:solidFill>
-                    <a:latin typeface="KaTeX_Main"/>
                   </a:rPr>
                   <a:t>BatchNorm</a:t>
                 </a:r>
@@ -5306,7 +5749,7 @@
                     <a:solidFill>
                       <a:schemeClr val="tx1"/>
                     </a:solidFill>
-                    <a:latin typeface="KaTeX_Main"/>
+                    <a:latin typeface="Aptos" panose="020B0004020202020204" pitchFamily="34" charset="0"/>
                   </a:rPr>
                   <a:t> + </a:t>
                 </a:r>
@@ -5315,7 +5758,7 @@
                     <a:solidFill>
                       <a:schemeClr val="tx1"/>
                     </a:solidFill>
-                    <a:latin typeface="KaTeX_Main"/>
+                    <a:latin typeface="Aptos" panose="020B0004020202020204" pitchFamily="34" charset="0"/>
                   </a:rPr>
                   <a:t>LeakyReLU</a:t>
                 </a:r>
@@ -5323,7 +5766,7 @@
                   <a:solidFill>
                     <a:schemeClr val="tx1"/>
                   </a:solidFill>
-                  <a:latin typeface="KaTeX_Main"/>
+                  <a:latin typeface="Aptos" panose="020B0004020202020204" pitchFamily="34" charset="0"/>
                 </a:endParaRPr>
               </a:p>
               <a:p>
@@ -5333,14 +5776,14 @@
                     <a:solidFill>
                       <a:schemeClr val="tx1"/>
                     </a:solidFill>
-                    <a:latin typeface="KaTeX_Main"/>
+                    <a:latin typeface="Aptos" panose="020B0004020202020204" pitchFamily="34" charset="0"/>
                   </a:rPr>
                   <a:t>Penult. Output: </a:t>
                 </a:r>
                 <a14:m>
                   <m:oMath xmlns:m="http://schemas.openxmlformats.org/officeDocument/2006/math">
                     <m:r>
-                      <a:rPr lang="en-US" sz="1200" b="0" i="1" dirty="0" smtClean="0">
+                      <a:rPr lang="en-US" sz="1200" i="1" dirty="0">
                         <a:solidFill>
                           <a:schemeClr val="tx1"/>
                         </a:solidFill>
@@ -5355,7 +5798,7 @@
                     <a:solidFill>
                       <a:schemeClr val="tx1"/>
                     </a:solidFill>
-                    <a:latin typeface="KaTeX_Main"/>
+                    <a:latin typeface="Aptos" panose="020B0004020202020204" pitchFamily="34" charset="0"/>
                   </a:rPr>
                   <a:t> d</a:t>
                 </a:r>
@@ -5366,7 +5809,7 @@
                   <a:solidFill>
                     <a:schemeClr val="tx1"/>
                   </a:solidFill>
-                  <a:latin typeface="KaTeX_Main"/>
+                  <a:latin typeface="Aptos" panose="020B0004020202020204" pitchFamily="34" charset="0"/>
                 </a:endParaRPr>
               </a:p>
               <a:p>
@@ -5376,7 +5819,7 @@
                     <a:solidFill>
                       <a:schemeClr val="tx1"/>
                     </a:solidFill>
-                    <a:latin typeface="KaTeX_Main"/>
+                    <a:latin typeface="Aptos" panose="020B0004020202020204" pitchFamily="34" charset="0"/>
                   </a:rPr>
                   <a:t>Final Layer</a:t>
                 </a:r>
@@ -5388,7 +5831,7 @@
                     <a:solidFill>
                       <a:schemeClr val="tx1"/>
                     </a:solidFill>
-                    <a:latin typeface="KaTeX_Main"/>
+                    <a:latin typeface="Aptos" panose="020B0004020202020204" pitchFamily="34" charset="0"/>
                   </a:rPr>
                   <a:t>Linear + Sigmoid</a:t>
                 </a:r>
@@ -5400,7 +5843,7 @@
                     <a:solidFill>
                       <a:schemeClr val="tx1"/>
                     </a:solidFill>
-                    <a:latin typeface="KaTeX_Main"/>
+                    <a:latin typeface="Aptos" panose="020B0004020202020204" pitchFamily="34" charset="0"/>
                   </a:rPr>
                   <a:t>Output: 1 d</a:t>
                 </a:r>
@@ -5411,7 +5854,7 @@
                   <a:solidFill>
                     <a:schemeClr val="tx1"/>
                   </a:solidFill>
-                  <a:latin typeface="KaTeX_Main"/>
+                  <a:latin typeface="Aptos" panose="020B0004020202020204" pitchFamily="34" charset="0"/>
                 </a:endParaRPr>
               </a:p>
             </p:txBody>
@@ -5434,14 +5877,14 @@
             </p:nvSpPr>
             <p:spPr>
               <a:xfrm>
-                <a:off x="11277037" y="1709489"/>
+                <a:off x="11277038" y="1667376"/>
                 <a:ext cx="2297151" cy="2137583"/>
               </a:xfrm>
               <a:prstGeom prst="roundRect">
                 <a:avLst/>
               </a:prstGeom>
               <a:blipFill>
-                <a:blip r:embed="rId10"/>
+                <a:blip r:embed="rId11"/>
                 <a:stretch>
                   <a:fillRect/>
                 </a:stretch>
@@ -5483,7 +5926,7 @@
         </p:nvCxnSpPr>
         <p:spPr>
           <a:xfrm>
-            <a:off x="9328682" y="2029954"/>
+            <a:off x="9328682" y="1987840"/>
             <a:ext cx="420960" cy="0"/>
           </a:xfrm>
           <a:prstGeom prst="straightConnector1">
@@ -5528,7 +5971,7 @@
         </p:nvCxnSpPr>
         <p:spPr>
           <a:xfrm>
-            <a:off x="9328682" y="3579741"/>
+            <a:off x="9328682" y="3537627"/>
             <a:ext cx="420960" cy="0"/>
           </a:xfrm>
           <a:prstGeom prst="straightConnector1">
@@ -5572,7 +6015,7 @@
         </p:nvCxnSpPr>
         <p:spPr>
           <a:xfrm>
-            <a:off x="10838482" y="2029927"/>
+            <a:off x="10838482" y="1987813"/>
             <a:ext cx="420960" cy="0"/>
           </a:xfrm>
           <a:prstGeom prst="straightConnector1">
@@ -5617,7 +6060,7 @@
         </p:nvCxnSpPr>
         <p:spPr>
           <a:xfrm>
-            <a:off x="10850357" y="3579741"/>
+            <a:off x="10850357" y="3537627"/>
             <a:ext cx="420960" cy="0"/>
           </a:xfrm>
           <a:prstGeom prst="straightConnector1">
@@ -5659,7 +6102,7 @@
         </p:nvGrpSpPr>
         <p:grpSpPr>
           <a:xfrm>
-            <a:off x="640862" y="86497"/>
+            <a:off x="640862" y="44383"/>
             <a:ext cx="11818424" cy="1733934"/>
             <a:chOff x="640862" y="72445"/>
             <a:chExt cx="11818424" cy="2081620"/>
@@ -5767,7 +6210,7 @@
           </p:nvCxnSpPr>
           <p:spPr>
             <a:xfrm flipH="1">
-              <a:off x="12442785" y="72445"/>
+              <a:off x="12454817" y="72445"/>
               <a:ext cx="40" cy="1918401"/>
             </a:xfrm>
             <a:prstGeom prst="straightConnector1">
@@ -5810,7 +6253,7 @@
         </p:nvSpPr>
         <p:spPr>
           <a:xfrm>
-            <a:off x="7339928" y="4528341"/>
+            <a:off x="7243678" y="4762962"/>
             <a:ext cx="3749350" cy="1362929"/>
           </a:xfrm>
           <a:prstGeom prst="roundRect">
@@ -5879,7 +6322,7 @@
                   <a:schemeClr val="tx1"/>
                 </a:solidFill>
               </a:rPr>
-              <a:t>KL divergence of latent distribution from standard normal (scheduler)</a:t>
+              <a:t>3-term KL divergence loss (see Sisodia et al. (2024) for details)</a:t>
             </a:r>
           </a:p>
           <a:p>
@@ -5893,7 +6336,7 @@
                   <a:schemeClr val="tx1"/>
                 </a:solidFill>
               </a:rPr>
-              <a:t>MSE of reconstruction versus input image</a:t>
+              <a:t>L1 reconstruction loss </a:t>
             </a:r>
           </a:p>
           <a:p>
@@ -5907,7 +6350,7 @@
                   <a:schemeClr val="tx1"/>
                 </a:solidFill>
               </a:rPr>
-              <a:t>Failing to trick discriminator with reconstructed and sample images</a:t>
+              <a:t>Binary cross-entropy loss for failing to trick the discriminator</a:t>
             </a:r>
           </a:p>
         </p:txBody>
@@ -5926,8 +6369,8 @@
         </p:nvSpPr>
         <p:spPr>
           <a:xfrm>
-            <a:off x="11184174" y="5041368"/>
-            <a:ext cx="2482873" cy="849902"/>
+            <a:off x="11105147" y="5275988"/>
+            <a:ext cx="2561902" cy="849902"/>
           </a:xfrm>
           <a:prstGeom prst="roundRect">
             <a:avLst/>
@@ -5991,7 +6434,7 @@
                   <a:schemeClr val="tx1"/>
                 </a:solidFill>
               </a:rPr>
-              <a:t>Incorrectly identify real versus reconstructed or sample images</a:t>
+              <a:t>Binary cross-entropy loss for failing to detect real vs fake images</a:t>
             </a:r>
           </a:p>
           <a:p>
@@ -6004,12 +6447,47 @@
           </a:p>
         </p:txBody>
       </p:sp>
-      <p:sp>
-        <p:nvSpPr>
-          <p:cNvPr id="2" name="Rounded Rectangle 1">
+      <p:pic>
+        <p:nvPicPr>
+          <p:cNvPr id="1033" name="Picture 1032" descr="A blurry image of a car&#10;&#10;Description automatically generated">
             <a:extLst>
               <a:ext uri="{FF2B5EF4-FFF2-40B4-BE49-F238E27FC236}">
-                <a16:creationId xmlns:a16="http://schemas.microsoft.com/office/drawing/2014/main" id="{1A520538-8510-E03D-5676-C5C66302F4B3}"/>
+                <a16:creationId xmlns:a16="http://schemas.microsoft.com/office/drawing/2014/main" id="{B385D385-6ED2-12EC-E2C3-2C086B168BC8}"/>
+              </a:ext>
+            </a:extLst>
+          </p:cNvPr>
+          <p:cNvPicPr>
+            <a:picLocks noChangeAspect="1"/>
+          </p:cNvPicPr>
+          <p:nvPr/>
+        </p:nvPicPr>
+        <p:blipFill>
+          <a:blip r:embed="rId12"/>
+          <a:stretch>
+            <a:fillRect/>
+          </a:stretch>
+        </p:blipFill>
+        <p:spPr>
+          <a:xfrm>
+            <a:off x="9792254" y="1462324"/>
+            <a:ext cx="1042416" cy="1042416"/>
+          </a:xfrm>
+          <a:prstGeom prst="rect">
+            <a:avLst/>
+          </a:prstGeom>
+          <a:ln w="38100">
+            <a:solidFill>
+              <a:schemeClr val="tx1"/>
+            </a:solidFill>
+          </a:ln>
+        </p:spPr>
+      </p:pic>
+      <p:sp>
+        <p:nvSpPr>
+          <p:cNvPr id="21" name="Rounded Rectangle 20">
+            <a:extLst>
+              <a:ext uri="{FF2B5EF4-FFF2-40B4-BE49-F238E27FC236}">
+                <a16:creationId xmlns:a16="http://schemas.microsoft.com/office/drawing/2014/main" id="{FDFD5911-105E-6EA3-6E15-66546F42FCFC}"/>
               </a:ext>
             </a:extLst>
           </p:cNvPr>
@@ -6018,15 +6496,15 @@
         </p:nvSpPr>
         <p:spPr>
           <a:xfrm>
-            <a:off x="48951" y="4528341"/>
-            <a:ext cx="4478187" cy="1359620"/>
+            <a:off x="2540555" y="5275988"/>
+            <a:ext cx="3061844" cy="849902"/>
           </a:xfrm>
           <a:prstGeom prst="roundRect">
             <a:avLst/>
           </a:prstGeom>
           <a:solidFill>
             <a:schemeClr val="bg1">
-              <a:lumMod val="85000"/>
+              <a:lumMod val="75000"/>
             </a:schemeClr>
           </a:solidFill>
           <a:ln w="38100">
@@ -6055,21 +6533,21 @@
           </a:fontRef>
         </p:style>
         <p:txBody>
-          <a:bodyPr numCol="2" rtlCol="0" anchor="t"/>
+          <a:bodyPr rtlCol="0" anchor="t"/>
           <a:lstStyle/>
           <a:p>
-            <a:pPr algn="ctr"/>
+            <a:pPr marL="182563" indent="-182563" algn="ctr"/>
             <a:r>
               <a:rPr lang="en-US" sz="1200" b="1" u="sng" dirty="0">
                 <a:solidFill>
                   <a:schemeClr val="tx1"/>
                 </a:solidFill>
               </a:rPr>
-              <a:t>Parameters</a:t>
-            </a:r>
-          </a:p>
-          <a:p>
-            <a:pPr algn="ctr"/>
+              <a:t>Classifier Loss</a:t>
+            </a:r>
+          </a:p>
+          <a:p>
+            <a:pPr marL="182563" indent="-182563" algn="ctr"/>
             <a:endParaRPr lang="en-US" sz="800" u="sng" dirty="0">
               <a:solidFill>
                 <a:schemeClr val="tx1"/>
@@ -6077,146 +6555,162 @@
             </a:endParaRPr>
           </a:p>
           <a:p>
-            <a:pPr marL="120650" indent="-120650">
-              <a:buFont typeface="Arial" panose="020B0604020202020204" pitchFamily="34" charset="0"/>
-              <a:buChar char="•"/>
-            </a:pPr>
             <a:r>
               <a:rPr lang="en-US" sz="1200" dirty="0">
                 <a:solidFill>
                   <a:schemeClr val="tx1"/>
                 </a:solidFill>
               </a:rPr>
-              <a:t>Image size: 256</a:t>
-            </a:r>
-          </a:p>
-          <a:p>
-            <a:pPr marL="120650" indent="-120650">
-              <a:buFont typeface="Arial" panose="020B0604020202020204" pitchFamily="34" charset="0"/>
-              <a:buChar char="•"/>
-            </a:pPr>
-            <a:r>
-              <a:rPr lang="en-US" sz="1200" dirty="0">
-                <a:solidFill>
-                  <a:schemeClr val="tx1"/>
-                </a:solidFill>
-              </a:rPr>
-              <a:t>Kernel: 3, Stride: 2</a:t>
-            </a:r>
-          </a:p>
-          <a:p>
-            <a:pPr marL="120650" indent="-120650">
-              <a:buFont typeface="Arial" panose="020B0604020202020204" pitchFamily="34" charset="0"/>
-              <a:buChar char="•"/>
-            </a:pPr>
-            <a:r>
-              <a:rPr lang="en-US" sz="1200" dirty="0">
-                <a:solidFill>
-                  <a:schemeClr val="tx1"/>
-                </a:solidFill>
-              </a:rPr>
-              <a:t>Latent dimensions: 128</a:t>
-            </a:r>
-          </a:p>
-          <a:p>
-            <a:pPr marL="120650" indent="-120650">
-              <a:buFont typeface="Arial" panose="020B0604020202020204" pitchFamily="34" charset="0"/>
-              <a:buChar char="•"/>
-            </a:pPr>
-            <a:r>
-              <a:rPr lang="en-US" sz="1200" dirty="0">
-                <a:solidFill>
-                  <a:schemeClr val="tx1"/>
-                </a:solidFill>
-              </a:rPr>
-              <a:t>Max KLD weight (starts at 0.01): 0.75</a:t>
-            </a:r>
-          </a:p>
-          <a:p>
-            <a:pPr marL="120650" indent="-120650">
-              <a:buFont typeface="Arial" panose="020B0604020202020204" pitchFamily="34" charset="0"/>
-              <a:buChar char="•"/>
-            </a:pPr>
-            <a:r>
-              <a:rPr lang="en-US" sz="1200" dirty="0">
-                <a:solidFill>
-                  <a:schemeClr val="tx1"/>
-                </a:solidFill>
-              </a:rPr>
-              <a:t>Adversarial weight: 1.0</a:t>
-            </a:r>
-          </a:p>
-          <a:p>
-            <a:pPr marL="120650" indent="-120650">
-              <a:buFont typeface="Arial" panose="020B0604020202020204" pitchFamily="34" charset="0"/>
-              <a:buChar char="•"/>
-            </a:pPr>
-            <a:r>
-              <a:rPr lang="en-US" sz="1200" dirty="0">
-                <a:solidFill>
-                  <a:schemeClr val="tx1"/>
-                </a:solidFill>
-              </a:rPr>
-              <a:t>Reconstruction vs sample weight: 0.5</a:t>
-            </a:r>
-          </a:p>
-          <a:p>
-            <a:pPr marL="120650" indent="-120650">
-              <a:buFont typeface="Arial" panose="020B0604020202020204" pitchFamily="34" charset="0"/>
-              <a:buChar char="•"/>
-            </a:pPr>
-            <a:r>
-              <a:rPr lang="en-US" sz="1200" dirty="0">
-                <a:solidFill>
-                  <a:schemeClr val="tx1"/>
-                </a:solidFill>
-              </a:rPr>
-              <a:t>Learning rate: 0.0001</a:t>
-            </a:r>
-          </a:p>
-          <a:p>
-            <a:pPr marL="120650" indent="-120650">
-              <a:buFont typeface="Arial" panose="020B0604020202020204" pitchFamily="34" charset="0"/>
-              <a:buChar char="•"/>
-            </a:pPr>
-            <a:r>
-              <a:rPr lang="en-US" sz="1200" dirty="0">
-                <a:solidFill>
-                  <a:schemeClr val="tx1"/>
-                </a:solidFill>
-              </a:rPr>
-              <a:t>Epochs: 150</a:t>
-            </a:r>
-          </a:p>
-          <a:p>
-            <a:pPr marL="120650" indent="-120650">
-              <a:buFont typeface="Arial" panose="020B0604020202020204" pitchFamily="34" charset="0"/>
-              <a:buChar char="•"/>
-            </a:pPr>
-            <a:r>
-              <a:rPr lang="en-US" sz="1200" dirty="0">
-                <a:solidFill>
-                  <a:schemeClr val="tx1"/>
-                </a:solidFill>
-              </a:rPr>
-              <a:t>Batch size: 128</a:t>
-            </a:r>
-          </a:p>
-          <a:p>
-            <a:endParaRPr lang="en-US" sz="1200" dirty="0">
-              <a:solidFill>
-                <a:schemeClr val="tx1"/>
-              </a:solidFill>
-            </a:endParaRPr>
-          </a:p>
-        </p:txBody>
-      </p:sp>
-      <p:sp>
-        <p:nvSpPr>
-          <p:cNvPr id="8" name="Rounded Rectangle 7">
+              <a:t>Cross-entropy loss for failing to predict the correct label, summed over classifiers</a:t>
+            </a:r>
+          </a:p>
+        </p:txBody>
+      </p:sp>
+      <p:sp>
+        <p:nvSpPr>
+          <p:cNvPr id="22" name="TextBox 21">
             <a:extLst>
               <a:ext uri="{FF2B5EF4-FFF2-40B4-BE49-F238E27FC236}">
-                <a16:creationId xmlns:a16="http://schemas.microsoft.com/office/drawing/2014/main" id="{5A056DA8-BCD6-7502-A591-CC99ED1FD59F}"/>
+                <a16:creationId xmlns:a16="http://schemas.microsoft.com/office/drawing/2014/main" id="{8381A815-FAA3-5ED2-24CC-C77B5C7F7B5F}"/>
+              </a:ext>
+            </a:extLst>
+          </p:cNvPr>
+          <p:cNvSpPr txBox="1"/>
+          <p:nvPr/>
+        </p:nvSpPr>
+        <p:spPr>
+          <a:xfrm>
+            <a:off x="3839065" y="4323400"/>
+            <a:ext cx="464824" cy="400110"/>
+          </a:xfrm>
+          <a:prstGeom prst="rect">
+            <a:avLst/>
+          </a:prstGeom>
+          <a:noFill/>
+        </p:spPr>
+        <p:txBody>
+          <a:bodyPr wrap="square" rtlCol="0" anchor="ctr">
+            <a:spAutoFit/>
+          </a:bodyPr>
+          <a:lstStyle/>
+          <a:p>
+            <a:pPr algn="ctr"/>
+            <a:r>
+              <a:rPr lang="en-US" sz="2000" dirty="0"/>
+              <a:t>…</a:t>
+            </a:r>
+          </a:p>
+        </p:txBody>
+      </p:sp>
+      <p:sp>
+        <p:nvSpPr>
+          <p:cNvPr id="36" name="TextBox 35">
+            <a:extLst>
+              <a:ext uri="{FF2B5EF4-FFF2-40B4-BE49-F238E27FC236}">
+                <a16:creationId xmlns:a16="http://schemas.microsoft.com/office/drawing/2014/main" id="{A94A51F4-3097-EEDF-7680-CCE8517D4688}"/>
+              </a:ext>
+            </a:extLst>
+          </p:cNvPr>
+          <p:cNvSpPr txBox="1"/>
+          <p:nvPr/>
+        </p:nvSpPr>
+        <p:spPr>
+          <a:xfrm>
+            <a:off x="29864" y="3297127"/>
+            <a:ext cx="1248936" cy="830997"/>
+          </a:xfrm>
+          <a:prstGeom prst="rect">
+            <a:avLst/>
+          </a:prstGeom>
+          <a:noFill/>
+        </p:spPr>
+        <p:txBody>
+          <a:bodyPr wrap="square" rtlCol="0">
+            <a:spAutoFit/>
+          </a:bodyPr>
+          <a:lstStyle/>
+          <a:p>
+            <a:pPr algn="ctr"/>
+            <a:r>
+              <a:rPr lang="en-US" sz="1200" dirty="0"/>
+              <a:t>Year</a:t>
+            </a:r>
+          </a:p>
+          <a:p>
+            <a:pPr algn="ctr"/>
+            <a:r>
+              <a:rPr lang="en-US" sz="1200" dirty="0"/>
+              <a:t>Brand</a:t>
+            </a:r>
+          </a:p>
+          <a:p>
+            <a:pPr algn="ctr"/>
+            <a:r>
+              <a:rPr lang="en-US" sz="1200" dirty="0"/>
+              <a:t>Body</a:t>
+            </a:r>
+          </a:p>
+          <a:p>
+            <a:pPr algn="ctr"/>
+            <a:r>
+              <a:rPr lang="en-US" sz="1200" dirty="0"/>
+              <a:t>Door </a:t>
+            </a:r>
+          </a:p>
+        </p:txBody>
+      </p:sp>
+      <p:cxnSp>
+        <p:nvCxnSpPr>
+          <p:cNvPr id="40" name="Elbow Connector 39">
+            <a:extLst>
+              <a:ext uri="{FF2B5EF4-FFF2-40B4-BE49-F238E27FC236}">
+                <a16:creationId xmlns:a16="http://schemas.microsoft.com/office/drawing/2014/main" id="{8DD4CBB5-8A8C-29F0-F16A-AB114CCF57AC}"/>
+              </a:ext>
+            </a:extLst>
+          </p:cNvPr>
+          <p:cNvCxnSpPr>
+            <a:cxnSpLocks/>
+            <a:stCxn id="36" idx="2"/>
+            <a:endCxn id="53" idx="1"/>
+          </p:cNvCxnSpPr>
+          <p:nvPr/>
+        </p:nvCxnSpPr>
+        <p:spPr>
+          <a:xfrm rot="16200000" flipH="1">
+            <a:off x="970999" y="3811457"/>
+            <a:ext cx="488268" cy="1121602"/>
+          </a:xfrm>
+          <a:prstGeom prst="bentConnector2">
+            <a:avLst/>
+          </a:prstGeom>
+          <a:ln w="38100">
+            <a:solidFill>
+              <a:schemeClr val="tx1"/>
+            </a:solidFill>
+            <a:tailEnd type="triangle"/>
+          </a:ln>
+        </p:spPr>
+        <p:style>
+          <a:lnRef idx="2">
+            <a:schemeClr val="accent1"/>
+          </a:lnRef>
+          <a:fillRef idx="0">
+            <a:schemeClr val="accent1"/>
+          </a:fillRef>
+          <a:effectRef idx="1">
+            <a:schemeClr val="accent1"/>
+          </a:effectRef>
+          <a:fontRef idx="minor">
+            <a:schemeClr val="tx1"/>
+          </a:fontRef>
+        </p:style>
+      </p:cxnSp>
+      <p:sp>
+        <p:nvSpPr>
+          <p:cNvPr id="53" name="Rounded Rectangle 52">
+            <a:extLst>
+              <a:ext uri="{FF2B5EF4-FFF2-40B4-BE49-F238E27FC236}">
+                <a16:creationId xmlns:a16="http://schemas.microsoft.com/office/drawing/2014/main" id="{91368DD0-CE9C-3D72-7DC2-ACA5BAB85ACE}"/>
               </a:ext>
             </a:extLst>
           </p:cNvPr>
@@ -6225,23 +6719,18 @@
         </p:nvSpPr>
         <p:spPr>
           <a:xfrm>
-            <a:off x="4622036" y="4308759"/>
-            <a:ext cx="2622995" cy="1579202"/>
+            <a:off x="1775934" y="4100207"/>
+            <a:ext cx="2063130" cy="1032370"/>
           </a:xfrm>
           <a:prstGeom prst="roundRect">
             <a:avLst/>
           </a:prstGeom>
           <a:solidFill>
-            <a:schemeClr val="bg1">
-              <a:lumMod val="85000"/>
-            </a:schemeClr>
+            <a:srgbClr val="FFEC91"/>
           </a:solidFill>
           <a:ln w="38100">
             <a:solidFill>
-              <a:schemeClr val="tx1">
-                <a:lumMod val="50000"/>
-                <a:lumOff val="50000"/>
-              </a:schemeClr>
+              <a:srgbClr val="B6B168"/>
             </a:solidFill>
           </a:ln>
         </p:spPr>
@@ -6262,21 +6751,21 @@
           </a:fontRef>
         </p:style>
         <p:txBody>
-          <a:bodyPr numCol="1" rtlCol="0" anchor="t"/>
+          <a:bodyPr rtlCol="0" anchor="t"/>
           <a:lstStyle/>
           <a:p>
-            <a:pPr algn="ctr"/>
+            <a:pPr marL="182563" indent="-182563" algn="ctr"/>
             <a:r>
               <a:rPr lang="en-US" sz="1200" b="1" u="sng" dirty="0">
                 <a:solidFill>
                   <a:schemeClr val="tx1"/>
                 </a:solidFill>
               </a:rPr>
-              <a:t>Capabilities</a:t>
-            </a:r>
-          </a:p>
-          <a:p>
-            <a:pPr algn="ctr"/>
+              <a:t>Classifier #1</a:t>
+            </a:r>
+          </a:p>
+          <a:p>
+            <a:pPr marL="182563" indent="-182563" algn="ctr"/>
             <a:endParaRPr lang="en-US" sz="800" u="sng" dirty="0">
               <a:solidFill>
                 <a:schemeClr val="tx1"/>
@@ -6284,126 +6773,168 @@
             </a:endParaRPr>
           </a:p>
           <a:p>
-            <a:pPr marL="120650" indent="-120650">
-              <a:buFont typeface="Arial" panose="020B0604020202020204" pitchFamily="34" charset="0"/>
-              <a:buChar char="•"/>
-            </a:pPr>
+            <a:pPr algn="ctr"/>
             <a:r>
               <a:rPr lang="en-US" sz="1200" dirty="0">
                 <a:solidFill>
                   <a:schemeClr val="tx1"/>
                 </a:solidFill>
               </a:rPr>
-              <a:t>Reconstructions</a:t>
-            </a:r>
-          </a:p>
-          <a:p>
-            <a:pPr marL="120650" indent="-120650">
-              <a:buFont typeface="Arial" panose="020B0604020202020204" pitchFamily="34" charset="0"/>
-              <a:buChar char="•"/>
-            </a:pPr>
+              <a:t>4 dim of latent→4 FC nodes</a:t>
+            </a:r>
+          </a:p>
+          <a:p>
+            <a:pPr algn="ctr"/>
+            <a:r>
+              <a:rPr lang="en-US" sz="1200" dirty="0" err="1">
+                <a:solidFill>
+                  <a:schemeClr val="tx1"/>
+                </a:solidFill>
+              </a:rPr>
+              <a:t>ReLU</a:t>
+            </a:r>
+            <a:endParaRPr lang="en-US" sz="1200" dirty="0">
+              <a:solidFill>
+                <a:schemeClr val="tx1"/>
+              </a:solidFill>
+            </a:endParaRPr>
+          </a:p>
+          <a:p>
+            <a:pPr algn="ctr"/>
+            <a:r>
+              <a:rPr lang="en-US" sz="1200" b="1" dirty="0">
+                <a:solidFill>
+                  <a:schemeClr val="tx1"/>
+                </a:solidFill>
+              </a:rPr>
+              <a:t>Output: label 1 logits</a:t>
+            </a:r>
+          </a:p>
+          <a:p>
+            <a:pPr algn="ctr"/>
+            <a:endParaRPr lang="en-US" sz="1200" dirty="0">
+              <a:solidFill>
+                <a:schemeClr val="tx1"/>
+              </a:solidFill>
+            </a:endParaRPr>
+          </a:p>
+        </p:txBody>
+      </p:sp>
+      <p:sp>
+        <p:nvSpPr>
+          <p:cNvPr id="56" name="Rounded Rectangle 55">
+            <a:extLst>
+              <a:ext uri="{FF2B5EF4-FFF2-40B4-BE49-F238E27FC236}">
+                <a16:creationId xmlns:a16="http://schemas.microsoft.com/office/drawing/2014/main" id="{97A58D4A-3656-570D-E4D1-4F27A6F29107}"/>
+              </a:ext>
+            </a:extLst>
+          </p:cNvPr>
+          <p:cNvSpPr/>
+          <p:nvPr/>
+        </p:nvSpPr>
+        <p:spPr>
+          <a:xfrm>
+            <a:off x="4303888" y="4100207"/>
+            <a:ext cx="2063130" cy="1032370"/>
+          </a:xfrm>
+          <a:prstGeom prst="roundRect">
+            <a:avLst/>
+          </a:prstGeom>
+          <a:solidFill>
+            <a:srgbClr val="FFEC91"/>
+          </a:solidFill>
+          <a:ln w="38100">
+            <a:solidFill>
+              <a:srgbClr val="B6B168"/>
+            </a:solidFill>
+          </a:ln>
+        </p:spPr>
+        <p:style>
+          <a:lnRef idx="2">
+            <a:schemeClr val="accent1">
+              <a:shade val="15000"/>
+            </a:schemeClr>
+          </a:lnRef>
+          <a:fillRef idx="1">
+            <a:schemeClr val="accent1"/>
+          </a:fillRef>
+          <a:effectRef idx="0">
+            <a:schemeClr val="accent1"/>
+          </a:effectRef>
+          <a:fontRef idx="minor">
+            <a:schemeClr val="lt1"/>
+          </a:fontRef>
+        </p:style>
+        <p:txBody>
+          <a:bodyPr rtlCol="0" anchor="t"/>
+          <a:lstStyle/>
+          <a:p>
+            <a:pPr marL="182563" indent="-182563" algn="ctr"/>
+            <a:r>
+              <a:rPr lang="en-US" sz="1200" b="1" u="sng" dirty="0">
+                <a:solidFill>
+                  <a:schemeClr val="tx1"/>
+                </a:solidFill>
+              </a:rPr>
+              <a:t>Classifier #C</a:t>
+            </a:r>
+          </a:p>
+          <a:p>
+            <a:pPr marL="182563" indent="-182563" algn="ctr"/>
+            <a:endParaRPr lang="en-US" sz="800" u="sng" dirty="0">
+              <a:solidFill>
+                <a:schemeClr val="tx1"/>
+              </a:solidFill>
+            </a:endParaRPr>
+          </a:p>
+          <a:p>
+            <a:pPr algn="ctr"/>
             <a:r>
               <a:rPr lang="en-US" sz="1200" dirty="0">
                 <a:solidFill>
                   <a:schemeClr val="tx1"/>
                 </a:solidFill>
               </a:rPr>
-              <a:t>Store latent distribution</a:t>
-            </a:r>
-          </a:p>
-          <a:p>
-            <a:pPr marL="120650" indent="-120650">
-              <a:buFont typeface="Arial" panose="020B0604020202020204" pitchFamily="34" charset="0"/>
-              <a:buChar char="•"/>
-            </a:pPr>
-            <a:r>
-              <a:rPr lang="en-US" sz="1200" dirty="0">
+              <a:t>4 dim of latent→4 FC nodes</a:t>
+            </a:r>
+          </a:p>
+          <a:p>
+            <a:pPr algn="ctr"/>
+            <a:r>
+              <a:rPr lang="en-US" sz="1200" dirty="0" err="1">
                 <a:solidFill>
                   <a:schemeClr val="tx1"/>
                 </a:solidFill>
               </a:rPr>
-              <a:t>Generate from random samples</a:t>
-            </a:r>
-          </a:p>
-          <a:p>
-            <a:pPr marL="120650" indent="-120650">
-              <a:buFont typeface="Arial" panose="020B0604020202020204" pitchFamily="34" charset="0"/>
-              <a:buChar char="•"/>
-            </a:pPr>
-            <a:r>
-              <a:rPr lang="en-US" sz="1200" dirty="0">
+              <a:t>ReLU</a:t>
+            </a:r>
+            <a:endParaRPr lang="en-US" sz="1200" dirty="0">
+              <a:solidFill>
+                <a:schemeClr val="tx1"/>
+              </a:solidFill>
+            </a:endParaRPr>
+          </a:p>
+          <a:p>
+            <a:pPr algn="ctr"/>
+            <a:r>
+              <a:rPr lang="en-US" sz="1200" b="1" dirty="0">
                 <a:solidFill>
                   <a:schemeClr val="tx1"/>
                 </a:solidFill>
               </a:rPr>
-              <a:t>Latent traversals</a:t>
-            </a:r>
-          </a:p>
-          <a:p>
-            <a:pPr marL="120650" indent="-120650">
-              <a:buFont typeface="Arial" panose="020B0604020202020204" pitchFamily="34" charset="0"/>
-              <a:buChar char="•"/>
-            </a:pPr>
-            <a:r>
-              <a:rPr lang="en-US" sz="1200" dirty="0">
-                <a:solidFill>
-                  <a:schemeClr val="tx1"/>
-                </a:solidFill>
-              </a:rPr>
-              <a:t>Interpolations</a:t>
-            </a:r>
-          </a:p>
-          <a:p>
-            <a:pPr marL="120650" indent="-120650">
-              <a:buFont typeface="Arial" panose="020B0604020202020204" pitchFamily="34" charset="0"/>
-              <a:buChar char="•"/>
-            </a:pPr>
-            <a:r>
-              <a:rPr lang="en-US" sz="1200" dirty="0">
-                <a:solidFill>
-                  <a:schemeClr val="tx1"/>
-                </a:solidFill>
-              </a:rPr>
-              <a:t>Reconstructions over epochs</a:t>
-            </a:r>
-          </a:p>
-        </p:txBody>
-      </p:sp>
-      <p:pic>
-        <p:nvPicPr>
-          <p:cNvPr id="1033" name="Picture 1032" descr="A blurry image of a car&#10;&#10;Description automatically generated">
-            <a:extLst>
-              <a:ext uri="{FF2B5EF4-FFF2-40B4-BE49-F238E27FC236}">
-                <a16:creationId xmlns:a16="http://schemas.microsoft.com/office/drawing/2014/main" id="{B385D385-6ED2-12EC-E2C3-2C086B168BC8}"/>
-              </a:ext>
-            </a:extLst>
-          </p:cNvPr>
-          <p:cNvPicPr>
-            <a:picLocks noChangeAspect="1"/>
-          </p:cNvPicPr>
-          <p:nvPr/>
-        </p:nvPicPr>
-        <p:blipFill>
-          <a:blip r:embed="rId11"/>
-          <a:stretch>
-            <a:fillRect/>
-          </a:stretch>
-        </p:blipFill>
-        <p:spPr>
-          <a:xfrm>
-            <a:off x="9792254" y="1504438"/>
-            <a:ext cx="1042416" cy="1042416"/>
-          </a:xfrm>
-          <a:prstGeom prst="rect">
-            <a:avLst/>
-          </a:prstGeom>
-          <a:ln w="38100">
-            <a:solidFill>
-              <a:schemeClr val="tx1"/>
-            </a:solidFill>
-          </a:ln>
-        </p:spPr>
-      </p:pic>
+              <a:t>Output: label C logits</a:t>
+            </a:r>
+          </a:p>
+          <a:p>
+            <a:pPr algn="ctr"/>
+            <a:endParaRPr lang="en-US" sz="1200" dirty="0">
+              <a:solidFill>
+                <a:schemeClr val="tx1"/>
+              </a:solidFill>
+            </a:endParaRPr>
+          </a:p>
+        </p:txBody>
+      </p:sp>
     </p:spTree>
     <p:extLst>
       <p:ext uri="{BB962C8B-B14F-4D97-AF65-F5344CB8AC3E}">
@@ -6730,4 +7261,319 @@
     </a:ext>
   </a:extLst>
 </a:theme>
+</file>
+
+<file path=ppt/theme/theme2.xml><?xml version="1.0" encoding="utf-8"?>
+<a:theme xmlns:a="http://schemas.openxmlformats.org/drawingml/2006/main" name="Office Theme">
+  <a:themeElements>
+    <a:clrScheme name="Office">
+      <a:dk1>
+        <a:sysClr val="windowText" lastClr="000000"/>
+      </a:dk1>
+      <a:lt1>
+        <a:sysClr val="window" lastClr="FFFFFF"/>
+      </a:lt1>
+      <a:dk2>
+        <a:srgbClr val="0E2841"/>
+      </a:dk2>
+      <a:lt2>
+        <a:srgbClr val="E8E8E8"/>
+      </a:lt2>
+      <a:accent1>
+        <a:srgbClr val="156082"/>
+      </a:accent1>
+      <a:accent2>
+        <a:srgbClr val="E97132"/>
+      </a:accent2>
+      <a:accent3>
+        <a:srgbClr val="196B24"/>
+      </a:accent3>
+      <a:accent4>
+        <a:srgbClr val="0F9ED5"/>
+      </a:accent4>
+      <a:accent5>
+        <a:srgbClr val="A02B93"/>
+      </a:accent5>
+      <a:accent6>
+        <a:srgbClr val="4EA72E"/>
+      </a:accent6>
+      <a:hlink>
+        <a:srgbClr val="467886"/>
+      </a:hlink>
+      <a:folHlink>
+        <a:srgbClr val="96607D"/>
+      </a:folHlink>
+    </a:clrScheme>
+    <a:fontScheme name="Office">
+      <a:majorFont>
+        <a:latin typeface="Aptos Display" panose="02110004020202020204"/>
+        <a:ea typeface=""/>
+        <a:cs typeface=""/>
+        <a:font script="Jpan" typeface="游ゴシック Light"/>
+        <a:font script="Hang" typeface="맑은 고딕"/>
+        <a:font script="Hans" typeface="等线 Light"/>
+        <a:font script="Hant" typeface="新細明體"/>
+        <a:font script="Arab" typeface="Times New Roman"/>
+        <a:font script="Hebr" typeface="Times New Roman"/>
+        <a:font script="Thai" typeface="Angsana New"/>
+        <a:font script="Ethi" typeface="Nyala"/>
+        <a:font script="Beng" typeface="Vrinda"/>
+        <a:font script="Gujr" typeface="Shruti"/>
+        <a:font script="Khmr" typeface="MoolBoran"/>
+        <a:font script="Knda" typeface="Tunga"/>
+        <a:font script="Guru" typeface="Raavi"/>
+        <a:font script="Cans" typeface="Euphemia"/>
+        <a:font script="Cher" typeface="Plantagenet Cherokee"/>
+        <a:font script="Yiii" typeface="Microsoft Yi Baiti"/>
+        <a:font script="Tibt" typeface="Microsoft Himalaya"/>
+        <a:font script="Thaa" typeface="MV Boli"/>
+        <a:font script="Deva" typeface="Mangal"/>
+        <a:font script="Telu" typeface="Gautami"/>
+        <a:font script="Taml" typeface="Latha"/>
+        <a:font script="Syrc" typeface="Estrangelo Edessa"/>
+        <a:font script="Orya" typeface="Kalinga"/>
+        <a:font script="Mlym" typeface="Kartika"/>
+        <a:font script="Laoo" typeface="DokChampa"/>
+        <a:font script="Sinh" typeface="Iskoola Pota"/>
+        <a:font script="Mong" typeface="Mongolian Baiti"/>
+        <a:font script="Viet" typeface="Times New Roman"/>
+        <a:font script="Uigh" typeface="Microsoft Uighur"/>
+        <a:font script="Geor" typeface="Sylfaen"/>
+        <a:font script="Armn" typeface="Arial"/>
+        <a:font script="Bugi" typeface="Leelawadee UI"/>
+        <a:font script="Bopo" typeface="Microsoft JhengHei"/>
+        <a:font script="Java" typeface="Javanese Text"/>
+        <a:font script="Lisu" typeface="Segoe UI"/>
+        <a:font script="Mymr" typeface="Myanmar Text"/>
+        <a:font script="Nkoo" typeface="Ebrima"/>
+        <a:font script="Olck" typeface="Nirmala UI"/>
+        <a:font script="Osma" typeface="Ebrima"/>
+        <a:font script="Phag" typeface="Phagspa"/>
+        <a:font script="Syrn" typeface="Estrangelo Edessa"/>
+        <a:font script="Syrj" typeface="Estrangelo Edessa"/>
+        <a:font script="Syre" typeface="Estrangelo Edessa"/>
+        <a:font script="Sora" typeface="Nirmala UI"/>
+        <a:font script="Tale" typeface="Microsoft Tai Le"/>
+        <a:font script="Talu" typeface="Microsoft New Tai Lue"/>
+        <a:font script="Tfng" typeface="Ebrima"/>
+      </a:majorFont>
+      <a:minorFont>
+        <a:latin typeface="Aptos" panose="02110004020202020204"/>
+        <a:ea typeface=""/>
+        <a:cs typeface=""/>
+        <a:font script="Jpan" typeface="游ゴシック"/>
+        <a:font script="Hang" typeface="맑은 고딕"/>
+        <a:font script="Hans" typeface="等线"/>
+        <a:font script="Hant" typeface="新細明體"/>
+        <a:font script="Arab" typeface="Arial"/>
+        <a:font script="Hebr" typeface="Arial"/>
+        <a:font script="Thai" typeface="Cordia New"/>
+        <a:font script="Ethi" typeface="Nyala"/>
+        <a:font script="Beng" typeface="Vrinda"/>
+        <a:font script="Gujr" typeface="Shruti"/>
+        <a:font script="Khmr" typeface="DaunPenh"/>
+        <a:font script="Knda" typeface="Tunga"/>
+        <a:font script="Guru" typeface="Raavi"/>
+        <a:font script="Cans" typeface="Euphemia"/>
+        <a:font script="Cher" typeface="Plantagenet Cherokee"/>
+        <a:font script="Yiii" typeface="Microsoft Yi Baiti"/>
+        <a:font script="Tibt" typeface="Microsoft Himalaya"/>
+        <a:font script="Thaa" typeface="MV Boli"/>
+        <a:font script="Deva" typeface="Mangal"/>
+        <a:font script="Telu" typeface="Gautami"/>
+        <a:font script="Taml" typeface="Latha"/>
+        <a:font script="Syrc" typeface="Estrangelo Edessa"/>
+        <a:font script="Orya" typeface="Kalinga"/>
+        <a:font script="Mlym" typeface="Kartika"/>
+        <a:font script="Laoo" typeface="DokChampa"/>
+        <a:font script="Sinh" typeface="Iskoola Pota"/>
+        <a:font script="Mong" typeface="Mongolian Baiti"/>
+        <a:font script="Viet" typeface="Arial"/>
+        <a:font script="Uigh" typeface="Microsoft Uighur"/>
+        <a:font script="Geor" typeface="Sylfaen"/>
+        <a:font script="Armn" typeface="Arial"/>
+        <a:font script="Bugi" typeface="Leelawadee UI"/>
+        <a:font script="Bopo" typeface="Microsoft JhengHei"/>
+        <a:font script="Java" typeface="Javanese Text"/>
+        <a:font script="Lisu" typeface="Segoe UI"/>
+        <a:font script="Mymr" typeface="Myanmar Text"/>
+        <a:font script="Nkoo" typeface="Ebrima"/>
+        <a:font script="Olck" typeface="Nirmala UI"/>
+        <a:font script="Osma" typeface="Ebrima"/>
+        <a:font script="Phag" typeface="Phagspa"/>
+        <a:font script="Syrn" typeface="Estrangelo Edessa"/>
+        <a:font script="Syrj" typeface="Estrangelo Edessa"/>
+        <a:font script="Syre" typeface="Estrangelo Edessa"/>
+        <a:font script="Sora" typeface="Nirmala UI"/>
+        <a:font script="Tale" typeface="Microsoft Tai Le"/>
+        <a:font script="Talu" typeface="Microsoft New Tai Lue"/>
+        <a:font script="Tfng" typeface="Ebrima"/>
+      </a:minorFont>
+    </a:fontScheme>
+    <a:fmtScheme name="Office">
+      <a:fillStyleLst>
+        <a:solidFill>
+          <a:schemeClr val="phClr"/>
+        </a:solidFill>
+        <a:gradFill rotWithShape="1">
+          <a:gsLst>
+            <a:gs pos="0">
+              <a:schemeClr val="phClr">
+                <a:lumMod val="110000"/>
+                <a:satMod val="105000"/>
+                <a:tint val="67000"/>
+              </a:schemeClr>
+            </a:gs>
+            <a:gs pos="50000">
+              <a:schemeClr val="phClr">
+                <a:lumMod val="105000"/>
+                <a:satMod val="103000"/>
+                <a:tint val="73000"/>
+              </a:schemeClr>
+            </a:gs>
+            <a:gs pos="100000">
+              <a:schemeClr val="phClr">
+                <a:lumMod val="105000"/>
+                <a:satMod val="109000"/>
+                <a:tint val="81000"/>
+              </a:schemeClr>
+            </a:gs>
+          </a:gsLst>
+          <a:lin ang="5400000" scaled="0"/>
+        </a:gradFill>
+        <a:gradFill rotWithShape="1">
+          <a:gsLst>
+            <a:gs pos="0">
+              <a:schemeClr val="phClr">
+                <a:satMod val="103000"/>
+                <a:lumMod val="102000"/>
+                <a:tint val="94000"/>
+              </a:schemeClr>
+            </a:gs>
+            <a:gs pos="50000">
+              <a:schemeClr val="phClr">
+                <a:satMod val="110000"/>
+                <a:lumMod val="100000"/>
+                <a:shade val="100000"/>
+              </a:schemeClr>
+            </a:gs>
+            <a:gs pos="100000">
+              <a:schemeClr val="phClr">
+                <a:lumMod val="99000"/>
+                <a:satMod val="120000"/>
+                <a:shade val="78000"/>
+              </a:schemeClr>
+            </a:gs>
+          </a:gsLst>
+          <a:lin ang="5400000" scaled="0"/>
+        </a:gradFill>
+      </a:fillStyleLst>
+      <a:lnStyleLst>
+        <a:ln w="12700" cap="flat" cmpd="sng" algn="ctr">
+          <a:solidFill>
+            <a:schemeClr val="phClr"/>
+          </a:solidFill>
+          <a:prstDash val="solid"/>
+          <a:miter lim="800000"/>
+        </a:ln>
+        <a:ln w="19050" cap="flat" cmpd="sng" algn="ctr">
+          <a:solidFill>
+            <a:schemeClr val="phClr"/>
+          </a:solidFill>
+          <a:prstDash val="solid"/>
+          <a:miter lim="800000"/>
+        </a:ln>
+        <a:ln w="25400" cap="flat" cmpd="sng" algn="ctr">
+          <a:solidFill>
+            <a:schemeClr val="phClr"/>
+          </a:solidFill>
+          <a:prstDash val="solid"/>
+          <a:miter lim="800000"/>
+        </a:ln>
+      </a:lnStyleLst>
+      <a:effectStyleLst>
+        <a:effectStyle>
+          <a:effectLst/>
+        </a:effectStyle>
+        <a:effectStyle>
+          <a:effectLst/>
+        </a:effectStyle>
+        <a:effectStyle>
+          <a:effectLst>
+            <a:outerShdw blurRad="57150" dist="19050" dir="5400000" algn="ctr" rotWithShape="0">
+              <a:srgbClr val="000000">
+                <a:alpha val="63000"/>
+              </a:srgbClr>
+            </a:outerShdw>
+          </a:effectLst>
+        </a:effectStyle>
+      </a:effectStyleLst>
+      <a:bgFillStyleLst>
+        <a:solidFill>
+          <a:schemeClr val="phClr"/>
+        </a:solidFill>
+        <a:solidFill>
+          <a:schemeClr val="phClr">
+            <a:tint val="95000"/>
+            <a:satMod val="170000"/>
+          </a:schemeClr>
+        </a:solidFill>
+        <a:gradFill rotWithShape="1">
+          <a:gsLst>
+            <a:gs pos="0">
+              <a:schemeClr val="phClr">
+                <a:tint val="93000"/>
+                <a:satMod val="150000"/>
+                <a:shade val="98000"/>
+                <a:lumMod val="102000"/>
+              </a:schemeClr>
+            </a:gs>
+            <a:gs pos="50000">
+              <a:schemeClr val="phClr">
+                <a:tint val="98000"/>
+                <a:satMod val="130000"/>
+                <a:shade val="90000"/>
+                <a:lumMod val="103000"/>
+              </a:schemeClr>
+            </a:gs>
+            <a:gs pos="100000">
+              <a:schemeClr val="phClr">
+                <a:shade val="63000"/>
+                <a:satMod val="120000"/>
+              </a:schemeClr>
+            </a:gs>
+          </a:gsLst>
+          <a:lin ang="5400000" scaled="0"/>
+        </a:gradFill>
+      </a:bgFillStyleLst>
+    </a:fmtScheme>
+  </a:themeElements>
+  <a:objectDefaults>
+    <a:lnDef>
+      <a:spPr/>
+      <a:bodyPr/>
+      <a:lstStyle/>
+      <a:style>
+        <a:lnRef idx="2">
+          <a:schemeClr val="accent1"/>
+        </a:lnRef>
+        <a:fillRef idx="0">
+          <a:schemeClr val="accent1"/>
+        </a:fillRef>
+        <a:effectRef idx="1">
+          <a:schemeClr val="accent1"/>
+        </a:effectRef>
+        <a:fontRef idx="minor">
+          <a:schemeClr val="tx1"/>
+        </a:fontRef>
+      </a:style>
+    </a:lnDef>
+  </a:objectDefaults>
+  <a:extraClrSchemeLst/>
+  <a:extLst>
+    <a:ext uri="{05A4C25C-085E-4340-85A3-A5531E510DB2}">
+      <thm15:themeFamily xmlns:thm15="http://schemas.microsoft.com/office/thememl/2012/main" name="Office Theme" id="{2E142A2C-CD16-42D6-873A-C26D2A0506FA}" vid="{1BDDFF52-6CD6-40A5-AB3C-68EB2F1E4D0A}"/>
+    </a:ext>
+  </a:extLst>
+</a:theme>
 </file>
--- a/writing/motorVAEGAN-architecture.pptx
+++ b/writing/motorVAEGAN-architecture.pptx
@@ -6932,6 +6932,92 @@
                 <a:schemeClr val="tx1"/>
               </a:solidFill>
             </a:endParaRPr>
+          </a:p>
+        </p:txBody>
+      </p:sp>
+      <p:sp>
+        <p:nvSpPr>
+          <p:cNvPr id="1068" name="TextBox 1067">
+            <a:extLst>
+              <a:ext uri="{FF2B5EF4-FFF2-40B4-BE49-F238E27FC236}">
+                <a16:creationId xmlns:a16="http://schemas.microsoft.com/office/drawing/2014/main" id="{EDB36AEF-B383-6C06-B8F6-F18FF03B0261}"/>
+              </a:ext>
+            </a:extLst>
+          </p:cNvPr>
+          <p:cNvSpPr txBox="1"/>
+          <p:nvPr/>
+        </p:nvSpPr>
+        <p:spPr>
+          <a:xfrm rot="20836275">
+            <a:off x="3307032" y="3822288"/>
+            <a:ext cx="828906" cy="276999"/>
+          </a:xfrm>
+          <a:prstGeom prst="rect">
+            <a:avLst/>
+          </a:prstGeom>
+          <a:noFill/>
+        </p:spPr>
+        <p:txBody>
+          <a:bodyPr wrap="square" rtlCol="0">
+            <a:spAutoFit/>
+          </a:bodyPr>
+          <a:lstStyle/>
+          <a:p>
+            <a:pPr algn="ctr"/>
+            <a:r>
+              <a:rPr lang="en-US" sz="1200" dirty="0">
+                <a:solidFill>
+                  <a:schemeClr val="tx1">
+                    <a:lumMod val="65000"/>
+                    <a:lumOff val="35000"/>
+                  </a:schemeClr>
+                </a:solidFill>
+              </a:rPr>
+              <a:t>z-score</a:t>
+            </a:r>
+          </a:p>
+        </p:txBody>
+      </p:sp>
+      <p:sp>
+        <p:nvSpPr>
+          <p:cNvPr id="1069" name="TextBox 1068">
+            <a:extLst>
+              <a:ext uri="{FF2B5EF4-FFF2-40B4-BE49-F238E27FC236}">
+                <a16:creationId xmlns:a16="http://schemas.microsoft.com/office/drawing/2014/main" id="{7FF46940-5EEF-CF6B-CCB7-EC6B273A1699}"/>
+              </a:ext>
+            </a:extLst>
+          </p:cNvPr>
+          <p:cNvSpPr txBox="1"/>
+          <p:nvPr/>
+        </p:nvSpPr>
+        <p:spPr>
+          <a:xfrm rot="2056545">
+            <a:off x="4517251" y="3761207"/>
+            <a:ext cx="828906" cy="276999"/>
+          </a:xfrm>
+          <a:prstGeom prst="rect">
+            <a:avLst/>
+          </a:prstGeom>
+          <a:noFill/>
+        </p:spPr>
+        <p:txBody>
+          <a:bodyPr wrap="square" rtlCol="0">
+            <a:spAutoFit/>
+          </a:bodyPr>
+          <a:lstStyle/>
+          <a:p>
+            <a:pPr algn="ctr"/>
+            <a:r>
+              <a:rPr lang="en-US" sz="1200" dirty="0">
+                <a:solidFill>
+                  <a:schemeClr val="tx1">
+                    <a:lumMod val="65000"/>
+                    <a:lumOff val="35000"/>
+                  </a:schemeClr>
+                </a:solidFill>
+              </a:rPr>
+              <a:t>z-score</a:t>
+            </a:r>
           </a:p>
         </p:txBody>
       </p:sp>

--- a/writing/motorVAEGAN-architecture.pptx
+++ b/writing/motorVAEGAN-architecture.pptx
@@ -197,7 +197,7 @@
           <a:p>
             <a:fld id="{7439EC76-433C-784E-AD31-1634F419B4DC}" type="datetimeFigureOut">
               <a:rPr lang="en-US" smtClean="0"/>
-              <a:t>4/21/25</a:t>
+              <a:t>9/1/25</a:t>
             </a:fld>
             <a:endParaRPr lang="en-US"/>
           </a:p>
@@ -684,7 +684,7 @@
           <a:p>
             <a:fld id="{29EDA66B-131B-3A46-A334-2272A02F8BDA}" type="datetimeFigureOut">
               <a:rPr lang="en-US" smtClean="0"/>
-              <a:t>4/21/25</a:t>
+              <a:t>9/1/25</a:t>
             </a:fld>
             <a:endParaRPr lang="en-US"/>
           </a:p>
@@ -854,7 +854,7 @@
           <a:p>
             <a:fld id="{29EDA66B-131B-3A46-A334-2272A02F8BDA}" type="datetimeFigureOut">
               <a:rPr lang="en-US" smtClean="0"/>
-              <a:t>4/21/25</a:t>
+              <a:t>9/1/25</a:t>
             </a:fld>
             <a:endParaRPr lang="en-US"/>
           </a:p>
@@ -1034,7 +1034,7 @@
           <a:p>
             <a:fld id="{29EDA66B-131B-3A46-A334-2272A02F8BDA}" type="datetimeFigureOut">
               <a:rPr lang="en-US" smtClean="0"/>
-              <a:t>4/21/25</a:t>
+              <a:t>9/1/25</a:t>
             </a:fld>
             <a:endParaRPr lang="en-US"/>
           </a:p>
@@ -1204,7 +1204,7 @@
           <a:p>
             <a:fld id="{29EDA66B-131B-3A46-A334-2272A02F8BDA}" type="datetimeFigureOut">
               <a:rPr lang="en-US" smtClean="0"/>
-              <a:t>4/21/25</a:t>
+              <a:t>9/1/25</a:t>
             </a:fld>
             <a:endParaRPr lang="en-US"/>
           </a:p>
@@ -1450,7 +1450,7 @@
           <a:p>
             <a:fld id="{29EDA66B-131B-3A46-A334-2272A02F8BDA}" type="datetimeFigureOut">
               <a:rPr lang="en-US" smtClean="0"/>
-              <a:t>4/21/25</a:t>
+              <a:t>9/1/25</a:t>
             </a:fld>
             <a:endParaRPr lang="en-US"/>
           </a:p>
@@ -1682,7 +1682,7 @@
           <a:p>
             <a:fld id="{29EDA66B-131B-3A46-A334-2272A02F8BDA}" type="datetimeFigureOut">
               <a:rPr lang="en-US" smtClean="0"/>
-              <a:t>4/21/25</a:t>
+              <a:t>9/1/25</a:t>
             </a:fld>
             <a:endParaRPr lang="en-US"/>
           </a:p>
@@ -2049,7 +2049,7 @@
           <a:p>
             <a:fld id="{29EDA66B-131B-3A46-A334-2272A02F8BDA}" type="datetimeFigureOut">
               <a:rPr lang="en-US" smtClean="0"/>
-              <a:t>4/21/25</a:t>
+              <a:t>9/1/25</a:t>
             </a:fld>
             <a:endParaRPr lang="en-US"/>
           </a:p>
@@ -2167,7 +2167,7 @@
           <a:p>
             <a:fld id="{29EDA66B-131B-3A46-A334-2272A02F8BDA}" type="datetimeFigureOut">
               <a:rPr lang="en-US" smtClean="0"/>
-              <a:t>4/21/25</a:t>
+              <a:t>9/1/25</a:t>
             </a:fld>
             <a:endParaRPr lang="en-US"/>
           </a:p>
@@ -2262,7 +2262,7 @@
           <a:p>
             <a:fld id="{29EDA66B-131B-3A46-A334-2272A02F8BDA}" type="datetimeFigureOut">
               <a:rPr lang="en-US" smtClean="0"/>
-              <a:t>4/21/25</a:t>
+              <a:t>9/1/25</a:t>
             </a:fld>
             <a:endParaRPr lang="en-US"/>
           </a:p>
@@ -2539,7 +2539,7 @@
           <a:p>
             <a:fld id="{29EDA66B-131B-3A46-A334-2272A02F8BDA}" type="datetimeFigureOut">
               <a:rPr lang="en-US" smtClean="0"/>
-              <a:t>4/21/25</a:t>
+              <a:t>9/1/25</a:t>
             </a:fld>
             <a:endParaRPr lang="en-US"/>
           </a:p>
@@ -2796,7 +2796,7 @@
           <a:p>
             <a:fld id="{29EDA66B-131B-3A46-A334-2272A02F8BDA}" type="datetimeFigureOut">
               <a:rPr lang="en-US" smtClean="0"/>
-              <a:t>4/21/25</a:t>
+              <a:t>9/1/25</a:t>
             </a:fld>
             <a:endParaRPr lang="en-US"/>
           </a:p>
@@ -3009,7 +3009,7 @@
           <a:p>
             <a:fld id="{29EDA66B-131B-3A46-A334-2272A02F8BDA}" type="datetimeFigureOut">
               <a:rPr lang="en-US" smtClean="0"/>
-              <a:t>4/21/25</a:t>
+              <a:t>9/1/25</a:t>
             </a:fld>
             <a:endParaRPr lang="en-US"/>
           </a:p>
@@ -3416,6 +3416,98 @@
       </p:grpSpPr>
       <p:cxnSp>
         <p:nvCxnSpPr>
+          <p:cNvPr id="1024" name="Straight Connector 1023">
+            <a:extLst>
+              <a:ext uri="{FF2B5EF4-FFF2-40B4-BE49-F238E27FC236}">
+                <a16:creationId xmlns:a16="http://schemas.microsoft.com/office/drawing/2014/main" id="{DA7A6425-D3BC-131A-C51E-3948455BD3C6}"/>
+              </a:ext>
+            </a:extLst>
+          </p:cNvPr>
+          <p:cNvCxnSpPr>
+            <a:cxnSpLocks/>
+            <a:stCxn id="53" idx="2"/>
+          </p:cNvCxnSpPr>
+          <p:nvPr/>
+        </p:nvCxnSpPr>
+        <p:spPr>
+          <a:xfrm>
+            <a:off x="2849896" y="5132577"/>
+            <a:ext cx="0" cy="143186"/>
+          </a:xfrm>
+          <a:prstGeom prst="line">
+            <a:avLst/>
+          </a:prstGeom>
+          <a:ln w="38100">
+            <a:solidFill>
+              <a:schemeClr val="bg1">
+                <a:lumMod val="50000"/>
+              </a:schemeClr>
+            </a:solidFill>
+          </a:ln>
+        </p:spPr>
+        <p:style>
+          <a:lnRef idx="2">
+            <a:schemeClr val="accent1"/>
+          </a:lnRef>
+          <a:fillRef idx="0">
+            <a:schemeClr val="accent1"/>
+          </a:fillRef>
+          <a:effectRef idx="1">
+            <a:schemeClr val="accent1"/>
+          </a:effectRef>
+          <a:fontRef idx="minor">
+            <a:schemeClr val="tx1"/>
+          </a:fontRef>
+        </p:style>
+      </p:cxnSp>
+      <p:cxnSp>
+        <p:nvCxnSpPr>
+          <p:cNvPr id="43" name="Straight Connector 42">
+            <a:extLst>
+              <a:ext uri="{FF2B5EF4-FFF2-40B4-BE49-F238E27FC236}">
+                <a16:creationId xmlns:a16="http://schemas.microsoft.com/office/drawing/2014/main" id="{01543381-8E00-B7A7-D0EC-07E5F11F1CA3}"/>
+              </a:ext>
+            </a:extLst>
+          </p:cNvPr>
+          <p:cNvCxnSpPr>
+            <a:cxnSpLocks/>
+            <a:stCxn id="56" idx="2"/>
+          </p:cNvCxnSpPr>
+          <p:nvPr/>
+        </p:nvCxnSpPr>
+        <p:spPr>
+          <a:xfrm>
+            <a:off x="5293056" y="5132577"/>
+            <a:ext cx="0" cy="143186"/>
+          </a:xfrm>
+          <a:prstGeom prst="line">
+            <a:avLst/>
+          </a:prstGeom>
+          <a:ln w="38100">
+            <a:solidFill>
+              <a:schemeClr val="bg1">
+                <a:lumMod val="50000"/>
+              </a:schemeClr>
+            </a:solidFill>
+          </a:ln>
+        </p:spPr>
+        <p:style>
+          <a:lnRef idx="2">
+            <a:schemeClr val="accent1"/>
+          </a:lnRef>
+          <a:fillRef idx="0">
+            <a:schemeClr val="accent1"/>
+          </a:fillRef>
+          <a:effectRef idx="1">
+            <a:schemeClr val="accent1"/>
+          </a:effectRef>
+          <a:fontRef idx="minor">
+            <a:schemeClr val="tx1"/>
+          </a:fontRef>
+        </p:style>
+      </p:cxnSp>
+      <p:cxnSp>
+        <p:nvCxnSpPr>
           <p:cNvPr id="58" name="Straight Connector 57">
             <a:extLst>
               <a:ext uri="{FF2B5EF4-FFF2-40B4-BE49-F238E27FC236}">
@@ -3432,8 +3524,8 @@
         </p:nvCxnSpPr>
         <p:spPr>
           <a:xfrm flipH="1">
-            <a:off x="2807499" y="3663612"/>
-            <a:ext cx="1888879" cy="436595"/>
+            <a:off x="2849896" y="3663612"/>
+            <a:ext cx="1846482" cy="436595"/>
           </a:xfrm>
           <a:prstGeom prst="line">
             <a:avLst/>
@@ -3480,101 +3572,7 @@
         <p:spPr>
           <a:xfrm>
             <a:off x="4696378" y="3663612"/>
-            <a:ext cx="639075" cy="436595"/>
-          </a:xfrm>
-          <a:prstGeom prst="line">
-            <a:avLst/>
-          </a:prstGeom>
-          <a:ln w="38100">
-            <a:solidFill>
-              <a:schemeClr val="bg1">
-                <a:lumMod val="50000"/>
-              </a:schemeClr>
-            </a:solidFill>
-          </a:ln>
-        </p:spPr>
-        <p:style>
-          <a:lnRef idx="2">
-            <a:schemeClr val="accent1"/>
-          </a:lnRef>
-          <a:fillRef idx="0">
-            <a:schemeClr val="accent1"/>
-          </a:fillRef>
-          <a:effectRef idx="1">
-            <a:schemeClr val="accent1"/>
-          </a:effectRef>
-          <a:fontRef idx="minor">
-            <a:schemeClr val="tx1"/>
-          </a:fontRef>
-        </p:style>
-      </p:cxnSp>
-      <p:cxnSp>
-        <p:nvCxnSpPr>
-          <p:cNvPr id="1024" name="Straight Connector 1023">
-            <a:extLst>
-              <a:ext uri="{FF2B5EF4-FFF2-40B4-BE49-F238E27FC236}">
-                <a16:creationId xmlns:a16="http://schemas.microsoft.com/office/drawing/2014/main" id="{DA7A6425-D3BC-131A-C51E-3948455BD3C6}"/>
-              </a:ext>
-            </a:extLst>
-          </p:cNvPr>
-          <p:cNvCxnSpPr>
-            <a:cxnSpLocks/>
-            <a:stCxn id="53" idx="2"/>
-            <a:endCxn id="21" idx="0"/>
-          </p:cNvCxnSpPr>
-          <p:nvPr/>
-        </p:nvCxnSpPr>
-        <p:spPr>
-          <a:xfrm>
-            <a:off x="2807499" y="5132577"/>
-            <a:ext cx="1263978" cy="143411"/>
-          </a:xfrm>
-          <a:prstGeom prst="line">
-            <a:avLst/>
-          </a:prstGeom>
-          <a:ln w="38100">
-            <a:solidFill>
-              <a:schemeClr val="bg1">
-                <a:lumMod val="50000"/>
-              </a:schemeClr>
-            </a:solidFill>
-          </a:ln>
-        </p:spPr>
-        <p:style>
-          <a:lnRef idx="2">
-            <a:schemeClr val="accent1"/>
-          </a:lnRef>
-          <a:fillRef idx="0">
-            <a:schemeClr val="accent1"/>
-          </a:fillRef>
-          <a:effectRef idx="1">
-            <a:schemeClr val="accent1"/>
-          </a:effectRef>
-          <a:fontRef idx="minor">
-            <a:schemeClr val="tx1"/>
-          </a:fontRef>
-        </p:style>
-      </p:cxnSp>
-      <p:cxnSp>
-        <p:nvCxnSpPr>
-          <p:cNvPr id="1029" name="Straight Connector 1028">
-            <a:extLst>
-              <a:ext uri="{FF2B5EF4-FFF2-40B4-BE49-F238E27FC236}">
-                <a16:creationId xmlns:a16="http://schemas.microsoft.com/office/drawing/2014/main" id="{7BE9A4B7-2DA9-6B1B-EF8B-BD067BBD308F}"/>
-              </a:ext>
-            </a:extLst>
-          </p:cNvPr>
-          <p:cNvCxnSpPr>
-            <a:cxnSpLocks/>
-            <a:stCxn id="56" idx="2"/>
-            <a:endCxn id="21" idx="0"/>
-          </p:cNvCxnSpPr>
-          <p:nvPr/>
-        </p:nvCxnSpPr>
-        <p:spPr>
-          <a:xfrm flipH="1">
-            <a:off x="4071477" y="5132577"/>
-            <a:ext cx="1263976" cy="143411"/>
+            <a:ext cx="596678" cy="436595"/>
           </a:xfrm>
           <a:prstGeom prst="line">
             <a:avLst/>
@@ -3767,15 +3765,15 @@
           </p:cNvPr>
           <p:cNvCxnSpPr>
             <a:cxnSpLocks/>
-            <a:stCxn id="1025" idx="2"/>
+            <a:stCxn id="10" idx="2"/>
             <a:endCxn id="1086" idx="0"/>
           </p:cNvCxnSpPr>
           <p:nvPr/>
         </p:nvCxnSpPr>
         <p:spPr>
           <a:xfrm flipH="1">
-            <a:off x="9118353" y="4064323"/>
-            <a:ext cx="1200334" cy="698639"/>
+            <a:off x="9118353" y="3814646"/>
+            <a:ext cx="1242341" cy="948316"/>
           </a:xfrm>
           <a:prstGeom prst="line">
             <a:avLst/>
@@ -3850,41 +3848,6 @@
           </a:fontRef>
         </p:style>
       </p:cxnSp>
-      <p:pic>
-        <p:nvPicPr>
-          <p:cNvPr id="6" name="Picture 5" descr="A silver car with black wheels&#10;&#10;Description automatically generated">
-            <a:extLst>
-              <a:ext uri="{FF2B5EF4-FFF2-40B4-BE49-F238E27FC236}">
-                <a16:creationId xmlns:a16="http://schemas.microsoft.com/office/drawing/2014/main" id="{C34729D7-0DA0-59A9-AAD2-8BA72CEF5676}"/>
-              </a:ext>
-            </a:extLst>
-          </p:cNvPr>
-          <p:cNvPicPr>
-            <a:picLocks noChangeAspect="1"/>
-          </p:cNvPicPr>
-          <p:nvPr/>
-        </p:nvPicPr>
-        <p:blipFill>
-          <a:blip r:embed="rId3"/>
-          <a:stretch>
-            <a:fillRect/>
-          </a:stretch>
-        </p:blipFill>
-        <p:spPr>
-          <a:xfrm>
-            <a:off x="137097" y="2225538"/>
-            <a:ext cx="1039077" cy="1039077"/>
-          </a:xfrm>
-          <a:prstGeom prst="rect">
-            <a:avLst/>
-          </a:prstGeom>
-          <a:ln w="38100">
-            <a:solidFill>
-              <a:schemeClr val="tx1"/>
-            </a:solidFill>
-          </a:ln>
-        </p:spPr>
-      </p:pic>
       <mc:AlternateContent xmlns:mc="http://schemas.openxmlformats.org/markup-compatibility/2006">
         <mc:Choice xmlns:a14="http://schemas.microsoft.com/office/drawing/2010/main" Requires="a14">
           <p:sp>
@@ -3901,7 +3864,7 @@
             </p:nvSpPr>
             <p:spPr>
               <a:xfrm>
-                <a:off x="36889" y="1757238"/>
+                <a:off x="36889" y="1985843"/>
                 <a:ext cx="1248936" cy="461665"/>
               </a:xfrm>
               <a:prstGeom prst="rect">
@@ -3929,13 +3892,7 @@
                       <a:rPr lang="en-US" sz="1200" i="1">
                         <a:latin typeface="Cambria Math" panose="02040503050406030204" pitchFamily="18" charset="0"/>
                       </a:rPr>
-                      <m:t>256×256</m:t>
-                    </m:r>
-                    <m:r>
-                      <a:rPr lang="en-US" sz="1200" i="1">
-                        <a:latin typeface="Cambria Math" panose="02040503050406030204" pitchFamily="18" charset="0"/>
-                      </a:rPr>
-                      <m:t>×1</m:t>
+                      <m:t>256×256×1</m:t>
                     </m:r>
                   </m:oMath>
                 </a14:m>
@@ -3964,14 +3921,14 @@
             </p:nvSpPr>
             <p:spPr>
               <a:xfrm>
-                <a:off x="36889" y="1757238"/>
+                <a:off x="36889" y="1985843"/>
                 <a:ext cx="1248936" cy="461665"/>
               </a:xfrm>
               <a:prstGeom prst="rect">
                 <a:avLst/>
               </a:prstGeom>
               <a:blipFill>
-                <a:blip r:embed="rId4"/>
+                <a:blip r:embed="rId3"/>
                 <a:stretch>
                   <a:fillRect b="-10811"/>
                 </a:stretch>
@@ -4003,7 +3960,6 @@
           </p:cNvPr>
           <p:cNvCxnSpPr>
             <a:cxnSpLocks/>
-            <a:stCxn id="6" idx="3"/>
           </p:cNvCxnSpPr>
           <p:nvPr/>
         </p:nvCxnSpPr>
@@ -4037,8 +3993,8 @@
           </a:fontRef>
         </p:style>
       </p:cxnSp>
-      <mc:AlternateContent xmlns:mc="http://schemas.openxmlformats.org/markup-compatibility/2006">
-        <mc:Choice xmlns:a14="http://schemas.microsoft.com/office/drawing/2010/main" Requires="a14">
+      <mc:AlternateContent xmlns:mc="http://schemas.openxmlformats.org/markup-compatibility/2006" xmlns:a14="http://schemas.microsoft.com/office/drawing/2010/main">
+        <mc:Choice Requires="a14">
           <p:sp>
             <p:nvSpPr>
               <p:cNvPr id="11" name="Rounded Rectangle 10">
@@ -4177,6 +4133,7 @@
                         <a:solidFill>
                           <a:schemeClr val="tx1"/>
                         </a:solidFill>
+                        <a:latin typeface="Cambria Math" panose="02040503050406030204" pitchFamily="18" charset="0"/>
                       </a:rPr>
                       <m:t>𝟖</m:t>
                     </m:r>
@@ -4185,6 +4142,7 @@
                         <a:solidFill>
                           <a:schemeClr val="tx1"/>
                         </a:solidFill>
+                        <a:latin typeface="Cambria Math" panose="02040503050406030204" pitchFamily="18" charset="0"/>
                       </a:rPr>
                       <m:t>×</m:t>
                     </m:r>
@@ -4193,6 +4151,7 @@
                         <a:solidFill>
                           <a:schemeClr val="tx1"/>
                         </a:solidFill>
+                        <a:latin typeface="Cambria Math" panose="02040503050406030204" pitchFamily="18" charset="0"/>
                       </a:rPr>
                       <m:t>𝟖</m:t>
                     </m:r>
@@ -4201,6 +4160,7 @@
                         <a:solidFill>
                           <a:schemeClr val="tx1"/>
                         </a:solidFill>
+                        <a:latin typeface="Cambria Math" panose="02040503050406030204" pitchFamily="18" charset="0"/>
                       </a:rPr>
                       <m:t>×</m:t>
                     </m:r>
@@ -4209,6 +4169,7 @@
                         <a:solidFill>
                           <a:schemeClr val="tx1"/>
                         </a:solidFill>
+                        <a:latin typeface="Cambria Math" panose="02040503050406030204" pitchFamily="18" charset="0"/>
                       </a:rPr>
                       <m:t>𝟓𝟏𝟐</m:t>
                     </m:r>
@@ -4226,7 +4187,7 @@
             </p:txBody>
           </p:sp>
         </mc:Choice>
-        <mc:Fallback>
+        <mc:Fallback xmlns="">
           <p:sp>
             <p:nvSpPr>
               <p:cNvPr id="11" name="Rounded Rectangle 10">
@@ -4345,7 +4306,7 @@
                 <a:pPr algn="ctr"/>
                 <a:r>
                   <a:rPr lang="en-US" sz="1200" dirty="0"/>
-                  <a:t>(100 d)</a:t>
+                  <a:t>(128 d)</a:t>
                 </a:r>
               </a:p>
             </p:txBody>
@@ -4587,7 +4548,7 @@
                 <a:pPr algn="ctr"/>
                 <a:r>
                   <a:rPr lang="en-US" sz="1200" dirty="0"/>
-                  <a:t>(100 d)</a:t>
+                  <a:t>(128 d)</a:t>
                 </a:r>
               </a:p>
             </p:txBody>
@@ -4774,7 +4735,7 @@
             <a:pPr algn="ctr"/>
             <a:r>
               <a:rPr lang="en-US" sz="1200" dirty="0"/>
-              <a:t>(100 d)</a:t>
+              <a:t>(128 d)</a:t>
             </a:r>
           </a:p>
         </p:txBody>
@@ -4933,7 +4894,7 @@
             <a:pPr algn="ctr"/>
             <a:r>
               <a:rPr lang="en-US" sz="1200" dirty="0"/>
-              <a:t>(100 d)</a:t>
+              <a:t>(128 d)</a:t>
             </a:r>
           </a:p>
         </p:txBody>
@@ -5080,8 +5041,8 @@
           </a:fontRef>
         </p:style>
       </p:cxnSp>
-      <mc:AlternateContent xmlns:mc="http://schemas.openxmlformats.org/markup-compatibility/2006">
-        <mc:Choice xmlns:a14="http://schemas.microsoft.com/office/drawing/2010/main" Requires="a14">
+      <mc:AlternateContent xmlns:mc="http://schemas.openxmlformats.org/markup-compatibility/2006" xmlns:a14="http://schemas.microsoft.com/office/drawing/2010/main">
+        <mc:Choice Requires="a14">
           <p:sp>
             <p:nvSpPr>
               <p:cNvPr id="38" name="Rounded Rectangle 37">
@@ -5220,6 +5181,7 @@
                         <a:solidFill>
                           <a:schemeClr val="tx1"/>
                         </a:solidFill>
+                        <a:latin typeface="Cambria Math" panose="02040503050406030204" pitchFamily="18" charset="0"/>
                       </a:rPr>
                       <m:t>256</m:t>
                     </m:r>
@@ -5228,6 +5190,7 @@
                         <a:solidFill>
                           <a:schemeClr val="tx1"/>
                         </a:solidFill>
+                        <a:latin typeface="Cambria Math" panose="02040503050406030204" pitchFamily="18" charset="0"/>
                       </a:rPr>
                       <m:t>×256×32</m:t>
                     </m:r>
@@ -5289,6 +5252,7 @@
                         <a:solidFill>
                           <a:schemeClr val="tx1"/>
                         </a:solidFill>
+                        <a:latin typeface="Cambria Math" panose="02040503050406030204" pitchFamily="18" charset="0"/>
                       </a:rPr>
                       <m:t>𝟐𝟓𝟔</m:t>
                     </m:r>
@@ -5297,6 +5261,7 @@
                         <a:solidFill>
                           <a:schemeClr val="tx1"/>
                         </a:solidFill>
+                        <a:latin typeface="Cambria Math" panose="02040503050406030204" pitchFamily="18" charset="0"/>
                       </a:rPr>
                       <m:t>×</m:t>
                     </m:r>
@@ -5305,6 +5270,7 @@
                         <a:solidFill>
                           <a:schemeClr val="tx1"/>
                         </a:solidFill>
+                        <a:latin typeface="Cambria Math" panose="02040503050406030204" pitchFamily="18" charset="0"/>
                       </a:rPr>
                       <m:t>𝟐𝟓𝟔</m:t>
                     </m:r>
@@ -5313,6 +5279,7 @@
                         <a:solidFill>
                           <a:schemeClr val="tx1"/>
                         </a:solidFill>
+                        <a:latin typeface="Cambria Math" panose="02040503050406030204" pitchFamily="18" charset="0"/>
                       </a:rPr>
                       <m:t>×</m:t>
                     </m:r>
@@ -5321,6 +5288,7 @@
                         <a:solidFill>
                           <a:schemeClr val="tx1"/>
                         </a:solidFill>
+                        <a:latin typeface="Cambria Math" panose="02040503050406030204" pitchFamily="18" charset="0"/>
                       </a:rPr>
                       <m:t>𝟏</m:t>
                     </m:r>
@@ -5346,7 +5314,7 @@
             </p:txBody>
           </p:sp>
         </mc:Choice>
-        <mc:Fallback>
+        <mc:Fallback xmlns="">
           <p:sp>
             <p:nvSpPr>
               <p:cNvPr id="38" name="Rounded Rectangle 37">
@@ -5488,41 +5456,6 @@
           </a:fontRef>
         </p:style>
       </p:cxnSp>
-      <p:pic>
-        <p:nvPicPr>
-          <p:cNvPr id="1025" name="Picture 1024" descr="A car on a white background&#10;&#10;Description automatically generated">
-            <a:extLst>
-              <a:ext uri="{FF2B5EF4-FFF2-40B4-BE49-F238E27FC236}">
-                <a16:creationId xmlns:a16="http://schemas.microsoft.com/office/drawing/2014/main" id="{0D61CCB3-7A79-1A32-9808-63D9FCA75B58}"/>
-              </a:ext>
-            </a:extLst>
-          </p:cNvPr>
-          <p:cNvPicPr>
-            <a:picLocks noChangeAspect="1"/>
-          </p:cNvPicPr>
-          <p:nvPr/>
-        </p:nvPicPr>
-        <p:blipFill>
-          <a:blip r:embed="rId10"/>
-          <a:stretch>
-            <a:fillRect/>
-          </a:stretch>
-        </p:blipFill>
-        <p:spPr>
-          <a:xfrm>
-            <a:off x="9797479" y="3021907"/>
-            <a:ext cx="1042416" cy="1042416"/>
-          </a:xfrm>
-          <a:prstGeom prst="rect">
-            <a:avLst/>
-          </a:prstGeom>
-          <a:ln w="38100">
-            <a:solidFill>
-              <a:schemeClr val="tx1"/>
-            </a:solidFill>
-          </a:ln>
-        </p:spPr>
-      </p:pic>
       <p:sp>
         <p:nvSpPr>
           <p:cNvPr id="1026" name="TextBox 1025">
@@ -5537,7 +5470,7 @@
         </p:nvSpPr>
         <p:spPr>
           <a:xfrm>
-            <a:off x="9629684" y="1163769"/>
+            <a:off x="9629684" y="1380339"/>
             <a:ext cx="1375180" cy="276999"/>
           </a:xfrm>
           <a:prstGeom prst="rect">
@@ -5573,7 +5506,7 @@
         </p:nvSpPr>
         <p:spPr>
           <a:xfrm>
-            <a:off x="9714017" y="2719071"/>
+            <a:off x="9714017" y="2935641"/>
             <a:ext cx="1248936" cy="276999"/>
           </a:xfrm>
           <a:prstGeom prst="rect">
@@ -5639,8 +5572,8 @@
           </a:fontRef>
         </p:style>
       </p:cxnSp>
-      <mc:AlternateContent xmlns:mc="http://schemas.openxmlformats.org/markup-compatibility/2006">
-        <mc:Choice xmlns:a14="http://schemas.microsoft.com/office/drawing/2010/main" Requires="a14">
+      <mc:AlternateContent xmlns:mc="http://schemas.openxmlformats.org/markup-compatibility/2006" xmlns:a14="http://schemas.microsoft.com/office/drawing/2010/main">
+        <mc:Choice Requires="a14">
           <p:sp>
             <p:nvSpPr>
               <p:cNvPr id="1037" name="Rounded Rectangle 1036">
@@ -5860,7 +5793,7 @@
             </p:txBody>
           </p:sp>
         </mc:Choice>
-        <mc:Fallback>
+        <mc:Fallback xmlns="">
           <p:sp>
             <p:nvSpPr>
               <p:cNvPr id="1037" name="Rounded Rectangle 1036">
@@ -6103,9 +6036,9 @@
         <p:grpSpPr>
           <a:xfrm>
             <a:off x="640862" y="44383"/>
-            <a:ext cx="11818424" cy="1733934"/>
+            <a:ext cx="11818424" cy="1941460"/>
             <a:chOff x="640862" y="72445"/>
-            <a:chExt cx="11818424" cy="2081620"/>
+            <a:chExt cx="11818424" cy="2330759"/>
           </a:xfrm>
         </p:grpSpPr>
         <p:cxnSp>
@@ -6119,13 +6052,14 @@
             </p:cNvPr>
             <p:cNvCxnSpPr>
               <a:cxnSpLocks/>
+              <a:stCxn id="7" idx="0"/>
             </p:cNvCxnSpPr>
             <p:nvPr/>
           </p:nvCxnSpPr>
           <p:spPr>
             <a:xfrm flipH="1" flipV="1">
               <a:off x="656634" y="72445"/>
-              <a:ext cx="420" cy="2081620"/>
+              <a:ext cx="4723" cy="2330759"/>
             </a:xfrm>
             <a:prstGeom prst="line">
               <a:avLst/>
@@ -6447,41 +6381,6 @@
           </a:p>
         </p:txBody>
       </p:sp>
-      <p:pic>
-        <p:nvPicPr>
-          <p:cNvPr id="1033" name="Picture 1032" descr="A blurry image of a car&#10;&#10;Description automatically generated">
-            <a:extLst>
-              <a:ext uri="{FF2B5EF4-FFF2-40B4-BE49-F238E27FC236}">
-                <a16:creationId xmlns:a16="http://schemas.microsoft.com/office/drawing/2014/main" id="{B385D385-6ED2-12EC-E2C3-2C086B168BC8}"/>
-              </a:ext>
-            </a:extLst>
-          </p:cNvPr>
-          <p:cNvPicPr>
-            <a:picLocks noChangeAspect="1"/>
-          </p:cNvPicPr>
-          <p:nvPr/>
-        </p:nvPicPr>
-        <p:blipFill>
-          <a:blip r:embed="rId12"/>
-          <a:stretch>
-            <a:fillRect/>
-          </a:stretch>
-        </p:blipFill>
-        <p:spPr>
-          <a:xfrm>
-            <a:off x="9792254" y="1462324"/>
-            <a:ext cx="1042416" cy="1042416"/>
-          </a:xfrm>
-          <a:prstGeom prst="rect">
-            <a:avLst/>
-          </a:prstGeom>
-          <a:ln w="38100">
-            <a:solidFill>
-              <a:schemeClr val="tx1"/>
-            </a:solidFill>
-          </a:ln>
-        </p:spPr>
-      </p:pic>
       <p:sp>
         <p:nvSpPr>
           <p:cNvPr id="21" name="Rounded Rectangle 20">
@@ -6496,7 +6395,7 @@
         </p:nvSpPr>
         <p:spPr>
           <a:xfrm>
-            <a:off x="2540555" y="5275988"/>
+            <a:off x="1115352" y="5275988"/>
             <a:ext cx="3061844" cy="849902"/>
           </a:xfrm>
           <a:prstGeom prst="roundRect">
@@ -6568,42 +6467,6 @@
       </p:sp>
       <p:sp>
         <p:nvSpPr>
-          <p:cNvPr id="22" name="TextBox 21">
-            <a:extLst>
-              <a:ext uri="{FF2B5EF4-FFF2-40B4-BE49-F238E27FC236}">
-                <a16:creationId xmlns:a16="http://schemas.microsoft.com/office/drawing/2014/main" id="{8381A815-FAA3-5ED2-24CC-C77B5C7F7B5F}"/>
-              </a:ext>
-            </a:extLst>
-          </p:cNvPr>
-          <p:cNvSpPr txBox="1"/>
-          <p:nvPr/>
-        </p:nvSpPr>
-        <p:spPr>
-          <a:xfrm>
-            <a:off x="3839065" y="4323400"/>
-            <a:ext cx="464824" cy="400110"/>
-          </a:xfrm>
-          <a:prstGeom prst="rect">
-            <a:avLst/>
-          </a:prstGeom>
-          <a:noFill/>
-        </p:spPr>
-        <p:txBody>
-          <a:bodyPr wrap="square" rtlCol="0" anchor="ctr">
-            <a:spAutoFit/>
-          </a:bodyPr>
-          <a:lstStyle/>
-          <a:p>
-            <a:pPr algn="ctr"/>
-            <a:r>
-              <a:rPr lang="en-US" sz="2000" dirty="0"/>
-              <a:t>…</a:t>
-            </a:r>
-          </a:p>
-        </p:txBody>
-      </p:sp>
-      <p:sp>
-        <p:nvSpPr>
           <p:cNvPr id="36" name="TextBox 35">
             <a:extLst>
               <a:ext uri="{FF2B5EF4-FFF2-40B4-BE49-F238E27FC236}">
@@ -6616,8 +6479,8 @@
         </p:nvSpPr>
         <p:spPr>
           <a:xfrm>
-            <a:off x="29864" y="3297127"/>
-            <a:ext cx="1248936" cy="830997"/>
+            <a:off x="29864" y="3044460"/>
+            <a:ext cx="1248936" cy="1015663"/>
           </a:xfrm>
           <a:prstGeom prst="rect">
             <a:avLst/>
@@ -6654,7 +6517,14 @@
             <a:pPr algn="ctr"/>
             <a:r>
               <a:rPr lang="en-US" sz="1200" dirty="0"/>
-              <a:t>Door </a:t>
+              <a:t>Doors</a:t>
+            </a:r>
+          </a:p>
+          <a:p>
+            <a:pPr algn="ctr"/>
+            <a:r>
+              <a:rPr lang="en-US" sz="1200" dirty="0"/>
+              <a:t>Sales </a:t>
             </a:r>
           </a:p>
         </p:txBody>
@@ -6677,8 +6547,8 @@
         </p:nvCxnSpPr>
         <p:spPr>
           <a:xfrm rot="16200000" flipH="1">
-            <a:off x="970999" y="3811457"/>
-            <a:ext cx="488268" cy="1121602"/>
+            <a:off x="936999" y="3777456"/>
+            <a:ext cx="556269" cy="1121602"/>
           </a:xfrm>
           <a:prstGeom prst="bentConnector2">
             <a:avLst/>
@@ -6720,7 +6590,7 @@
         <p:spPr>
           <a:xfrm>
             <a:off x="1775934" y="4100207"/>
-            <a:ext cx="2063130" cy="1032370"/>
+            <a:ext cx="2147924" cy="1032370"/>
           </a:xfrm>
           <a:prstGeom prst="roundRect">
             <a:avLst/>
@@ -6761,11 +6631,8 @@
                   <a:schemeClr val="tx1"/>
                 </a:solidFill>
               </a:rPr>
-              <a:t>Classifier #1</a:t>
-            </a:r>
-          </a:p>
-          <a:p>
-            <a:pPr marL="182563" indent="-182563" algn="ctr"/>
+              <a:t>Classifiers 1-4</a:t>
+            </a:r>
             <a:endParaRPr lang="en-US" sz="800" u="sng" dirty="0">
               <a:solidFill>
                 <a:schemeClr val="tx1"/>
@@ -6780,18 +6647,26 @@
                   <a:schemeClr val="tx1"/>
                 </a:solidFill>
               </a:rPr>
-              <a:t>4 dim of latent→4 FC nodes</a:t>
+              <a:t>16d of latent→128 FC nodes→64 FC nodes</a:t>
             </a:r>
           </a:p>
           <a:p>
             <a:pPr algn="ctr"/>
+            <a:r>
+              <a:rPr lang="en-US" sz="1200" dirty="0">
+                <a:solidFill>
+                  <a:schemeClr val="tx1"/>
+                </a:solidFill>
+              </a:rPr>
+              <a:t>BatchNorm + </a:t>
+            </a:r>
             <a:r>
               <a:rPr lang="en-US" sz="1200" dirty="0" err="1">
                 <a:solidFill>
                   <a:schemeClr val="tx1"/>
                 </a:solidFill>
               </a:rPr>
-              <a:t>ReLU</a:t>
+              <a:t>LeakyReLU</a:t>
             </a:r>
             <a:endParaRPr lang="en-US" sz="1200" dirty="0">
               <a:solidFill>
@@ -6807,16 +6682,8 @@
                   <a:schemeClr val="tx1"/>
                 </a:solidFill>
               </a:rPr>
-              <a:t>Output: label 1 logits</a:t>
-            </a:r>
-          </a:p>
-          <a:p>
-            <a:pPr algn="ctr"/>
-            <a:endParaRPr lang="en-US" sz="1200" dirty="0">
-              <a:solidFill>
-                <a:schemeClr val="tx1"/>
-              </a:solidFill>
-            </a:endParaRPr>
+              <a:t>Output: labels 1-4 logits</a:t>
+            </a:r>
           </a:p>
         </p:txBody>
       </p:sp>
@@ -6834,8 +6701,8 @@
         </p:nvSpPr>
         <p:spPr>
           <a:xfrm>
-            <a:off x="4303888" y="4100207"/>
-            <a:ext cx="2063130" cy="1032370"/>
+            <a:off x="4219094" y="4100207"/>
+            <a:ext cx="2147924" cy="1032370"/>
           </a:xfrm>
           <a:prstGeom prst="roundRect">
             <a:avLst/>
@@ -6876,7 +6743,224 @@
                   <a:schemeClr val="tx1"/>
                 </a:solidFill>
               </a:rPr>
-              <a:t>Classifier #C</a:t>
+              <a:t>Sales Regression</a:t>
+            </a:r>
+            <a:endParaRPr lang="en-US" sz="800" u="sng" dirty="0">
+              <a:solidFill>
+                <a:schemeClr val="tx1"/>
+              </a:solidFill>
+            </a:endParaRPr>
+          </a:p>
+          <a:p>
+            <a:pPr algn="ctr"/>
+            <a:r>
+              <a:rPr lang="en-US" sz="1200" dirty="0">
+                <a:solidFill>
+                  <a:schemeClr val="tx1"/>
+                </a:solidFill>
+              </a:rPr>
+              <a:t>16d of latent→128 FC nodes→4 FC nodes</a:t>
+            </a:r>
+          </a:p>
+          <a:p>
+            <a:pPr algn="ctr"/>
+            <a:r>
+              <a:rPr lang="en-US" sz="1200" dirty="0">
+                <a:solidFill>
+                  <a:schemeClr val="tx1"/>
+                </a:solidFill>
+              </a:rPr>
+              <a:t>BatchNorm + ReLU</a:t>
+            </a:r>
+          </a:p>
+          <a:p>
+            <a:pPr algn="ctr"/>
+            <a:r>
+              <a:rPr lang="en-US" sz="1200" b="1" dirty="0">
+                <a:solidFill>
+                  <a:schemeClr val="tx1"/>
+                </a:solidFill>
+              </a:rPr>
+              <a:t>Output: MSE Yr1 + Yr2</a:t>
+            </a:r>
+          </a:p>
+          <a:p>
+            <a:pPr algn="ctr"/>
+            <a:endParaRPr lang="en-US" sz="1200" dirty="0">
+              <a:solidFill>
+                <a:schemeClr val="tx1"/>
+              </a:solidFill>
+            </a:endParaRPr>
+          </a:p>
+        </p:txBody>
+      </p:sp>
+      <p:pic>
+        <p:nvPicPr>
+          <p:cNvPr id="5" name="Picture 4" descr="A white car with a white background&#10;&#10;AI-generated content may be incorrect.">
+            <a:extLst>
+              <a:ext uri="{FF2B5EF4-FFF2-40B4-BE49-F238E27FC236}">
+                <a16:creationId xmlns:a16="http://schemas.microsoft.com/office/drawing/2014/main" id="{F294FB96-74B5-EDC8-00FF-B57B15C6DA35}"/>
+              </a:ext>
+            </a:extLst>
+          </p:cNvPr>
+          <p:cNvPicPr>
+            <a:picLocks noChangeAspect="1"/>
+          </p:cNvPicPr>
+          <p:nvPr/>
+        </p:nvPicPr>
+        <p:blipFill>
+          <a:blip r:embed="rId12"/>
+          <a:stretch>
+            <a:fillRect/>
+          </a:stretch>
+        </p:blipFill>
+        <p:spPr>
+          <a:xfrm>
+            <a:off x="95096" y="2469753"/>
+            <a:ext cx="1150397" cy="554408"/>
+          </a:xfrm>
+          <a:prstGeom prst="rect">
+            <a:avLst/>
+          </a:prstGeom>
+          <a:ln w="38100">
+            <a:solidFill>
+              <a:schemeClr val="tx1"/>
+            </a:solidFill>
+          </a:ln>
+        </p:spPr>
+      </p:pic>
+      <p:pic>
+        <p:nvPicPr>
+          <p:cNvPr id="23" name="Picture 22" descr="A black truck with a white background&#10;&#10;AI-generated content may be incorrect.">
+            <a:extLst>
+              <a:ext uri="{FF2B5EF4-FFF2-40B4-BE49-F238E27FC236}">
+                <a16:creationId xmlns:a16="http://schemas.microsoft.com/office/drawing/2014/main" id="{FAE59D0D-F3B0-E0C7-4CB9-D97F28AEF0A3}"/>
+              </a:ext>
+            </a:extLst>
+          </p:cNvPr>
+          <p:cNvPicPr>
+            <a:picLocks noChangeAspect="1"/>
+          </p:cNvPicPr>
+          <p:nvPr/>
+        </p:nvPicPr>
+        <p:blipFill>
+          <a:blip r:embed="rId13"/>
+          <a:stretch>
+            <a:fillRect/>
+          </a:stretch>
+        </p:blipFill>
+        <p:spPr>
+          <a:xfrm>
+            <a:off x="9795057" y="1700132"/>
+            <a:ext cx="1150397" cy="554408"/>
+          </a:xfrm>
+          <a:prstGeom prst="rect">
+            <a:avLst/>
+          </a:prstGeom>
+          <a:ln w="38100">
+            <a:solidFill>
+              <a:schemeClr val="tx1"/>
+            </a:solidFill>
+          </a:ln>
+        </p:spPr>
+      </p:pic>
+      <p:pic>
+        <p:nvPicPr>
+          <p:cNvPr id="10" name="Picture 9">
+            <a:extLst>
+              <a:ext uri="{FF2B5EF4-FFF2-40B4-BE49-F238E27FC236}">
+                <a16:creationId xmlns:a16="http://schemas.microsoft.com/office/drawing/2014/main" id="{9FB93DF4-20FA-DB61-B245-8BC48A02ED2C}"/>
+              </a:ext>
+            </a:extLst>
+          </p:cNvPr>
+          <p:cNvPicPr>
+            <a:picLocks noChangeAspect="1"/>
+          </p:cNvPicPr>
+          <p:nvPr/>
+        </p:nvPicPr>
+        <p:blipFill>
+          <a:blip r:embed="rId14"/>
+          <a:stretch>
+            <a:fillRect/>
+          </a:stretch>
+        </p:blipFill>
+        <p:spPr>
+          <a:xfrm>
+            <a:off x="9779270" y="3254238"/>
+            <a:ext cx="1162847" cy="560408"/>
+          </a:xfrm>
+          <a:prstGeom prst="rect">
+            <a:avLst/>
+          </a:prstGeom>
+          <a:ln w="38100">
+            <a:solidFill>
+              <a:schemeClr val="tx1"/>
+            </a:solidFill>
+          </a:ln>
+        </p:spPr>
+      </p:pic>
+      <p:sp>
+        <p:nvSpPr>
+          <p:cNvPr id="41" name="Rounded Rectangle 40">
+            <a:extLst>
+              <a:ext uri="{FF2B5EF4-FFF2-40B4-BE49-F238E27FC236}">
+                <a16:creationId xmlns:a16="http://schemas.microsoft.com/office/drawing/2014/main" id="{52E3F018-05FC-1AA1-6E49-3771EB2BED21}"/>
+              </a:ext>
+            </a:extLst>
+          </p:cNvPr>
+          <p:cNvSpPr/>
+          <p:nvPr/>
+        </p:nvSpPr>
+        <p:spPr>
+          <a:xfrm>
+            <a:off x="4268839" y="5275763"/>
+            <a:ext cx="2480859" cy="849902"/>
+          </a:xfrm>
+          <a:prstGeom prst="roundRect">
+            <a:avLst/>
+          </a:prstGeom>
+          <a:solidFill>
+            <a:schemeClr val="bg1">
+              <a:lumMod val="75000"/>
+            </a:schemeClr>
+          </a:solidFill>
+          <a:ln w="38100">
+            <a:solidFill>
+              <a:schemeClr val="tx1">
+                <a:lumMod val="50000"/>
+                <a:lumOff val="50000"/>
+              </a:schemeClr>
+            </a:solidFill>
+          </a:ln>
+        </p:spPr>
+        <p:style>
+          <a:lnRef idx="2">
+            <a:schemeClr val="accent1">
+              <a:shade val="15000"/>
+            </a:schemeClr>
+          </a:lnRef>
+          <a:fillRef idx="1">
+            <a:schemeClr val="accent1"/>
+          </a:fillRef>
+          <a:effectRef idx="0">
+            <a:schemeClr val="accent1"/>
+          </a:effectRef>
+          <a:fontRef idx="minor">
+            <a:schemeClr val="lt1"/>
+          </a:fontRef>
+        </p:style>
+        <p:txBody>
+          <a:bodyPr rtlCol="0" anchor="t"/>
+          <a:lstStyle/>
+          <a:p>
+            <a:pPr marL="182563" indent="-182563" algn="ctr"/>
+            <a:r>
+              <a:rPr lang="en-US" sz="1200" b="1" u="sng" dirty="0">
+                <a:solidFill>
+                  <a:schemeClr val="tx1"/>
+                </a:solidFill>
+              </a:rPr>
+              <a:t>Regression Loss</a:t>
             </a:r>
           </a:p>
           <a:p>
@@ -6888,135 +6972,13 @@
             </a:endParaRPr>
           </a:p>
           <a:p>
-            <a:pPr algn="ctr"/>
             <a:r>
               <a:rPr lang="en-US" sz="1200" dirty="0">
                 <a:solidFill>
                   <a:schemeClr val="tx1"/>
                 </a:solidFill>
               </a:rPr>
-              <a:t>4 dim of latent→4 FC nodes</a:t>
-            </a:r>
-          </a:p>
-          <a:p>
-            <a:pPr algn="ctr"/>
-            <a:r>
-              <a:rPr lang="en-US" sz="1200" dirty="0" err="1">
-                <a:solidFill>
-                  <a:schemeClr val="tx1"/>
-                </a:solidFill>
-              </a:rPr>
-              <a:t>ReLU</a:t>
-            </a:r>
-            <a:endParaRPr lang="en-US" sz="1200" dirty="0">
-              <a:solidFill>
-                <a:schemeClr val="tx1"/>
-              </a:solidFill>
-            </a:endParaRPr>
-          </a:p>
-          <a:p>
-            <a:pPr algn="ctr"/>
-            <a:r>
-              <a:rPr lang="en-US" sz="1200" b="1" dirty="0">
-                <a:solidFill>
-                  <a:schemeClr val="tx1"/>
-                </a:solidFill>
-              </a:rPr>
-              <a:t>Output: label C logits</a:t>
-            </a:r>
-          </a:p>
-          <a:p>
-            <a:pPr algn="ctr"/>
-            <a:endParaRPr lang="en-US" sz="1200" dirty="0">
-              <a:solidFill>
-                <a:schemeClr val="tx1"/>
-              </a:solidFill>
-            </a:endParaRPr>
-          </a:p>
-        </p:txBody>
-      </p:sp>
-      <p:sp>
-        <p:nvSpPr>
-          <p:cNvPr id="1068" name="TextBox 1067">
-            <a:extLst>
-              <a:ext uri="{FF2B5EF4-FFF2-40B4-BE49-F238E27FC236}">
-                <a16:creationId xmlns:a16="http://schemas.microsoft.com/office/drawing/2014/main" id="{EDB36AEF-B383-6C06-B8F6-F18FF03B0261}"/>
-              </a:ext>
-            </a:extLst>
-          </p:cNvPr>
-          <p:cNvSpPr txBox="1"/>
-          <p:nvPr/>
-        </p:nvSpPr>
-        <p:spPr>
-          <a:xfrm rot="20836275">
-            <a:off x="3307032" y="3822288"/>
-            <a:ext cx="828906" cy="276999"/>
-          </a:xfrm>
-          <a:prstGeom prst="rect">
-            <a:avLst/>
-          </a:prstGeom>
-          <a:noFill/>
-        </p:spPr>
-        <p:txBody>
-          <a:bodyPr wrap="square" rtlCol="0">
-            <a:spAutoFit/>
-          </a:bodyPr>
-          <a:lstStyle/>
-          <a:p>
-            <a:pPr algn="ctr"/>
-            <a:r>
-              <a:rPr lang="en-US" sz="1200" dirty="0">
-                <a:solidFill>
-                  <a:schemeClr val="tx1">
-                    <a:lumMod val="65000"/>
-                    <a:lumOff val="35000"/>
-                  </a:schemeClr>
-                </a:solidFill>
-              </a:rPr>
-              <a:t>z-score</a:t>
-            </a:r>
-          </a:p>
-        </p:txBody>
-      </p:sp>
-      <p:sp>
-        <p:nvSpPr>
-          <p:cNvPr id="1069" name="TextBox 1068">
-            <a:extLst>
-              <a:ext uri="{FF2B5EF4-FFF2-40B4-BE49-F238E27FC236}">
-                <a16:creationId xmlns:a16="http://schemas.microsoft.com/office/drawing/2014/main" id="{7FF46940-5EEF-CF6B-CCB7-EC6B273A1699}"/>
-              </a:ext>
-            </a:extLst>
-          </p:cNvPr>
-          <p:cNvSpPr txBox="1"/>
-          <p:nvPr/>
-        </p:nvSpPr>
-        <p:spPr>
-          <a:xfrm rot="2056545">
-            <a:off x="4517251" y="3761207"/>
-            <a:ext cx="828906" cy="276999"/>
-          </a:xfrm>
-          <a:prstGeom prst="rect">
-            <a:avLst/>
-          </a:prstGeom>
-          <a:noFill/>
-        </p:spPr>
-        <p:txBody>
-          <a:bodyPr wrap="square" rtlCol="0">
-            <a:spAutoFit/>
-          </a:bodyPr>
-          <a:lstStyle/>
-          <a:p>
-            <a:pPr algn="ctr"/>
-            <a:r>
-              <a:rPr lang="en-US" sz="1200" dirty="0">
-                <a:solidFill>
-                  <a:schemeClr val="tx1">
-                    <a:lumMod val="65000"/>
-                    <a:lumOff val="35000"/>
-                  </a:schemeClr>
-                </a:solidFill>
-              </a:rPr>
-              <a:t>z-score</a:t>
+              <a:t>Mean squared error of predicted sales for first two years</a:t>
             </a:r>
           </a:p>
         </p:txBody>
